--- a/presentations/SA_L03_SpeedLab_Lesson.pptx
+++ b/presentations/SA_L03_SpeedLab_Lesson.pptx
@@ -2,32 +2,32 @@
 <file path=ppt/presentation.xml><?xml version="1.0" encoding="utf-8"?>
 <p:presentation xmlns:p="http://schemas.openxmlformats.org/presentationml/2006/main">
   <p:sldMasterIdLst>
-    <p:sldMasterId xmlns:r="http://schemas.openxmlformats.org/officeDocument/2006/relationships" id="2147483648" r:id="R1138e6798f164ea1"/>
+    <p:sldMasterId xmlns:r="http://schemas.openxmlformats.org/officeDocument/2006/relationships" id="2147483648" r:id="R8eba46e7150c447c"/>
   </p:sldMasterIdLst>
   <p:notesMasterIdLst>
-    <p:notesMasterId xmlns:r="http://schemas.openxmlformats.org/officeDocument/2006/relationships" r:id="R43f75ecb4a1b42c6"/>
+    <p:notesMasterId xmlns:r="http://schemas.openxmlformats.org/officeDocument/2006/relationships" r:id="R5807a64f30bb4def"/>
   </p:notesMasterIdLst>
   <p:sldIdLst>
-    <p:sldId xmlns:r="http://schemas.openxmlformats.org/officeDocument/2006/relationships" id="256" r:id="R2c97bc44cc414575"/>
-    <p:sldId xmlns:r="http://schemas.openxmlformats.org/officeDocument/2006/relationships" id="257" r:id="Re56ad8bfc4774257"/>
-    <p:sldId xmlns:r="http://schemas.openxmlformats.org/officeDocument/2006/relationships" id="258" r:id="R1e8478ce05b24860"/>
-    <p:sldId xmlns:r="http://schemas.openxmlformats.org/officeDocument/2006/relationships" id="259" r:id="R96b940c910874092"/>
-    <p:sldId xmlns:r="http://schemas.openxmlformats.org/officeDocument/2006/relationships" id="260" r:id="Re4f73db80ba34021"/>
-    <p:sldId xmlns:r="http://schemas.openxmlformats.org/officeDocument/2006/relationships" id="261" r:id="R370a5f84468f4756"/>
-    <p:sldId xmlns:r="http://schemas.openxmlformats.org/officeDocument/2006/relationships" id="262" r:id="R18cf4391595d4dbe"/>
-    <p:sldId xmlns:r="http://schemas.openxmlformats.org/officeDocument/2006/relationships" id="263" r:id="R917f07938eb64add"/>
-    <p:sldId xmlns:r="http://schemas.openxmlformats.org/officeDocument/2006/relationships" id="264" r:id="R3d5c6e8900254331"/>
-    <p:sldId xmlns:r="http://schemas.openxmlformats.org/officeDocument/2006/relationships" id="265" r:id="Rcbab081153fe4add"/>
-    <p:sldId xmlns:r="http://schemas.openxmlformats.org/officeDocument/2006/relationships" id="266" r:id="R4747eae59d134538"/>
-    <p:sldId xmlns:r="http://schemas.openxmlformats.org/officeDocument/2006/relationships" id="267" r:id="Rd6a2ffac6f504060"/>
-    <p:sldId xmlns:r="http://schemas.openxmlformats.org/officeDocument/2006/relationships" id="268" r:id="Rcd974bb062524fa1"/>
-    <p:sldId xmlns:r="http://schemas.openxmlformats.org/officeDocument/2006/relationships" id="269" r:id="Ra0fa13e325a64e8a"/>
-    <p:sldId xmlns:r="http://schemas.openxmlformats.org/officeDocument/2006/relationships" id="270" r:id="R25a0ae68f0f343b7"/>
-    <p:sldId xmlns:r="http://schemas.openxmlformats.org/officeDocument/2006/relationships" id="271" r:id="R6dc3c45cfd8244b6"/>
-    <p:sldId xmlns:r="http://schemas.openxmlformats.org/officeDocument/2006/relationships" id="272" r:id="Rb70bca6f954f44d4"/>
-    <p:sldId xmlns:r="http://schemas.openxmlformats.org/officeDocument/2006/relationships" id="273" r:id="Rc5c04fc7a2084e2b"/>
-    <p:sldId xmlns:r="http://schemas.openxmlformats.org/officeDocument/2006/relationships" id="274" r:id="R158eb6cbbf934cca"/>
-    <p:sldId xmlns:r="http://schemas.openxmlformats.org/officeDocument/2006/relationships" id="275" r:id="Rd9c7ff533518494e"/>
+    <p:sldId xmlns:r="http://schemas.openxmlformats.org/officeDocument/2006/relationships" id="256" r:id="R77bbf48d419f4efd"/>
+    <p:sldId xmlns:r="http://schemas.openxmlformats.org/officeDocument/2006/relationships" id="257" r:id="Rf78f97bafcbf4ad9"/>
+    <p:sldId xmlns:r="http://schemas.openxmlformats.org/officeDocument/2006/relationships" id="258" r:id="R198d1443024743c2"/>
+    <p:sldId xmlns:r="http://schemas.openxmlformats.org/officeDocument/2006/relationships" id="259" r:id="R33d8af7423e64123"/>
+    <p:sldId xmlns:r="http://schemas.openxmlformats.org/officeDocument/2006/relationships" id="260" r:id="R262b7d895e6d4d3a"/>
+    <p:sldId xmlns:r="http://schemas.openxmlformats.org/officeDocument/2006/relationships" id="261" r:id="R8b6332cabeb94b4d"/>
+    <p:sldId xmlns:r="http://schemas.openxmlformats.org/officeDocument/2006/relationships" id="262" r:id="Ra30889e403af4c1c"/>
+    <p:sldId xmlns:r="http://schemas.openxmlformats.org/officeDocument/2006/relationships" id="263" r:id="R553ccf416afd4243"/>
+    <p:sldId xmlns:r="http://schemas.openxmlformats.org/officeDocument/2006/relationships" id="264" r:id="R4136cb1a2afb4d86"/>
+    <p:sldId xmlns:r="http://schemas.openxmlformats.org/officeDocument/2006/relationships" id="265" r:id="R07087f0bd05a4bb5"/>
+    <p:sldId xmlns:r="http://schemas.openxmlformats.org/officeDocument/2006/relationships" id="266" r:id="Rc0e546eaedbe4772"/>
+    <p:sldId xmlns:r="http://schemas.openxmlformats.org/officeDocument/2006/relationships" id="267" r:id="Rbd121a1878324df0"/>
+    <p:sldId xmlns:r="http://schemas.openxmlformats.org/officeDocument/2006/relationships" id="268" r:id="R9e18bd229ecb41d8"/>
+    <p:sldId xmlns:r="http://schemas.openxmlformats.org/officeDocument/2006/relationships" id="269" r:id="Rd8b0ceb88e244a4f"/>
+    <p:sldId xmlns:r="http://schemas.openxmlformats.org/officeDocument/2006/relationships" id="270" r:id="R4618fb5f3e864618"/>
+    <p:sldId xmlns:r="http://schemas.openxmlformats.org/officeDocument/2006/relationships" id="271" r:id="Rcb096e59860a41d8"/>
+    <p:sldId xmlns:r="http://schemas.openxmlformats.org/officeDocument/2006/relationships" id="272" r:id="R6fada1800d3540ec"/>
+    <p:sldId xmlns:r="http://schemas.openxmlformats.org/officeDocument/2006/relationships" id="273" r:id="R26304dd12cfe4570"/>
+    <p:sldId xmlns:r="http://schemas.openxmlformats.org/officeDocument/2006/relationships" id="274" r:id="R5a6f550c2a4d499b"/>
+    <p:sldId xmlns:r="http://schemas.openxmlformats.org/officeDocument/2006/relationships" id="275" r:id="R0efbd95e90fe4ba8"/>
   </p:sldIdLst>
   <p:sldSz cx="12192000" cy="6858000"/>
   <p:notesSz cx="6858000" cy="9144000"/>
@@ -611,7 +611,7 @@
           <a:lstStyle xmlns:a="http://schemas.openxmlformats.org/drawingml/2006/main"/>
           <a:p xmlns:a="http://schemas.openxmlformats.org/drawingml/2006/main">
             <a:r>
-              <a:t>Keep this slide up while the rest of the class finishes. Do not reveal station answers until pupils have completed the experience.</a:t>
+              <a:t>Use this work after the experience has been completed. Move the whole class to the plenary knowledge check near the end of the lesson. Do not reveal station answers until pupils have completed the experience.</a:t>
             </a:r>
           </a:p>
           <a:p xmlns:a="http://schemas.openxmlformats.org/drawingml/2006/main">
@@ -686,7 +686,7 @@
           <a:lstStyle xmlns:a="http://schemas.openxmlformats.org/drawingml/2006/main"/>
           <a:p xmlns:a="http://schemas.openxmlformats.org/drawingml/2006/main">
             <a:r>
-              <a:t>Show the sample answers after early finishers have attempted the two extension prompts. These are examples rather than a single required wording.</a:t>
+              <a:t>Show the sample answers after students have attempted the two application prompts. These are examples rather than a single required wording.</a:t>
             </a:r>
           </a:p>
           <a:p xmlns:a="http://schemas.openxmlformats.org/drawingml/2006/main">
@@ -1511,7 +1511,7 @@
           <a:lstStyle xmlns:a="http://schemas.openxmlformats.org/drawingml/2006/main"/>
           <a:p xmlns:a="http://schemas.openxmlformats.org/drawingml/2006/main">
             <a:r>
-              <a:t>Students write definitions from memory. These two terms are the worksheet’s exact key terminology entries, including the recap terms in Lesson 4.</a:t>
+              <a:t>These are sample answers to the exact worksheet starter question. Accept other correct examples and explanations.</a:t>
             </a:r>
           </a:p>
           <a:p xmlns:a="http://schemas.openxmlformats.org/drawingml/2006/main">
@@ -1586,7 +1586,7 @@
           <a:lstStyle xmlns:a="http://schemas.openxmlformats.org/drawingml/2006/main"/>
           <a:p xmlns:a="http://schemas.openxmlformats.org/drawingml/2006/main">
             <a:r>
-              <a:t>These are sample answers to the exact worksheet starter question. Accept other correct examples and explanations.</a:t>
+              <a:t>Students write definitions from memory. These two terms are the worksheet’s exact key terminology entries, including the recap terms in Lesson 4.</a:t>
             </a:r>
           </a:p>
           <a:p xmlns:a="http://schemas.openxmlformats.org/drawingml/2006/main">
@@ -1959,7 +1959,7 @@
   </p:cSld>
   <p:clrMap bg1="lt1" tx1="dk1" bg2="lt2" tx2="dk2" accent1="accent1" accent2="accent2" accent3="accent3" accent4="accent4" accent5="accent5" accent6="accent6" hlink="hlink" folHlink="folHlink"/>
   <p:sldLayoutIdLst>
-    <p:sldLayoutId xmlns:r="http://schemas.openxmlformats.org/officeDocument/2006/relationships" id="2147483649" r:id="R5bb5bc967a3f42bd"/>
+    <p:sldLayoutId xmlns:r="http://schemas.openxmlformats.org/officeDocument/2006/relationships" id="2147483649" r:id="R225c5957542e45e9"/>
   </p:sldLayoutIdLst>
   <p:txStyles>
     <p:titleStyle>
@@ -2492,7 +2492,7 @@
     <p:bg>
       <p:bgPr>
         <a:solidFill xmlns:a="http://schemas.openxmlformats.org/drawingml/2006/main">
-          <a:srgbClr val="FFFFFF"/>
+          <a:srgbClr val="122448"/>
         </a:solidFill>
       </p:bgPr>
     </p:bg>
@@ -2510,7 +2510,7 @@
           <p:cNvPr id="8" name="topic">
             <a:extLst xmlns:a="http://schemas.openxmlformats.org/drawingml/2006/main">
               <a:ext uri="{FF2B5EF4-FFF2-40B4-BE49-F238E27FC236}">
-                <a16:creationId xmlns:a16="http://schemas.microsoft.com/office/drawing/2014/main" id="{C3B54CD9-8EA6-45C0-B854-21DF51731391}"/>
+                <a16:creationId xmlns:a16="http://schemas.microsoft.com/office/drawing/2014/main" id="{E0FEB5F6-C7F1-4178-B7E8-25B19538A054}"/>
               </a:ext>
             </a:extLst>
           </p:cNvPr>
@@ -2522,7 +2522,7 @@
         <p:spPr>
           <a:xfrm xmlns:a="http://schemas.openxmlformats.org/drawingml/2006/main">
             <a:off x="666750" y="323850"/>
-            <a:ext cx="6667500" cy="276225"/>
+            <a:ext cx="9810750" cy="276225"/>
           </a:xfrm>
           <a:prstGeom xmlns:a="http://schemas.openxmlformats.org/drawingml/2006/main" prst="rect">
             <a:avLst/>
@@ -2541,7 +2541,7 @@
             <a:pPr>
               <a:defRPr sz="1125" b="1">
                 <a:solidFill>
-                  <a:srgbClr val="2D63FF"/>
+                  <a:srgbClr val="77D8FF"/>
                 </a:solidFill>
                 <a:latin typeface="DejaVu Sans"/>
                 <a:ea typeface="DejaVu Sans"/>
@@ -2551,13 +2551,13 @@
             <a:r>
               <a:rPr sz="1125" b="1">
                 <a:solidFill>
-                  <a:srgbClr val="2D63FF"/>
-                </a:solidFill>
-                <a:latin typeface="DejaVu Sans"/>
-                <a:ea typeface="DejaVu Sans"/>
-                <a:cs typeface="DejaVu Sans"/>
-              </a:rPr>
-              <a:t>TOPIC 1.1   LESSON 03</a:t>
+                  <a:srgbClr val="77D8FF"/>
+                </a:solidFill>
+                <a:latin typeface="DejaVu Sans"/>
+                <a:ea typeface="DejaVu Sans"/>
+                <a:cs typeface="DejaVu Sans"/>
+              </a:rPr>
+              <a:t>TOPIC 1.1   /   LESSON 03</a:t>
             </a:r>
           </a:p>
         </p:txBody>
@@ -2567,7 +2567,7 @@
           <p:cNvPr id="2" name="heading">
             <a:extLst xmlns:a="http://schemas.openxmlformats.org/drawingml/2006/main">
               <a:ext uri="{FF2B5EF4-FFF2-40B4-BE49-F238E27FC236}">
-                <a16:creationId xmlns:a16="http://schemas.microsoft.com/office/drawing/2014/main" id="{21D6340A-7B70-4E94-813C-2C1AC661B368}"/>
+                <a16:creationId xmlns:a16="http://schemas.microsoft.com/office/drawing/2014/main" id="{54F264D8-7678-4184-B0CE-B7950541EB8A}"/>
               </a:ext>
             </a:extLst>
           </p:cNvPr>
@@ -2598,7 +2598,7 @@
             <a:pPr>
               <a:defRPr sz="3225" b="1">
                 <a:solidFill>
-                  <a:srgbClr val="101828"/>
+                  <a:srgbClr val="FFFFFF"/>
                 </a:solidFill>
                 <a:latin typeface="DejaVu Sans"/>
                 <a:ea typeface="DejaVu Sans"/>
@@ -2608,7 +2608,7 @@
             <a:r>
               <a:rPr sz="3225" b="1">
                 <a:solidFill>
-                  <a:srgbClr val="101828"/>
+                  <a:srgbClr val="FFFFFF"/>
                 </a:solidFill>
                 <a:latin typeface="DejaVu Sans"/>
                 <a:ea typeface="DejaVu Sans"/>
@@ -2624,7 +2624,7 @@
           <p:cNvPr id="3" name="footer">
             <a:extLst xmlns:a="http://schemas.openxmlformats.org/drawingml/2006/main">
               <a:ext uri="{FF2B5EF4-FFF2-40B4-BE49-F238E27FC236}">
-                <a16:creationId xmlns:a16="http://schemas.microsoft.com/office/drawing/2014/main" id="{717DAA9B-504B-4853-A6FA-C30127A6219F}"/>
+                <a16:creationId xmlns:a16="http://schemas.microsoft.com/office/drawing/2014/main" id="{7EF7BBDD-7CFA-46E1-B4E5-C8C2E5697175}"/>
               </a:ext>
             </a:extLst>
           </p:cNvPr>
@@ -2655,7 +2655,7 @@
             <a:pPr>
               <a:defRPr sz="1050" b="0">
                 <a:solidFill>
-                  <a:srgbClr val="526174"/>
+                  <a:srgbClr val="D7E4F3"/>
                 </a:solidFill>
                 <a:latin typeface="DejaVu Sans"/>
                 <a:ea typeface="DejaVu Sans"/>
@@ -2665,7 +2665,7 @@
             <a:r>
               <a:rPr sz="1050" b="0">
                 <a:solidFill>
-                  <a:srgbClr val="526174"/>
+                  <a:srgbClr val="D7E4F3"/>
                 </a:solidFill>
                 <a:latin typeface="DejaVu Sans"/>
                 <a:ea typeface="DejaVu Sans"/>
@@ -2681,7 +2681,7 @@
           <p:cNvPr id="4" name="page">
             <a:extLst xmlns:a="http://schemas.openxmlformats.org/drawingml/2006/main">
               <a:ext uri="{FF2B5EF4-FFF2-40B4-BE49-F238E27FC236}">
-                <a16:creationId xmlns:a16="http://schemas.microsoft.com/office/drawing/2014/main" id="{6AAAEAC5-BC8A-4845-9B53-7F57C0C57A05}"/>
+                <a16:creationId xmlns:a16="http://schemas.microsoft.com/office/drawing/2014/main" id="{94384604-6CED-457A-874B-5147C103EAC6}"/>
               </a:ext>
             </a:extLst>
           </p:cNvPr>
@@ -2712,7 +2712,7 @@
             <a:pPr>
               <a:defRPr sz="1050" b="0">
                 <a:solidFill>
-                  <a:srgbClr val="526174"/>
+                  <a:srgbClr val="D7E4F3"/>
                 </a:solidFill>
                 <a:latin typeface="DejaVu Sans"/>
                 <a:ea typeface="DejaVu Sans"/>
@@ -2722,7 +2722,7 @@
             <a:r>
               <a:rPr sz="1050" b="0">
                 <a:solidFill>
-                  <a:srgbClr val="526174"/>
+                  <a:srgbClr val="D7E4F3"/>
                 </a:solidFill>
                 <a:latin typeface="DejaVu Sans"/>
                 <a:ea typeface="DejaVu Sans"/>
@@ -2738,7 +2738,7 @@
           <p:cNvPr id="5" name="subject">
             <a:extLst xmlns:a="http://schemas.openxmlformats.org/drawingml/2006/main">
               <a:ext uri="{FF2B5EF4-FFF2-40B4-BE49-F238E27FC236}">
-                <a16:creationId xmlns:a16="http://schemas.microsoft.com/office/drawing/2014/main" id="{EEB86324-B206-4291-ABA5-7F8846D8B47A}"/>
+                <a16:creationId xmlns:a16="http://schemas.microsoft.com/office/drawing/2014/main" id="{2F190A6B-4600-404A-8C9E-F2A0DAE9E920}"/>
               </a:ext>
             </a:extLst>
           </p:cNvPr>
@@ -2769,7 +2769,7 @@
             <a:pPr>
               <a:defRPr sz="2325" b="0">
                 <a:solidFill>
-                  <a:srgbClr val="2D63FF"/>
+                  <a:srgbClr val="77D8FF"/>
                 </a:solidFill>
                 <a:latin typeface="DejaVu Sans"/>
                 <a:ea typeface="DejaVu Sans"/>
@@ -2779,7 +2779,7 @@
             <a:r>
               <a:rPr sz="2325" b="0">
                 <a:solidFill>
-                  <a:srgbClr val="2D63FF"/>
+                  <a:srgbClr val="77D8FF"/>
                 </a:solidFill>
                 <a:latin typeface="DejaVu Sans"/>
                 <a:ea typeface="DejaVu Sans"/>
@@ -2795,7 +2795,7 @@
           <p:cNvPr id="6" name="cover-note">
             <a:extLst xmlns:a="http://schemas.openxmlformats.org/drawingml/2006/main">
               <a:ext uri="{FF2B5EF4-FFF2-40B4-BE49-F238E27FC236}">
-                <a16:creationId xmlns:a16="http://schemas.microsoft.com/office/drawing/2014/main" id="{6C19CCAA-3FDA-4C99-BA9D-4ECDF4C98397}"/>
+                <a16:creationId xmlns:a16="http://schemas.microsoft.com/office/drawing/2014/main" id="{9E087C5C-78DE-429B-B9EA-6D3107E9F452}"/>
               </a:ext>
             </a:extLst>
           </p:cNvPr>
@@ -2807,7 +2807,7 @@
         <p:spPr>
           <a:xfrm xmlns:a="http://schemas.openxmlformats.org/drawingml/2006/main">
             <a:off x="685800" y="3267075"/>
-            <a:ext cx="5143500" cy="1390650"/>
+            <a:ext cx="5143500" cy="1543050"/>
           </a:xfrm>
           <a:prstGeom xmlns:a="http://schemas.openxmlformats.org/drawingml/2006/main" prst="rect">
             <a:avLst/>
@@ -2830,7 +2830,7 @@
               <a:buNone/>
               <a:defRPr sz="1950" b="0">
                 <a:solidFill>
-                  <a:srgbClr val="101828"/>
+                  <a:srgbClr val="FFFFFF"/>
                 </a:solidFill>
                 <a:latin typeface="DejaVu Sans"/>
                 <a:ea typeface="DejaVu Sans"/>
@@ -2840,7 +2840,7 @@
             <a:r>
               <a:rPr sz="1950" b="0">
                 <a:solidFill>
-                  <a:srgbClr val="101828"/>
+                  <a:srgbClr val="FFFFFF"/>
                 </a:solidFill>
                 <a:latin typeface="DejaVu Sans"/>
                 <a:ea typeface="DejaVu Sans"/>
@@ -2857,7 +2857,7 @@
               <a:buNone/>
               <a:defRPr sz="1950" b="0">
                 <a:solidFill>
-                  <a:srgbClr val="101828"/>
+                  <a:srgbClr val="FFFFFF"/>
                 </a:solidFill>
                 <a:latin typeface="DejaVu Sans"/>
                 <a:ea typeface="DejaVu Sans"/>
@@ -2867,13 +2867,13 @@
             <a:r>
               <a:rPr sz="1950" b="0">
                 <a:solidFill>
-                  <a:srgbClr val="101828"/>
-                </a:solidFill>
-                <a:latin typeface="DejaVu Sans"/>
-                <a:ea typeface="DejaVu Sans"/>
-                <a:cs typeface="DejaVu Sans"/>
-              </a:rPr>
-              <a:t>Open the experience after the starter answers.</a:t>
+                  <a:srgbClr val="FFFFFF"/>
+                </a:solidFill>
+                <a:latin typeface="DejaVu Sans"/>
+                <a:ea typeface="DejaVu Sans"/>
+                <a:cs typeface="DejaVu Sans"/>
+              </a:rPr>
+              <a:t>Open the experience after the starter and key terms have been marked.</a:t>
             </a:r>
           </a:p>
         </p:txBody>
@@ -2887,7 +2887,7 @@
           <p:nvPr/>
         </p:nvPicPr>
         <p:blipFill>
-          <a:blip xmlns:r="http://schemas.openxmlformats.org/officeDocument/2006/relationships" xmlns:a="http://schemas.openxmlformats.org/drawingml/2006/main" r:embed="Re68ea83755e54282"/>
+          <a:blip xmlns:r="http://schemas.openxmlformats.org/officeDocument/2006/relationships" xmlns:a="http://schemas.openxmlformats.org/drawingml/2006/main" r:embed="R02c03e87ee114f35"/>
           <a:stretch xmlns:a="http://schemas.openxmlformats.org/drawingml/2006/main"/>
         </p:blipFill>
         <p:spPr>
@@ -2903,7 +2903,7 @@
     </p:spTree>
     <p:extLst>
       <p:ext uri="{BB962C8B-B14F-4D97-AF65-F5344CB8AC3E}">
-        <p14:creationId xmlns:p14="http://schemas.microsoft.com/office/powerpoint/2010/main" val="1592524496"/>
+        <p14:creationId xmlns:p14="http://schemas.microsoft.com/office/powerpoint/2010/main" val="1980537459"/>
       </p:ext>
     </p:extLst>
   </p:cSld>
@@ -2934,7 +2934,7 @@
           <p:cNvPr id="8" name="topic">
             <a:extLst xmlns:a="http://schemas.openxmlformats.org/drawingml/2006/main">
               <a:ext uri="{FF2B5EF4-FFF2-40B4-BE49-F238E27FC236}">
-                <a16:creationId xmlns:a16="http://schemas.microsoft.com/office/drawing/2014/main" id="{F1299126-26C0-4C37-9D5A-A448E0A0F54E}"/>
+                <a16:creationId xmlns:a16="http://schemas.microsoft.com/office/drawing/2014/main" id="{165C1DB6-3BE2-4112-B949-4587C64A496C}"/>
               </a:ext>
             </a:extLst>
           </p:cNvPr>
@@ -2946,7 +2946,7 @@
         <p:spPr>
           <a:xfrm xmlns:a="http://schemas.openxmlformats.org/drawingml/2006/main">
             <a:off x="666750" y="323850"/>
-            <a:ext cx="6667500" cy="276225"/>
+            <a:ext cx="9810750" cy="276225"/>
           </a:xfrm>
           <a:prstGeom xmlns:a="http://schemas.openxmlformats.org/drawingml/2006/main" prst="rect">
             <a:avLst/>
@@ -2981,7 +2981,7 @@
                 <a:ea typeface="DejaVu Sans"/>
                 <a:cs typeface="DejaVu Sans"/>
               </a:rPr>
-              <a:t>TOPIC 1.1   LESSON 03</a:t>
+              <a:t>TOPIC 1.1   /   LESSON 03   /   EXTENSION</a:t>
             </a:r>
           </a:p>
         </p:txBody>
@@ -2991,7 +2991,7 @@
           <p:cNvPr id="2" name="heading">
             <a:extLst xmlns:a="http://schemas.openxmlformats.org/drawingml/2006/main">
               <a:ext uri="{FF2B5EF4-FFF2-40B4-BE49-F238E27FC236}">
-                <a16:creationId xmlns:a16="http://schemas.microsoft.com/office/drawing/2014/main" id="{4AB517B9-156F-4A51-803F-33D5E469F243}"/>
+                <a16:creationId xmlns:a16="http://schemas.microsoft.com/office/drawing/2014/main" id="{9577CC61-AD80-4CCE-A269-7AEAE273B2BA}"/>
               </a:ext>
             </a:extLst>
           </p:cNvPr>
@@ -3038,7 +3038,7 @@
                 <a:ea typeface="DejaVu Sans"/>
                 <a:cs typeface="DejaVu Sans"/>
               </a:rPr>
-              <a:t>Finished early: apply it</a:t>
+              <a:t>Apply your learning</a:t>
             </a:r>
           </a:p>
         </p:txBody>
@@ -3048,7 +3048,7 @@
           <p:cNvPr id="3" name="footer">
             <a:extLst xmlns:a="http://schemas.openxmlformats.org/drawingml/2006/main">
               <a:ext uri="{FF2B5EF4-FFF2-40B4-BE49-F238E27FC236}">
-                <a16:creationId xmlns:a16="http://schemas.microsoft.com/office/drawing/2014/main" id="{FAD6D133-9EA0-4A1E-AE50-4DD9DAE7F04E}"/>
+                <a16:creationId xmlns:a16="http://schemas.microsoft.com/office/drawing/2014/main" id="{B563694A-137D-436D-B8CC-6DD0AEE30957}"/>
               </a:ext>
             </a:extLst>
           </p:cNvPr>
@@ -3095,7 +3095,7 @@
                 <a:ea typeface="DejaVu Sans"/>
                 <a:cs typeface="DejaVu Sans"/>
               </a:rPr>
-              <a:t>Revise 360    OCR J277 1.1 Systems architecture    Extension</a:t>
+              <a:t>Revise 360    OCR J277 1.1 Systems architecture</a:t>
             </a:r>
           </a:p>
         </p:txBody>
@@ -3105,7 +3105,7 @@
           <p:cNvPr id="4" name="page">
             <a:extLst xmlns:a="http://schemas.openxmlformats.org/drawingml/2006/main">
               <a:ext uri="{FF2B5EF4-FFF2-40B4-BE49-F238E27FC236}">
-                <a16:creationId xmlns:a16="http://schemas.microsoft.com/office/drawing/2014/main" id="{57A4A41A-8DD0-4CDE-BBE4-DA9B562EC00E}"/>
+                <a16:creationId xmlns:a16="http://schemas.microsoft.com/office/drawing/2014/main" id="{E88085FC-04A5-4CB3-9FBA-77524E7C4233}"/>
               </a:ext>
             </a:extLst>
           </p:cNvPr>
@@ -3162,7 +3162,7 @@
           <p:cNvPr id="5" name="extension-lead">
             <a:extLst xmlns:a="http://schemas.openxmlformats.org/drawingml/2006/main">
               <a:ext uri="{FF2B5EF4-FFF2-40B4-BE49-F238E27FC236}">
-                <a16:creationId xmlns:a16="http://schemas.microsoft.com/office/drawing/2014/main" id="{D206FC34-1CAE-4CD5-A7DA-6112DD534B18}"/>
+                <a16:creationId xmlns:a16="http://schemas.microsoft.com/office/drawing/2014/main" id="{88EA05DE-DE19-4C29-A7E1-F1BC41941860}"/>
               </a:ext>
             </a:extLst>
           </p:cNvPr>
@@ -3209,7 +3209,7 @@
                 <a:ea typeface="DejaVu Sans"/>
                 <a:cs typeface="DejaVu Sans"/>
               </a:rPr>
-              <a:t>After completing the experience and recording your score:</a:t>
+              <a:t>Once you have completed the experience, use your worksheet to reason further.</a:t>
             </a:r>
           </a:p>
         </p:txBody>
@@ -3219,7 +3219,7 @@
           <p:cNvPr id="6" name="extension-prompt">
             <a:extLst xmlns:a="http://schemas.openxmlformats.org/drawingml/2006/main">
               <a:ext uri="{FF2B5EF4-FFF2-40B4-BE49-F238E27FC236}">
-                <a16:creationId xmlns:a16="http://schemas.microsoft.com/office/drawing/2014/main" id="{38621F07-EBE5-479B-B315-A2CB5E9DB29A}"/>
+                <a16:creationId xmlns:a16="http://schemas.microsoft.com/office/drawing/2014/main" id="{78661F6B-7D48-4474-9938-0127CDFBDCAE}"/>
               </a:ext>
             </a:extLst>
           </p:cNvPr>
@@ -3276,7 +3276,7 @@
           <p:cNvPr id="7" name="extension-follow">
             <a:extLst xmlns:a="http://schemas.openxmlformats.org/drawingml/2006/main">
               <a:ext uri="{FF2B5EF4-FFF2-40B4-BE49-F238E27FC236}">
-                <a16:creationId xmlns:a16="http://schemas.microsoft.com/office/drawing/2014/main" id="{1B63731C-E048-4C48-B300-773C7B6D37E0}"/>
+                <a16:creationId xmlns:a16="http://schemas.microsoft.com/office/drawing/2014/main" id="{B9380705-82E1-4125-8E53-955852863F77}"/>
               </a:ext>
             </a:extLst>
           </p:cNvPr>
@@ -3331,7 +3331,7 @@
     </p:spTree>
     <p:extLst>
       <p:ext uri="{BB962C8B-B14F-4D97-AF65-F5344CB8AC3E}">
-        <p14:creationId xmlns:p14="http://schemas.microsoft.com/office/powerpoint/2010/main" val="1753365125"/>
+        <p14:creationId xmlns:p14="http://schemas.microsoft.com/office/powerpoint/2010/main" val="1338461489"/>
       </p:ext>
     </p:extLst>
   </p:cSld>
@@ -3362,7 +3362,7 @@
           <p:cNvPr id="8" name="topic">
             <a:extLst xmlns:a="http://schemas.openxmlformats.org/drawingml/2006/main">
               <a:ext uri="{FF2B5EF4-FFF2-40B4-BE49-F238E27FC236}">
-                <a16:creationId xmlns:a16="http://schemas.microsoft.com/office/drawing/2014/main" id="{1C39238C-79E4-4BB2-9C7F-32406C6AE279}"/>
+                <a16:creationId xmlns:a16="http://schemas.microsoft.com/office/drawing/2014/main" id="{64B4BEB4-2035-47BF-BAB9-3A67F77E82CB}"/>
               </a:ext>
             </a:extLst>
           </p:cNvPr>
@@ -3374,7 +3374,7 @@
         <p:spPr>
           <a:xfrm xmlns:a="http://schemas.openxmlformats.org/drawingml/2006/main">
             <a:off x="666750" y="323850"/>
-            <a:ext cx="6667500" cy="276225"/>
+            <a:ext cx="9810750" cy="276225"/>
           </a:xfrm>
           <a:prstGeom xmlns:a="http://schemas.openxmlformats.org/drawingml/2006/main" prst="rect">
             <a:avLst/>
@@ -3409,7 +3409,7 @@
                 <a:ea typeface="DejaVu Sans"/>
                 <a:cs typeface="DejaVu Sans"/>
               </a:rPr>
-              <a:t>TOPIC 1.1   LESSON 03</a:t>
+              <a:t>TOPIC 1.1   /   LESSON 03   /   EXTENSION</a:t>
             </a:r>
           </a:p>
         </p:txBody>
@@ -3419,7 +3419,7 @@
           <p:cNvPr id="2" name="heading">
             <a:extLst xmlns:a="http://schemas.openxmlformats.org/drawingml/2006/main">
               <a:ext uri="{FF2B5EF4-FFF2-40B4-BE49-F238E27FC236}">
-                <a16:creationId xmlns:a16="http://schemas.microsoft.com/office/drawing/2014/main" id="{70511E7A-5639-43C4-BE80-316D0D9067A8}"/>
+                <a16:creationId xmlns:a16="http://schemas.microsoft.com/office/drawing/2014/main" id="{B32431A3-6CF6-4FD1-AC51-5DEECC72AD3F}"/>
               </a:ext>
             </a:extLst>
           </p:cNvPr>
@@ -3466,7 +3466,7 @@
                 <a:ea typeface="DejaVu Sans"/>
                 <a:cs typeface="DejaVu Sans"/>
               </a:rPr>
-              <a:t>Finished early: check and stretch</a:t>
+              <a:t>Check and improve</a:t>
             </a:r>
           </a:p>
         </p:txBody>
@@ -3476,7 +3476,7 @@
           <p:cNvPr id="3" name="footer">
             <a:extLst xmlns:a="http://schemas.openxmlformats.org/drawingml/2006/main">
               <a:ext uri="{FF2B5EF4-FFF2-40B4-BE49-F238E27FC236}">
-                <a16:creationId xmlns:a16="http://schemas.microsoft.com/office/drawing/2014/main" id="{ECBCA492-2D3E-4228-A2C4-5F9B428D7862}"/>
+                <a16:creationId xmlns:a16="http://schemas.microsoft.com/office/drawing/2014/main" id="{E00029E7-F1D3-4E65-BC3D-1E94AF00D5AF}"/>
               </a:ext>
             </a:extLst>
           </p:cNvPr>
@@ -3523,7 +3523,7 @@
                 <a:ea typeface="DejaVu Sans"/>
                 <a:cs typeface="DejaVu Sans"/>
               </a:rPr>
-              <a:t>Revise 360    OCR J277 1.1 Systems architecture    Extension</a:t>
+              <a:t>Revise 360    OCR J277 1.1 Systems architecture</a:t>
             </a:r>
           </a:p>
         </p:txBody>
@@ -3533,7 +3533,7 @@
           <p:cNvPr id="4" name="page">
             <a:extLst xmlns:a="http://schemas.openxmlformats.org/drawingml/2006/main">
               <a:ext uri="{FF2B5EF4-FFF2-40B4-BE49-F238E27FC236}">
-                <a16:creationId xmlns:a16="http://schemas.microsoft.com/office/drawing/2014/main" id="{19596C4D-161A-426A-8135-205D72306B59}"/>
+                <a16:creationId xmlns:a16="http://schemas.microsoft.com/office/drawing/2014/main" id="{4BDCB1DA-1483-439B-8C24-19E7A1843FB7}"/>
               </a:ext>
             </a:extLst>
           </p:cNvPr>
@@ -3590,7 +3590,7 @@
           <p:cNvPr id="5" name="review">
             <a:extLst xmlns:a="http://schemas.openxmlformats.org/drawingml/2006/main">
               <a:ext uri="{FF2B5EF4-FFF2-40B4-BE49-F238E27FC236}">
-                <a16:creationId xmlns:a16="http://schemas.microsoft.com/office/drawing/2014/main" id="{914C204A-1ED2-4D69-878B-56F09B016ECF}"/>
+                <a16:creationId xmlns:a16="http://schemas.microsoft.com/office/drawing/2014/main" id="{D7E9BFAC-C1AD-4CB2-82AF-FEE61D9A5ACA}"/>
               </a:ext>
             </a:extLst>
           </p:cNvPr>
@@ -3637,7 +3637,7 @@
                 <a:ea typeface="DejaVu Sans"/>
                 <a:cs typeface="DejaVu Sans"/>
               </a:rPr>
-              <a:t>Use the worksheet and the experience feedback.</a:t>
+              <a:t>Use your worksheet notes and the experience feedback.</a:t>
             </a:r>
           </a:p>
         </p:txBody>
@@ -3647,7 +3647,7 @@
           <p:cNvPr id="6" name="extension-two">
             <a:extLst xmlns:a="http://schemas.openxmlformats.org/drawingml/2006/main">
               <a:ext uri="{FF2B5EF4-FFF2-40B4-BE49-F238E27FC236}">
-                <a16:creationId xmlns:a16="http://schemas.microsoft.com/office/drawing/2014/main" id="{C9DE08ED-6A68-4EB7-961A-991E0FEA986B}"/>
+                <a16:creationId xmlns:a16="http://schemas.microsoft.com/office/drawing/2014/main" id="{5EDBE98F-BA7A-4A7E-BAAF-72517C65030A}"/>
               </a:ext>
             </a:extLst>
           </p:cNvPr>
@@ -3704,7 +3704,7 @@
           <p:cNvPr id="7" name="handoff">
             <a:extLst xmlns:a="http://schemas.openxmlformats.org/drawingml/2006/main">
               <a:ext uri="{FF2B5EF4-FFF2-40B4-BE49-F238E27FC236}">
-                <a16:creationId xmlns:a16="http://schemas.microsoft.com/office/drawing/2014/main" id="{CDD5D111-477B-4DAF-A002-BB44CD0DAC3A}"/>
+                <a16:creationId xmlns:a16="http://schemas.microsoft.com/office/drawing/2014/main" id="{59F8B6BC-2507-41A7-BFD4-B0EA9250B06B}"/>
               </a:ext>
             </a:extLst>
           </p:cNvPr>
@@ -3751,7 +3751,7 @@
                 <a:ea typeface="DejaVu Sans"/>
                 <a:cs typeface="DejaVu Sans"/>
               </a:rPr>
-              <a:t>When the class is ready, close the experience and answer the plenary exam quiz.</a:t>
+              <a:t>Near the end of the lesson, close the experience for the plenary knowledge check.</a:t>
             </a:r>
           </a:p>
         </p:txBody>
@@ -3759,7 +3759,7 @@
     </p:spTree>
     <p:extLst>
       <p:ext uri="{BB962C8B-B14F-4D97-AF65-F5344CB8AC3E}">
-        <p14:creationId xmlns:p14="http://schemas.microsoft.com/office/powerpoint/2010/main" val="1993027765"/>
+        <p14:creationId xmlns:p14="http://schemas.microsoft.com/office/powerpoint/2010/main" val="111714610"/>
       </p:ext>
     </p:extLst>
   </p:cSld>
@@ -3772,7 +3772,7 @@
     <p:bg>
       <p:bgPr>
         <a:solidFill xmlns:a="http://schemas.openxmlformats.org/drawingml/2006/main">
-          <a:srgbClr val="FFFFFF"/>
+          <a:srgbClr val="EAF3FF"/>
         </a:solidFill>
       </p:bgPr>
     </p:bg>
@@ -3790,7 +3790,7 @@
           <p:cNvPr id="10" name="topic">
             <a:extLst xmlns:a="http://schemas.openxmlformats.org/drawingml/2006/main">
               <a:ext uri="{FF2B5EF4-FFF2-40B4-BE49-F238E27FC236}">
-                <a16:creationId xmlns:a16="http://schemas.microsoft.com/office/drawing/2014/main" id="{C58A7890-5C9B-4955-84CA-D726FFD505ED}"/>
+                <a16:creationId xmlns:a16="http://schemas.microsoft.com/office/drawing/2014/main" id="{4DCFEB63-C2A3-40D4-B414-07B1A88B3CC6}"/>
               </a:ext>
             </a:extLst>
           </p:cNvPr>
@@ -3802,7 +3802,7 @@
         <p:spPr>
           <a:xfrm xmlns:a="http://schemas.openxmlformats.org/drawingml/2006/main">
             <a:off x="666750" y="323850"/>
-            <a:ext cx="6667500" cy="276225"/>
+            <a:ext cx="9810750" cy="276225"/>
           </a:xfrm>
           <a:prstGeom xmlns:a="http://schemas.openxmlformats.org/drawingml/2006/main" prst="rect">
             <a:avLst/>
@@ -3837,7 +3837,7 @@
                 <a:ea typeface="DejaVu Sans"/>
                 <a:cs typeface="DejaVu Sans"/>
               </a:rPr>
-              <a:t>TOPIC 1.1   LESSON 03</a:t>
+              <a:t>TOPIC 1.1   /   LESSON 03   /   CHECK</a:t>
             </a:r>
           </a:p>
         </p:txBody>
@@ -3847,7 +3847,7 @@
           <p:cNvPr id="2" name="heading">
             <a:extLst xmlns:a="http://schemas.openxmlformats.org/drawingml/2006/main">
               <a:ext uri="{FF2B5EF4-FFF2-40B4-BE49-F238E27FC236}">
-                <a16:creationId xmlns:a16="http://schemas.microsoft.com/office/drawing/2014/main" id="{2DEBE5CF-2A8F-4CE5-81E6-9693C9A79048}"/>
+                <a16:creationId xmlns:a16="http://schemas.microsoft.com/office/drawing/2014/main" id="{0D3B56D8-2C3F-4734-A1AA-870253D78D95}"/>
               </a:ext>
             </a:extLst>
           </p:cNvPr>
@@ -3894,7 +3894,7 @@
                 <a:ea typeface="DejaVu Sans"/>
                 <a:cs typeface="DejaVu Sans"/>
               </a:rPr>
-              <a:t>Finished early: sample answers</a:t>
+              <a:t>Application: sample answers</a:t>
             </a:r>
           </a:p>
         </p:txBody>
@@ -3904,7 +3904,7 @@
           <p:cNvPr id="3" name="footer">
             <a:extLst xmlns:a="http://schemas.openxmlformats.org/drawingml/2006/main">
               <a:ext uri="{FF2B5EF4-FFF2-40B4-BE49-F238E27FC236}">
-                <a16:creationId xmlns:a16="http://schemas.microsoft.com/office/drawing/2014/main" id="{1509A8F9-35F8-4DE7-8E6E-F548161BB32E}"/>
+                <a16:creationId xmlns:a16="http://schemas.microsoft.com/office/drawing/2014/main" id="{11346999-4E11-4B9E-9AC3-33F4A716C974}"/>
               </a:ext>
             </a:extLst>
           </p:cNvPr>
@@ -3951,7 +3951,7 @@
                 <a:ea typeface="DejaVu Sans"/>
                 <a:cs typeface="DejaVu Sans"/>
               </a:rPr>
-              <a:t>Revise 360    OCR J277 1.1 Systems architecture    Check</a:t>
+              <a:t>Revise 360    OCR J277 1.1 Systems architecture</a:t>
             </a:r>
           </a:p>
         </p:txBody>
@@ -3961,7 +3961,7 @@
           <p:cNvPr id="4" name="page">
             <a:extLst xmlns:a="http://schemas.openxmlformats.org/drawingml/2006/main">
               <a:ext uri="{FF2B5EF4-FFF2-40B4-BE49-F238E27FC236}">
-                <a16:creationId xmlns:a16="http://schemas.microsoft.com/office/drawing/2014/main" id="{D766BC5D-B908-451E-A9CF-A862D6D098F5}"/>
+                <a16:creationId xmlns:a16="http://schemas.microsoft.com/office/drawing/2014/main" id="{90358F3C-94D5-43D5-9D7D-5CB357A63D73}"/>
               </a:ext>
             </a:extLst>
           </p:cNvPr>
@@ -4018,7 +4018,7 @@
           <p:cNvPr id="5" name="extension-check">
             <a:extLst xmlns:a="http://schemas.openxmlformats.org/drawingml/2006/main">
               <a:ext uri="{FF2B5EF4-FFF2-40B4-BE49-F238E27FC236}">
-                <a16:creationId xmlns:a16="http://schemas.microsoft.com/office/drawing/2014/main" id="{9BED3022-6DD9-4B8F-A4DE-6B333D126CE2}"/>
+                <a16:creationId xmlns:a16="http://schemas.microsoft.com/office/drawing/2014/main" id="{0CBF76D5-5ABC-4E74-908D-D9398C50D95C}"/>
               </a:ext>
             </a:extLst>
           </p:cNvPr>
@@ -4075,7 +4075,7 @@
           <p:cNvPr id="6" name="answer-application">
             <a:extLst xmlns:a="http://schemas.openxmlformats.org/drawingml/2006/main">
               <a:ext uri="{FF2B5EF4-FFF2-40B4-BE49-F238E27FC236}">
-                <a16:creationId xmlns:a16="http://schemas.microsoft.com/office/drawing/2014/main" id="{D38C45C2-3384-4988-A09D-2F1E34F512D9}"/>
+                <a16:creationId xmlns:a16="http://schemas.microsoft.com/office/drawing/2014/main" id="{A9C005EB-42B3-4000-A0C5-505CE910524A}"/>
               </a:ext>
             </a:extLst>
           </p:cNvPr>
@@ -4132,7 +4132,7 @@
           <p:cNvPr id="7" name="answer-application-body">
             <a:extLst xmlns:a="http://schemas.openxmlformats.org/drawingml/2006/main">
               <a:ext uri="{FF2B5EF4-FFF2-40B4-BE49-F238E27FC236}">
-                <a16:creationId xmlns:a16="http://schemas.microsoft.com/office/drawing/2014/main" id="{4EEF5D06-B9B2-4CCC-B175-24669D7DC74B}"/>
+                <a16:creationId xmlns:a16="http://schemas.microsoft.com/office/drawing/2014/main" id="{F6FCCEA6-389A-48E1-BC20-0236E9F1840B}"/>
               </a:ext>
             </a:extLst>
           </p:cNvPr>
@@ -4189,7 +4189,7 @@
           <p:cNvPr id="8" name="answer-stretch">
             <a:extLst xmlns:a="http://schemas.openxmlformats.org/drawingml/2006/main">
               <a:ext uri="{FF2B5EF4-FFF2-40B4-BE49-F238E27FC236}">
-                <a16:creationId xmlns:a16="http://schemas.microsoft.com/office/drawing/2014/main" id="{08036E6E-FDCD-4EC1-AE3F-33FD90E46F65}"/>
+                <a16:creationId xmlns:a16="http://schemas.microsoft.com/office/drawing/2014/main" id="{905F77AE-6DFD-4A4D-9137-00D25EBBE6C8}"/>
               </a:ext>
             </a:extLst>
           </p:cNvPr>
@@ -4246,7 +4246,7 @@
           <p:cNvPr id="9" name="answer-stretch-body">
             <a:extLst xmlns:a="http://schemas.openxmlformats.org/drawingml/2006/main">
               <a:ext uri="{FF2B5EF4-FFF2-40B4-BE49-F238E27FC236}">
-                <a16:creationId xmlns:a16="http://schemas.microsoft.com/office/drawing/2014/main" id="{6F7FF0D1-96F5-4D44-A343-F1E95AA26D97}"/>
+                <a16:creationId xmlns:a16="http://schemas.microsoft.com/office/drawing/2014/main" id="{64E33DE1-3038-4D8A-BA1B-1F508F3FDF97}"/>
               </a:ext>
             </a:extLst>
           </p:cNvPr>
@@ -4301,7 +4301,7 @@
     </p:spTree>
     <p:extLst>
       <p:ext uri="{BB962C8B-B14F-4D97-AF65-F5344CB8AC3E}">
-        <p14:creationId xmlns:p14="http://schemas.microsoft.com/office/powerpoint/2010/main" val="621526134"/>
+        <p14:creationId xmlns:p14="http://schemas.microsoft.com/office/powerpoint/2010/main" val="956932320"/>
       </p:ext>
     </p:extLst>
   </p:cSld>
@@ -4314,7 +4314,7 @@
     <p:bg>
       <p:bgPr>
         <a:solidFill xmlns:a="http://schemas.openxmlformats.org/drawingml/2006/main">
-          <a:srgbClr val="FFFFFF"/>
+          <a:srgbClr val="EAF3FF"/>
         </a:solidFill>
       </p:bgPr>
     </p:bg>
@@ -4332,7 +4332,7 @@
           <p:cNvPr id="12" name="topic">
             <a:extLst xmlns:a="http://schemas.openxmlformats.org/drawingml/2006/main">
               <a:ext uri="{FF2B5EF4-FFF2-40B4-BE49-F238E27FC236}">
-                <a16:creationId xmlns:a16="http://schemas.microsoft.com/office/drawing/2014/main" id="{627BEDCB-D11F-4E3E-95B5-682C2D930669}"/>
+                <a16:creationId xmlns:a16="http://schemas.microsoft.com/office/drawing/2014/main" id="{B3A429E8-0CA5-41FA-A393-CCA867043923}"/>
               </a:ext>
             </a:extLst>
           </p:cNvPr>
@@ -4344,7 +4344,7 @@
         <p:spPr>
           <a:xfrm xmlns:a="http://schemas.openxmlformats.org/drawingml/2006/main">
             <a:off x="666750" y="323850"/>
-            <a:ext cx="6667500" cy="276225"/>
+            <a:ext cx="9810750" cy="276225"/>
           </a:xfrm>
           <a:prstGeom xmlns:a="http://schemas.openxmlformats.org/drawingml/2006/main" prst="rect">
             <a:avLst/>
@@ -4379,7 +4379,7 @@
                 <a:ea typeface="DejaVu Sans"/>
                 <a:cs typeface="DejaVu Sans"/>
               </a:rPr>
-              <a:t>TOPIC 1.1   LESSON 03</a:t>
+              <a:t>TOPIC 1.1   /   LESSON 03   /   ANSWERS</a:t>
             </a:r>
           </a:p>
         </p:txBody>
@@ -4389,7 +4389,7 @@
           <p:cNvPr id="2" name="heading">
             <a:extLst xmlns:a="http://schemas.openxmlformats.org/drawingml/2006/main">
               <a:ext uri="{FF2B5EF4-FFF2-40B4-BE49-F238E27FC236}">
-                <a16:creationId xmlns:a16="http://schemas.microsoft.com/office/drawing/2014/main" id="{0AAE9E37-F22A-49B6-BD25-0C2830511F71}"/>
+                <a16:creationId xmlns:a16="http://schemas.microsoft.com/office/drawing/2014/main" id="{E8ADC940-4FD3-4EDC-AA1B-280F56C81270}"/>
               </a:ext>
             </a:extLst>
           </p:cNvPr>
@@ -4446,7 +4446,7 @@
           <p:cNvPr id="3" name="footer">
             <a:extLst xmlns:a="http://schemas.openxmlformats.org/drawingml/2006/main">
               <a:ext uri="{FF2B5EF4-FFF2-40B4-BE49-F238E27FC236}">
-                <a16:creationId xmlns:a16="http://schemas.microsoft.com/office/drawing/2014/main" id="{5D264013-2962-4274-80EF-50A90D7F46E7}"/>
+                <a16:creationId xmlns:a16="http://schemas.microsoft.com/office/drawing/2014/main" id="{067575A2-E78C-48FE-918C-57A10711FA28}"/>
               </a:ext>
             </a:extLst>
           </p:cNvPr>
@@ -4493,7 +4493,7 @@
                 <a:ea typeface="DejaVu Sans"/>
                 <a:cs typeface="DejaVu Sans"/>
               </a:rPr>
-              <a:t>Revise 360    OCR J277 1.1 Systems architecture    Answers</a:t>
+              <a:t>Revise 360    OCR J277 1.1 Systems architecture</a:t>
             </a:r>
           </a:p>
         </p:txBody>
@@ -4503,7 +4503,7 @@
           <p:cNvPr id="4" name="page">
             <a:extLst xmlns:a="http://schemas.openxmlformats.org/drawingml/2006/main">
               <a:ext uri="{FF2B5EF4-FFF2-40B4-BE49-F238E27FC236}">
-                <a16:creationId xmlns:a16="http://schemas.microsoft.com/office/drawing/2014/main" id="{89977269-E468-4D23-9DB8-D22E97B0642A}"/>
+                <a16:creationId xmlns:a16="http://schemas.microsoft.com/office/drawing/2014/main" id="{E57390C6-4C94-4E53-98C2-9AAEDF05D7EF}"/>
               </a:ext>
             </a:extLst>
           </p:cNvPr>
@@ -4560,7 +4560,7 @@
           <p:cNvPr id="5" name="check-stations">
             <a:extLst xmlns:a="http://schemas.openxmlformats.org/drawingml/2006/main">
               <a:ext uri="{FF2B5EF4-FFF2-40B4-BE49-F238E27FC236}">
-                <a16:creationId xmlns:a16="http://schemas.microsoft.com/office/drawing/2014/main" id="{528D9CA0-8D30-4649-A7EA-05C374AE7857}"/>
+                <a16:creationId xmlns:a16="http://schemas.microsoft.com/office/drawing/2014/main" id="{A44C6278-C4B0-44B3-AB7F-9C7479ABD13B}"/>
               </a:ext>
             </a:extLst>
           </p:cNvPr>
@@ -4617,7 +4617,7 @@
           <p:cNvPr id="6" name="station-name-0">
             <a:extLst xmlns:a="http://schemas.openxmlformats.org/drawingml/2006/main">
               <a:ext uri="{FF2B5EF4-FFF2-40B4-BE49-F238E27FC236}">
-                <a16:creationId xmlns:a16="http://schemas.microsoft.com/office/drawing/2014/main" id="{2E8059FD-E87A-4809-8E7B-51C13756498D}"/>
+                <a16:creationId xmlns:a16="http://schemas.microsoft.com/office/drawing/2014/main" id="{20A0B9EE-B0A8-41EE-A5BA-FA55344DE925}"/>
               </a:ext>
             </a:extLst>
           </p:cNvPr>
@@ -4674,7 +4674,7 @@
           <p:cNvPr id="7" name="station-answer-0">
             <a:extLst xmlns:a="http://schemas.openxmlformats.org/drawingml/2006/main">
               <a:ext uri="{FF2B5EF4-FFF2-40B4-BE49-F238E27FC236}">
-                <a16:creationId xmlns:a16="http://schemas.microsoft.com/office/drawing/2014/main" id="{AAB3C4E1-923B-446C-811B-FC4949C0000C}"/>
+                <a16:creationId xmlns:a16="http://schemas.microsoft.com/office/drawing/2014/main" id="{EB86EBC4-1476-4D18-B8D2-3159650117C0}"/>
               </a:ext>
             </a:extLst>
           </p:cNvPr>
@@ -4731,7 +4731,7 @@
           <p:cNvPr id="8" name="station-name-1">
             <a:extLst xmlns:a="http://schemas.openxmlformats.org/drawingml/2006/main">
               <a:ext uri="{FF2B5EF4-FFF2-40B4-BE49-F238E27FC236}">
-                <a16:creationId xmlns:a16="http://schemas.microsoft.com/office/drawing/2014/main" id="{A0B5A40A-B5F8-43CA-BB57-39B32231D324}"/>
+                <a16:creationId xmlns:a16="http://schemas.microsoft.com/office/drawing/2014/main" id="{A0B55342-8D09-414D-911C-50A869EDF119}"/>
               </a:ext>
             </a:extLst>
           </p:cNvPr>
@@ -4788,7 +4788,7 @@
           <p:cNvPr id="9" name="station-answer-1">
             <a:extLst xmlns:a="http://schemas.openxmlformats.org/drawingml/2006/main">
               <a:ext uri="{FF2B5EF4-FFF2-40B4-BE49-F238E27FC236}">
-                <a16:creationId xmlns:a16="http://schemas.microsoft.com/office/drawing/2014/main" id="{D77A6745-F77C-4DD2-A65C-CA20FFB72C67}"/>
+                <a16:creationId xmlns:a16="http://schemas.microsoft.com/office/drawing/2014/main" id="{4DA4A3C9-6574-4AF4-B5ED-76FB2E34D4AE}"/>
               </a:ext>
             </a:extLst>
           </p:cNvPr>
@@ -4845,7 +4845,7 @@
           <p:cNvPr id="10" name="station-name-2">
             <a:extLst xmlns:a="http://schemas.openxmlformats.org/drawingml/2006/main">
               <a:ext uri="{FF2B5EF4-FFF2-40B4-BE49-F238E27FC236}">
-                <a16:creationId xmlns:a16="http://schemas.microsoft.com/office/drawing/2014/main" id="{4DE9DEFE-517D-4D58-B3BE-22A9EDEE8A9A}"/>
+                <a16:creationId xmlns:a16="http://schemas.microsoft.com/office/drawing/2014/main" id="{4DDBEF61-AB9D-4C51-A290-188360E89F9D}"/>
               </a:ext>
             </a:extLst>
           </p:cNvPr>
@@ -4902,7 +4902,7 @@
           <p:cNvPr id="11" name="station-answer-2">
             <a:extLst xmlns:a="http://schemas.openxmlformats.org/drawingml/2006/main">
               <a:ext uri="{FF2B5EF4-FFF2-40B4-BE49-F238E27FC236}">
-                <a16:creationId xmlns:a16="http://schemas.microsoft.com/office/drawing/2014/main" id="{DE90600E-4A5E-4B47-9C38-567C18DD57D3}"/>
+                <a16:creationId xmlns:a16="http://schemas.microsoft.com/office/drawing/2014/main" id="{07FF2C27-C3A0-4081-967A-28DF90AE7E6D}"/>
               </a:ext>
             </a:extLst>
           </p:cNvPr>
@@ -4957,7 +4957,7 @@
     </p:spTree>
     <p:extLst>
       <p:ext uri="{BB962C8B-B14F-4D97-AF65-F5344CB8AC3E}">
-        <p14:creationId xmlns:p14="http://schemas.microsoft.com/office/powerpoint/2010/main" val="1760252789"/>
+        <p14:creationId xmlns:p14="http://schemas.microsoft.com/office/powerpoint/2010/main" val="603092536"/>
       </p:ext>
     </p:extLst>
   </p:cSld>
@@ -4970,7 +4970,7 @@
     <p:bg>
       <p:bgPr>
         <a:solidFill xmlns:a="http://schemas.openxmlformats.org/drawingml/2006/main">
-          <a:srgbClr val="FFFFFF"/>
+          <a:srgbClr val="EAF3FF"/>
         </a:solidFill>
       </p:bgPr>
     </p:bg>
@@ -4988,7 +4988,7 @@
           <p:cNvPr id="12" name="topic">
             <a:extLst xmlns:a="http://schemas.openxmlformats.org/drawingml/2006/main">
               <a:ext uri="{FF2B5EF4-FFF2-40B4-BE49-F238E27FC236}">
-                <a16:creationId xmlns:a16="http://schemas.microsoft.com/office/drawing/2014/main" id="{10F9ACB9-4D17-4875-BB53-635F288F2F92}"/>
+                <a16:creationId xmlns:a16="http://schemas.microsoft.com/office/drawing/2014/main" id="{ABFD6AD3-F778-444F-BD10-22D32FCF2706}"/>
               </a:ext>
             </a:extLst>
           </p:cNvPr>
@@ -5000,7 +5000,7 @@
         <p:spPr>
           <a:xfrm xmlns:a="http://schemas.openxmlformats.org/drawingml/2006/main">
             <a:off x="666750" y="323850"/>
-            <a:ext cx="6667500" cy="276225"/>
+            <a:ext cx="9810750" cy="276225"/>
           </a:xfrm>
           <a:prstGeom xmlns:a="http://schemas.openxmlformats.org/drawingml/2006/main" prst="rect">
             <a:avLst/>
@@ -5035,7 +5035,7 @@
                 <a:ea typeface="DejaVu Sans"/>
                 <a:cs typeface="DejaVu Sans"/>
               </a:rPr>
-              <a:t>TOPIC 1.1   LESSON 03</a:t>
+              <a:t>TOPIC 1.1   /   LESSON 03   /   ANSWERS</a:t>
             </a:r>
           </a:p>
         </p:txBody>
@@ -5045,7 +5045,7 @@
           <p:cNvPr id="2" name="heading">
             <a:extLst xmlns:a="http://schemas.openxmlformats.org/drawingml/2006/main">
               <a:ext uri="{FF2B5EF4-FFF2-40B4-BE49-F238E27FC236}">
-                <a16:creationId xmlns:a16="http://schemas.microsoft.com/office/drawing/2014/main" id="{41BD5F7E-02EC-4880-880B-BA2B6EA83BCB}"/>
+                <a16:creationId xmlns:a16="http://schemas.microsoft.com/office/drawing/2014/main" id="{DF683D5F-BC89-42CB-B51E-EB3A3969C9B0}"/>
               </a:ext>
             </a:extLst>
           </p:cNvPr>
@@ -5102,7 +5102,7 @@
           <p:cNvPr id="3" name="footer">
             <a:extLst xmlns:a="http://schemas.openxmlformats.org/drawingml/2006/main">
               <a:ext uri="{FF2B5EF4-FFF2-40B4-BE49-F238E27FC236}">
-                <a16:creationId xmlns:a16="http://schemas.microsoft.com/office/drawing/2014/main" id="{181063EC-31E9-497A-9F04-DA4C0738AEE6}"/>
+                <a16:creationId xmlns:a16="http://schemas.microsoft.com/office/drawing/2014/main" id="{991B2BF5-FC97-4066-A967-6C2D61E00C9D}"/>
               </a:ext>
             </a:extLst>
           </p:cNvPr>
@@ -5149,7 +5149,7 @@
                 <a:ea typeface="DejaVu Sans"/>
                 <a:cs typeface="DejaVu Sans"/>
               </a:rPr>
-              <a:t>Revise 360    OCR J277 1.1 Systems architecture    Answers</a:t>
+              <a:t>Revise 360    OCR J277 1.1 Systems architecture</a:t>
             </a:r>
           </a:p>
         </p:txBody>
@@ -5159,7 +5159,7 @@
           <p:cNvPr id="4" name="page">
             <a:extLst xmlns:a="http://schemas.openxmlformats.org/drawingml/2006/main">
               <a:ext uri="{FF2B5EF4-FFF2-40B4-BE49-F238E27FC236}">
-                <a16:creationId xmlns:a16="http://schemas.microsoft.com/office/drawing/2014/main" id="{68EF710D-73EC-44B4-B8EB-3164C25A94CB}"/>
+                <a16:creationId xmlns:a16="http://schemas.microsoft.com/office/drawing/2014/main" id="{A4007489-D57A-4F61-A1BD-22D3F1A1AE82}"/>
               </a:ext>
             </a:extLst>
           </p:cNvPr>
@@ -5216,7 +5216,7 @@
           <p:cNvPr id="5" name="check-stations">
             <a:extLst xmlns:a="http://schemas.openxmlformats.org/drawingml/2006/main">
               <a:ext uri="{FF2B5EF4-FFF2-40B4-BE49-F238E27FC236}">
-                <a16:creationId xmlns:a16="http://schemas.microsoft.com/office/drawing/2014/main" id="{7C49F66C-7E7F-4591-AE6D-41DEC6402D60}"/>
+                <a16:creationId xmlns:a16="http://schemas.microsoft.com/office/drawing/2014/main" id="{FC990E9F-CC81-4546-9D62-F54A7335EE53}"/>
               </a:ext>
             </a:extLst>
           </p:cNvPr>
@@ -5273,7 +5273,7 @@
           <p:cNvPr id="6" name="station-name-3">
             <a:extLst xmlns:a="http://schemas.openxmlformats.org/drawingml/2006/main">
               <a:ext uri="{FF2B5EF4-FFF2-40B4-BE49-F238E27FC236}">
-                <a16:creationId xmlns:a16="http://schemas.microsoft.com/office/drawing/2014/main" id="{AD199FD0-728B-42D2-A2E4-8B0E078926F4}"/>
+                <a16:creationId xmlns:a16="http://schemas.microsoft.com/office/drawing/2014/main" id="{E630CEA6-10AE-4D2D-9B84-BEDC66615300}"/>
               </a:ext>
             </a:extLst>
           </p:cNvPr>
@@ -5330,7 +5330,7 @@
           <p:cNvPr id="7" name="station-answer-3">
             <a:extLst xmlns:a="http://schemas.openxmlformats.org/drawingml/2006/main">
               <a:ext uri="{FF2B5EF4-FFF2-40B4-BE49-F238E27FC236}">
-                <a16:creationId xmlns:a16="http://schemas.microsoft.com/office/drawing/2014/main" id="{8647FD39-B59D-4958-BDFB-FC1A213E06A7}"/>
+                <a16:creationId xmlns:a16="http://schemas.microsoft.com/office/drawing/2014/main" id="{7BD555D3-7141-411A-A88C-A42F59297770}"/>
               </a:ext>
             </a:extLst>
           </p:cNvPr>
@@ -5387,7 +5387,7 @@
           <p:cNvPr id="8" name="station-name-4">
             <a:extLst xmlns:a="http://schemas.openxmlformats.org/drawingml/2006/main">
               <a:ext uri="{FF2B5EF4-FFF2-40B4-BE49-F238E27FC236}">
-                <a16:creationId xmlns:a16="http://schemas.microsoft.com/office/drawing/2014/main" id="{E405D764-776F-4CCC-A689-52960681FC3A}"/>
+                <a16:creationId xmlns:a16="http://schemas.microsoft.com/office/drawing/2014/main" id="{69357D98-94F1-4378-A16F-5F0D3939A962}"/>
               </a:ext>
             </a:extLst>
           </p:cNvPr>
@@ -5444,7 +5444,7 @@
           <p:cNvPr id="9" name="station-answer-4">
             <a:extLst xmlns:a="http://schemas.openxmlformats.org/drawingml/2006/main">
               <a:ext uri="{FF2B5EF4-FFF2-40B4-BE49-F238E27FC236}">
-                <a16:creationId xmlns:a16="http://schemas.microsoft.com/office/drawing/2014/main" id="{E9C956ED-DA04-4022-9EFB-91BE936388C8}"/>
+                <a16:creationId xmlns:a16="http://schemas.microsoft.com/office/drawing/2014/main" id="{9CE5B98D-5AE6-4A23-9C7E-CD7DD78078A6}"/>
               </a:ext>
             </a:extLst>
           </p:cNvPr>
@@ -5501,7 +5501,7 @@
           <p:cNvPr id="10" name="station-name-5">
             <a:extLst xmlns:a="http://schemas.openxmlformats.org/drawingml/2006/main">
               <a:ext uri="{FF2B5EF4-FFF2-40B4-BE49-F238E27FC236}">
-                <a16:creationId xmlns:a16="http://schemas.microsoft.com/office/drawing/2014/main" id="{A8F15AD1-FBB8-46FD-AA32-53B913C4D373}"/>
+                <a16:creationId xmlns:a16="http://schemas.microsoft.com/office/drawing/2014/main" id="{B4ED7A9F-1E34-4C9C-B203-EC0F2C01F1BE}"/>
               </a:ext>
             </a:extLst>
           </p:cNvPr>
@@ -5558,7 +5558,7 @@
           <p:cNvPr id="11" name="station-answer-5">
             <a:extLst xmlns:a="http://schemas.openxmlformats.org/drawingml/2006/main">
               <a:ext uri="{FF2B5EF4-FFF2-40B4-BE49-F238E27FC236}">
-                <a16:creationId xmlns:a16="http://schemas.microsoft.com/office/drawing/2014/main" id="{D4F065D7-BAAA-43A0-B267-C4483438267B}"/>
+                <a16:creationId xmlns:a16="http://schemas.microsoft.com/office/drawing/2014/main" id="{9361868B-6938-42AB-9099-CC193FE4D87B}"/>
               </a:ext>
             </a:extLst>
           </p:cNvPr>
@@ -5613,7 +5613,7 @@
     </p:spTree>
     <p:extLst>
       <p:ext uri="{BB962C8B-B14F-4D97-AF65-F5344CB8AC3E}">
-        <p14:creationId xmlns:p14="http://schemas.microsoft.com/office/powerpoint/2010/main" val="1315739142"/>
+        <p14:creationId xmlns:p14="http://schemas.microsoft.com/office/powerpoint/2010/main" val="831282774"/>
       </p:ext>
     </p:extLst>
   </p:cSld>
@@ -5626,7 +5626,7 @@
     <p:bg>
       <p:bgPr>
         <a:solidFill xmlns:a="http://schemas.openxmlformats.org/drawingml/2006/main">
-          <a:srgbClr val="FFFFFF"/>
+          <a:srgbClr val="EAF3FF"/>
         </a:solidFill>
       </p:bgPr>
     </p:bg>
@@ -5644,7 +5644,7 @@
           <p:cNvPr id="16" name="topic">
             <a:extLst xmlns:a="http://schemas.openxmlformats.org/drawingml/2006/main">
               <a:ext uri="{FF2B5EF4-FFF2-40B4-BE49-F238E27FC236}">
-                <a16:creationId xmlns:a16="http://schemas.microsoft.com/office/drawing/2014/main" id="{2FCAD8F1-0E1F-4E3E-B1AB-12CE112085CF}"/>
+                <a16:creationId xmlns:a16="http://schemas.microsoft.com/office/drawing/2014/main" id="{90E568FB-2938-41F5-B5D5-96CF33CEA7D9}"/>
               </a:ext>
             </a:extLst>
           </p:cNvPr>
@@ -5656,7 +5656,7 @@
         <p:spPr>
           <a:xfrm xmlns:a="http://schemas.openxmlformats.org/drawingml/2006/main">
             <a:off x="666750" y="323850"/>
-            <a:ext cx="6667500" cy="276225"/>
+            <a:ext cx="9810750" cy="276225"/>
           </a:xfrm>
           <a:prstGeom xmlns:a="http://schemas.openxmlformats.org/drawingml/2006/main" prst="rect">
             <a:avLst/>
@@ -5691,7 +5691,7 @@
                 <a:ea typeface="DejaVu Sans"/>
                 <a:cs typeface="DejaVu Sans"/>
               </a:rPr>
-              <a:t>TOPIC 1.1   LESSON 03</a:t>
+              <a:t>TOPIC 1.1   /   LESSON 03   /   CHECK</a:t>
             </a:r>
           </a:p>
         </p:txBody>
@@ -5701,7 +5701,7 @@
           <p:cNvPr id="2" name="heading">
             <a:extLst xmlns:a="http://schemas.openxmlformats.org/drawingml/2006/main">
               <a:ext uri="{FF2B5EF4-FFF2-40B4-BE49-F238E27FC236}">
-                <a16:creationId xmlns:a16="http://schemas.microsoft.com/office/drawing/2014/main" id="{1B74B3BA-AE91-4E2A-B8A2-6F642284A4B2}"/>
+                <a16:creationId xmlns:a16="http://schemas.microsoft.com/office/drawing/2014/main" id="{2A507548-4517-452B-92CC-B756C90252F3}"/>
               </a:ext>
             </a:extLst>
           </p:cNvPr>
@@ -5758,7 +5758,7 @@
           <p:cNvPr id="3" name="footer">
             <a:extLst xmlns:a="http://schemas.openxmlformats.org/drawingml/2006/main">
               <a:ext uri="{FF2B5EF4-FFF2-40B4-BE49-F238E27FC236}">
-                <a16:creationId xmlns:a16="http://schemas.microsoft.com/office/drawing/2014/main" id="{4CA39B37-2DB6-4288-AA41-7A9DCDC13ECB}"/>
+                <a16:creationId xmlns:a16="http://schemas.microsoft.com/office/drawing/2014/main" id="{232F0B9A-BD85-422A-9FE7-8E15596F5E5E}"/>
               </a:ext>
             </a:extLst>
           </p:cNvPr>
@@ -5805,7 +5805,7 @@
                 <a:ea typeface="DejaVu Sans"/>
                 <a:cs typeface="DejaVu Sans"/>
               </a:rPr>
-              <a:t>Revise 360    OCR J277 1.1 Systems architecture    Check</a:t>
+              <a:t>Revise 360    OCR J277 1.1 Systems architecture</a:t>
             </a:r>
           </a:p>
         </p:txBody>
@@ -5815,7 +5815,7 @@
           <p:cNvPr id="4" name="page">
             <a:extLst xmlns:a="http://schemas.openxmlformats.org/drawingml/2006/main">
               <a:ext uri="{FF2B5EF4-FFF2-40B4-BE49-F238E27FC236}">
-                <a16:creationId xmlns:a16="http://schemas.microsoft.com/office/drawing/2014/main" id="{19B2C79F-2850-4C6B-B4B3-B4BE6FE25ECE}"/>
+                <a16:creationId xmlns:a16="http://schemas.microsoft.com/office/drawing/2014/main" id="{B7BC97EC-E9F1-4BB0-9EAC-ECCF24839856}"/>
               </a:ext>
             </a:extLst>
           </p:cNvPr>
@@ -5872,7 +5872,7 @@
           <p:cNvPr id="5" name="star-key">
             <a:extLst xmlns:a="http://schemas.openxmlformats.org/drawingml/2006/main">
               <a:ext uri="{FF2B5EF4-FFF2-40B4-BE49-F238E27FC236}">
-                <a16:creationId xmlns:a16="http://schemas.microsoft.com/office/drawing/2014/main" id="{D45796C4-7593-41DE-8EFB-69EC24866565}"/>
+                <a16:creationId xmlns:a16="http://schemas.microsoft.com/office/drawing/2014/main" id="{40BE632D-EBA9-4D3E-BD19-FA47D0B31F43}"/>
               </a:ext>
             </a:extLst>
           </p:cNvPr>
@@ -5929,7 +5929,7 @@
           <p:cNvPr id="6" name="number-1">
             <a:extLst xmlns:a="http://schemas.openxmlformats.org/drawingml/2006/main">
               <a:ext uri="{FF2B5EF4-FFF2-40B4-BE49-F238E27FC236}">
-                <a16:creationId xmlns:a16="http://schemas.microsoft.com/office/drawing/2014/main" id="{3DE2FD93-FD1C-49BE-B8EA-35AB5619056D}"/>
+                <a16:creationId xmlns:a16="http://schemas.microsoft.com/office/drawing/2014/main" id="{69DB655F-3504-439C-8597-BABF9B470649}"/>
               </a:ext>
             </a:extLst>
           </p:cNvPr>
@@ -5986,7 +5986,7 @@
           <p:cNvPr id="7" name="item-1">
             <a:extLst xmlns:a="http://schemas.openxmlformats.org/drawingml/2006/main">
               <a:ext uri="{FF2B5EF4-FFF2-40B4-BE49-F238E27FC236}">
-                <a16:creationId xmlns:a16="http://schemas.microsoft.com/office/drawing/2014/main" id="{7AE590FA-65FE-4BC8-BF92-8137C3A86BE9}"/>
+                <a16:creationId xmlns:a16="http://schemas.microsoft.com/office/drawing/2014/main" id="{A102B381-7585-46B1-9FA0-86958B1A5F89}"/>
               </a:ext>
             </a:extLst>
           </p:cNvPr>
@@ -6043,7 +6043,7 @@
           <p:cNvPr id="8" name="number-2">
             <a:extLst xmlns:a="http://schemas.openxmlformats.org/drawingml/2006/main">
               <a:ext uri="{FF2B5EF4-FFF2-40B4-BE49-F238E27FC236}">
-                <a16:creationId xmlns:a16="http://schemas.microsoft.com/office/drawing/2014/main" id="{FC455EDB-007E-4DE3-B671-DD86178EA7DB}"/>
+                <a16:creationId xmlns:a16="http://schemas.microsoft.com/office/drawing/2014/main" id="{FFCA4AC1-D11B-4F5D-9D0E-3FC272462223}"/>
               </a:ext>
             </a:extLst>
           </p:cNvPr>
@@ -6100,7 +6100,7 @@
           <p:cNvPr id="9" name="item-2">
             <a:extLst xmlns:a="http://schemas.openxmlformats.org/drawingml/2006/main">
               <a:ext uri="{FF2B5EF4-FFF2-40B4-BE49-F238E27FC236}">
-                <a16:creationId xmlns:a16="http://schemas.microsoft.com/office/drawing/2014/main" id="{9C577DC9-8D6A-4037-879D-A2815CDCE1CC}"/>
+                <a16:creationId xmlns:a16="http://schemas.microsoft.com/office/drawing/2014/main" id="{C8D2CF1B-0FDA-494D-842D-413B20E5D834}"/>
               </a:ext>
             </a:extLst>
           </p:cNvPr>
@@ -6157,7 +6157,7 @@
           <p:cNvPr id="10" name="number-3">
             <a:extLst xmlns:a="http://schemas.openxmlformats.org/drawingml/2006/main">
               <a:ext uri="{FF2B5EF4-FFF2-40B4-BE49-F238E27FC236}">
-                <a16:creationId xmlns:a16="http://schemas.microsoft.com/office/drawing/2014/main" id="{F9A4A824-8654-4B7E-9377-18CA7BB9E47A}"/>
+                <a16:creationId xmlns:a16="http://schemas.microsoft.com/office/drawing/2014/main" id="{AB630F0A-ABD6-4BE3-BB45-3A1EE6A5BF37}"/>
               </a:ext>
             </a:extLst>
           </p:cNvPr>
@@ -6214,7 +6214,7 @@
           <p:cNvPr id="11" name="item-3">
             <a:extLst xmlns:a="http://schemas.openxmlformats.org/drawingml/2006/main">
               <a:ext uri="{FF2B5EF4-FFF2-40B4-BE49-F238E27FC236}">
-                <a16:creationId xmlns:a16="http://schemas.microsoft.com/office/drawing/2014/main" id="{51F04986-7551-4394-8774-375913142568}"/>
+                <a16:creationId xmlns:a16="http://schemas.microsoft.com/office/drawing/2014/main" id="{F4F49FC7-35D2-42A6-9B72-41A93AC3E83F}"/>
               </a:ext>
             </a:extLst>
           </p:cNvPr>
@@ -6271,7 +6271,7 @@
           <p:cNvPr id="12" name="number-4">
             <a:extLst xmlns:a="http://schemas.openxmlformats.org/drawingml/2006/main">
               <a:ext uri="{FF2B5EF4-FFF2-40B4-BE49-F238E27FC236}">
-                <a16:creationId xmlns:a16="http://schemas.microsoft.com/office/drawing/2014/main" id="{DBCA22D5-B233-4767-B579-9F254DA3EBA3}"/>
+                <a16:creationId xmlns:a16="http://schemas.microsoft.com/office/drawing/2014/main" id="{28B1198E-21A9-498E-ADAD-4115F2B1A7AC}"/>
               </a:ext>
             </a:extLst>
           </p:cNvPr>
@@ -6328,7 +6328,7 @@
           <p:cNvPr id="13" name="item-4">
             <a:extLst xmlns:a="http://schemas.openxmlformats.org/drawingml/2006/main">
               <a:ext uri="{FF2B5EF4-FFF2-40B4-BE49-F238E27FC236}">
-                <a16:creationId xmlns:a16="http://schemas.microsoft.com/office/drawing/2014/main" id="{A07F3672-2CDB-4CF2-962A-0079878628DB}"/>
+                <a16:creationId xmlns:a16="http://schemas.microsoft.com/office/drawing/2014/main" id="{E3BD94D8-16CA-4084-96EC-FC3430DB0A75}"/>
               </a:ext>
             </a:extLst>
           </p:cNvPr>
@@ -6385,7 +6385,7 @@
           <p:cNvPr id="14" name="number-5">
             <a:extLst xmlns:a="http://schemas.openxmlformats.org/drawingml/2006/main">
               <a:ext uri="{FF2B5EF4-FFF2-40B4-BE49-F238E27FC236}">
-                <a16:creationId xmlns:a16="http://schemas.microsoft.com/office/drawing/2014/main" id="{0E9582B2-A819-4334-BBB7-B57C642FF092}"/>
+                <a16:creationId xmlns:a16="http://schemas.microsoft.com/office/drawing/2014/main" id="{ECB88C9D-1A4D-4FDE-83DF-594F892FC80B}"/>
               </a:ext>
             </a:extLst>
           </p:cNvPr>
@@ -6442,7 +6442,7 @@
           <p:cNvPr id="15" name="item-5">
             <a:extLst xmlns:a="http://schemas.openxmlformats.org/drawingml/2006/main">
               <a:ext uri="{FF2B5EF4-FFF2-40B4-BE49-F238E27FC236}">
-                <a16:creationId xmlns:a16="http://schemas.microsoft.com/office/drawing/2014/main" id="{1C72C028-B5A1-4268-936A-74094D113186}"/>
+                <a16:creationId xmlns:a16="http://schemas.microsoft.com/office/drawing/2014/main" id="{2B2F28A2-CA3C-4EE8-9401-FBD70518FC69}"/>
               </a:ext>
             </a:extLst>
           </p:cNvPr>
@@ -6497,7 +6497,7 @@
     </p:spTree>
     <p:extLst>
       <p:ext uri="{BB962C8B-B14F-4D97-AF65-F5344CB8AC3E}">
-        <p14:creationId xmlns:p14="http://schemas.microsoft.com/office/powerpoint/2010/main" val="686228764"/>
+        <p14:creationId xmlns:p14="http://schemas.microsoft.com/office/powerpoint/2010/main" val="423776278"/>
       </p:ext>
     </p:extLst>
   </p:cSld>
@@ -6528,7 +6528,7 @@
           <p:cNvPr id="10" name="topic">
             <a:extLst xmlns:a="http://schemas.openxmlformats.org/drawingml/2006/main">
               <a:ext uri="{FF2B5EF4-FFF2-40B4-BE49-F238E27FC236}">
-                <a16:creationId xmlns:a16="http://schemas.microsoft.com/office/drawing/2014/main" id="{EAE96CC0-1BCE-45E3-B5FD-6840F63F6439}"/>
+                <a16:creationId xmlns:a16="http://schemas.microsoft.com/office/drawing/2014/main" id="{1B58C11E-4F06-439C-94B3-9C072D23AA36}"/>
               </a:ext>
             </a:extLst>
           </p:cNvPr>
@@ -6540,7 +6540,7 @@
         <p:spPr>
           <a:xfrm xmlns:a="http://schemas.openxmlformats.org/drawingml/2006/main">
             <a:off x="666750" y="323850"/>
-            <a:ext cx="6667500" cy="276225"/>
+            <a:ext cx="9810750" cy="276225"/>
           </a:xfrm>
           <a:prstGeom xmlns:a="http://schemas.openxmlformats.org/drawingml/2006/main" prst="rect">
             <a:avLst/>
@@ -6575,7 +6575,7 @@
                 <a:ea typeface="DejaVu Sans"/>
                 <a:cs typeface="DejaVu Sans"/>
               </a:rPr>
-              <a:t>TOPIC 1.1   LESSON 03</a:t>
+              <a:t>TOPIC 1.1   /   LESSON 03   /   PLENARY</a:t>
             </a:r>
           </a:p>
         </p:txBody>
@@ -6585,7 +6585,7 @@
           <p:cNvPr id="2" name="heading">
             <a:extLst xmlns:a="http://schemas.openxmlformats.org/drawingml/2006/main">
               <a:ext uri="{FF2B5EF4-FFF2-40B4-BE49-F238E27FC236}">
-                <a16:creationId xmlns:a16="http://schemas.microsoft.com/office/drawing/2014/main" id="{CCC4AF1F-5ADE-40B4-9175-F67A6B301099}"/>
+                <a16:creationId xmlns:a16="http://schemas.microsoft.com/office/drawing/2014/main" id="{876FED8F-8C9F-45B8-B661-A24543082CE2}"/>
               </a:ext>
             </a:extLst>
           </p:cNvPr>
@@ -6632,7 +6632,7 @@
                 <a:ea typeface="DejaVu Sans"/>
                 <a:cs typeface="DejaVu Sans"/>
               </a:rPr>
-              <a:t>Exam practice: questions (a–b)</a:t>
+              <a:t>Plenary: questions (a–b)</a:t>
             </a:r>
           </a:p>
         </p:txBody>
@@ -6642,7 +6642,7 @@
           <p:cNvPr id="3" name="footer">
             <a:extLst xmlns:a="http://schemas.openxmlformats.org/drawingml/2006/main">
               <a:ext uri="{FF2B5EF4-FFF2-40B4-BE49-F238E27FC236}">
-                <a16:creationId xmlns:a16="http://schemas.microsoft.com/office/drawing/2014/main" id="{E34E702C-5268-4A1F-BF14-C085CBC81DFA}"/>
+                <a16:creationId xmlns:a16="http://schemas.microsoft.com/office/drawing/2014/main" id="{241100A6-2A14-443F-BD3B-AAECF8A55B46}"/>
               </a:ext>
             </a:extLst>
           </p:cNvPr>
@@ -6689,7 +6689,7 @@
                 <a:ea typeface="DejaVu Sans"/>
                 <a:cs typeface="DejaVu Sans"/>
               </a:rPr>
-              <a:t>Revise 360    OCR J277 1.1 Systems architecture    Plenary</a:t>
+              <a:t>Revise 360    OCR J277 1.1 Systems architecture</a:t>
             </a:r>
           </a:p>
         </p:txBody>
@@ -6699,7 +6699,7 @@
           <p:cNvPr id="4" name="page">
             <a:extLst xmlns:a="http://schemas.openxmlformats.org/drawingml/2006/main">
               <a:ext uri="{FF2B5EF4-FFF2-40B4-BE49-F238E27FC236}">
-                <a16:creationId xmlns:a16="http://schemas.microsoft.com/office/drawing/2014/main" id="{71152726-D238-45B8-A9CF-E1565C3F32F4}"/>
+                <a16:creationId xmlns:a16="http://schemas.microsoft.com/office/drawing/2014/main" id="{517425AD-5494-4B22-BB72-B53D45EF7BD4}"/>
               </a:ext>
             </a:extLst>
           </p:cNvPr>
@@ -6756,7 +6756,7 @@
           <p:cNvPr id="5" name="plenary-instruction">
             <a:extLst xmlns:a="http://schemas.openxmlformats.org/drawingml/2006/main">
               <a:ext uri="{FF2B5EF4-FFF2-40B4-BE49-F238E27FC236}">
-                <a16:creationId xmlns:a16="http://schemas.microsoft.com/office/drawing/2014/main" id="{04A3E2EB-F3AF-4616-8C8B-32DFF6BB8BE4}"/>
+                <a16:creationId xmlns:a16="http://schemas.microsoft.com/office/drawing/2014/main" id="{98BA97ED-6134-412E-88B3-0F24AB241DC3}"/>
               </a:ext>
             </a:extLst>
           </p:cNvPr>
@@ -6813,7 +6813,7 @@
           <p:cNvPr id="6" name="a">
             <a:extLst xmlns:a="http://schemas.openxmlformats.org/drawingml/2006/main">
               <a:ext uri="{FF2B5EF4-FFF2-40B4-BE49-F238E27FC236}">
-                <a16:creationId xmlns:a16="http://schemas.microsoft.com/office/drawing/2014/main" id="{F5097380-01A7-4802-92AE-7C3A092E8506}"/>
+                <a16:creationId xmlns:a16="http://schemas.microsoft.com/office/drawing/2014/main" id="{9B00974E-1F40-43C3-BF49-3C6F36107B6C}"/>
               </a:ext>
             </a:extLst>
           </p:cNvPr>
@@ -6870,7 +6870,7 @@
           <p:cNvPr id="7" name="question-a">
             <a:extLst xmlns:a="http://schemas.openxmlformats.org/drawingml/2006/main">
               <a:ext uri="{FF2B5EF4-FFF2-40B4-BE49-F238E27FC236}">
-                <a16:creationId xmlns:a16="http://schemas.microsoft.com/office/drawing/2014/main" id="{A6E04C24-83A6-461B-BC8A-1ACDB547DDB3}"/>
+                <a16:creationId xmlns:a16="http://schemas.microsoft.com/office/drawing/2014/main" id="{E4DA75A0-B71E-4C82-AAAE-1DEF41FB137E}"/>
               </a:ext>
             </a:extLst>
           </p:cNvPr>
@@ -6927,7 +6927,7 @@
           <p:cNvPr id="8" name="b">
             <a:extLst xmlns:a="http://schemas.openxmlformats.org/drawingml/2006/main">
               <a:ext uri="{FF2B5EF4-FFF2-40B4-BE49-F238E27FC236}">
-                <a16:creationId xmlns:a16="http://schemas.microsoft.com/office/drawing/2014/main" id="{C632542E-71AC-4616-9388-8A76BE5749EF}"/>
+                <a16:creationId xmlns:a16="http://schemas.microsoft.com/office/drawing/2014/main" id="{C7F82335-804B-4182-84E0-45C1389FF1BC}"/>
               </a:ext>
             </a:extLst>
           </p:cNvPr>
@@ -6984,7 +6984,7 @@
           <p:cNvPr id="9" name="question-b">
             <a:extLst xmlns:a="http://schemas.openxmlformats.org/drawingml/2006/main">
               <a:ext uri="{FF2B5EF4-FFF2-40B4-BE49-F238E27FC236}">
-                <a16:creationId xmlns:a16="http://schemas.microsoft.com/office/drawing/2014/main" id="{6A2CC52D-89BA-4AFB-9D31-5E0162C61040}"/>
+                <a16:creationId xmlns:a16="http://schemas.microsoft.com/office/drawing/2014/main" id="{C6E2E13C-1FC1-47F3-A651-3B1A330AC55C}"/>
               </a:ext>
             </a:extLst>
           </p:cNvPr>
@@ -7039,7 +7039,7 @@
     </p:spTree>
     <p:extLst>
       <p:ext uri="{BB962C8B-B14F-4D97-AF65-F5344CB8AC3E}">
-        <p14:creationId xmlns:p14="http://schemas.microsoft.com/office/powerpoint/2010/main" val="1937045803"/>
+        <p14:creationId xmlns:p14="http://schemas.microsoft.com/office/powerpoint/2010/main" val="1483369696"/>
       </p:ext>
     </p:extLst>
   </p:cSld>
@@ -7070,7 +7070,7 @@
           <p:cNvPr id="9" name="topic">
             <a:extLst xmlns:a="http://schemas.openxmlformats.org/drawingml/2006/main">
               <a:ext uri="{FF2B5EF4-FFF2-40B4-BE49-F238E27FC236}">
-                <a16:creationId xmlns:a16="http://schemas.microsoft.com/office/drawing/2014/main" id="{13282583-0B56-4DE8-89C7-D811338A9C3D}"/>
+                <a16:creationId xmlns:a16="http://schemas.microsoft.com/office/drawing/2014/main" id="{1BC6B6D1-E3FC-4B99-BB50-47025C9D2567}"/>
               </a:ext>
             </a:extLst>
           </p:cNvPr>
@@ -7082,7 +7082,7 @@
         <p:spPr>
           <a:xfrm xmlns:a="http://schemas.openxmlformats.org/drawingml/2006/main">
             <a:off x="666750" y="323850"/>
-            <a:ext cx="6667500" cy="276225"/>
+            <a:ext cx="9810750" cy="276225"/>
           </a:xfrm>
           <a:prstGeom xmlns:a="http://schemas.openxmlformats.org/drawingml/2006/main" prst="rect">
             <a:avLst/>
@@ -7117,7 +7117,7 @@
                 <a:ea typeface="DejaVu Sans"/>
                 <a:cs typeface="DejaVu Sans"/>
               </a:rPr>
-              <a:t>TOPIC 1.1   LESSON 03</a:t>
+              <a:t>TOPIC 1.1   /   LESSON 03   /   PLENARY</a:t>
             </a:r>
           </a:p>
         </p:txBody>
@@ -7127,7 +7127,7 @@
           <p:cNvPr id="2" name="heading">
             <a:extLst xmlns:a="http://schemas.openxmlformats.org/drawingml/2006/main">
               <a:ext uri="{FF2B5EF4-FFF2-40B4-BE49-F238E27FC236}">
-                <a16:creationId xmlns:a16="http://schemas.microsoft.com/office/drawing/2014/main" id="{67961653-2340-4154-B108-8DD18A2AAA6A}"/>
+                <a16:creationId xmlns:a16="http://schemas.microsoft.com/office/drawing/2014/main" id="{366A9D77-79BA-499F-911A-198B7786C4D9}"/>
               </a:ext>
             </a:extLst>
           </p:cNvPr>
@@ -7174,7 +7174,7 @@
                 <a:ea typeface="DejaVu Sans"/>
                 <a:cs typeface="DejaVu Sans"/>
               </a:rPr>
-              <a:t>Exam practice: question (c)</a:t>
+              <a:t>Plenary: question (c)</a:t>
             </a:r>
           </a:p>
         </p:txBody>
@@ -7184,7 +7184,7 @@
           <p:cNvPr id="3" name="footer">
             <a:extLst xmlns:a="http://schemas.openxmlformats.org/drawingml/2006/main">
               <a:ext uri="{FF2B5EF4-FFF2-40B4-BE49-F238E27FC236}">
-                <a16:creationId xmlns:a16="http://schemas.microsoft.com/office/drawing/2014/main" id="{0D14DE2B-A5E8-4462-8413-A0F03CA10467}"/>
+                <a16:creationId xmlns:a16="http://schemas.microsoft.com/office/drawing/2014/main" id="{C18F73C0-ADCB-4D42-8396-E878FCB1AC4D}"/>
               </a:ext>
             </a:extLst>
           </p:cNvPr>
@@ -7231,7 +7231,7 @@
                 <a:ea typeface="DejaVu Sans"/>
                 <a:cs typeface="DejaVu Sans"/>
               </a:rPr>
-              <a:t>Revise 360    OCR J277 1.1 Systems architecture    Plenary</a:t>
+              <a:t>Revise 360    OCR J277 1.1 Systems architecture</a:t>
             </a:r>
           </a:p>
         </p:txBody>
@@ -7241,7 +7241,7 @@
           <p:cNvPr id="4" name="page">
             <a:extLst xmlns:a="http://schemas.openxmlformats.org/drawingml/2006/main">
               <a:ext uri="{FF2B5EF4-FFF2-40B4-BE49-F238E27FC236}">
-                <a16:creationId xmlns:a16="http://schemas.microsoft.com/office/drawing/2014/main" id="{3FEA4279-A376-4B22-BE45-B4E676417260}"/>
+                <a16:creationId xmlns:a16="http://schemas.microsoft.com/office/drawing/2014/main" id="{6EDFE079-3B2B-4CE4-B698-444D74543992}"/>
               </a:ext>
             </a:extLst>
           </p:cNvPr>
@@ -7298,7 +7298,7 @@
           <p:cNvPr id="5" name="from-memory">
             <a:extLst xmlns:a="http://schemas.openxmlformats.org/drawingml/2006/main">
               <a:ext uri="{FF2B5EF4-FFF2-40B4-BE49-F238E27FC236}">
-                <a16:creationId xmlns:a16="http://schemas.microsoft.com/office/drawing/2014/main" id="{4C1386FB-709B-4FD8-A256-E86F062D00BF}"/>
+                <a16:creationId xmlns:a16="http://schemas.microsoft.com/office/drawing/2014/main" id="{5BE3991B-51C3-4B20-B9AF-DBC309FAC545}"/>
               </a:ext>
             </a:extLst>
           </p:cNvPr>
@@ -7355,7 +7355,7 @@
           <p:cNvPr id="6" name="c">
             <a:extLst xmlns:a="http://schemas.openxmlformats.org/drawingml/2006/main">
               <a:ext uri="{FF2B5EF4-FFF2-40B4-BE49-F238E27FC236}">
-                <a16:creationId xmlns:a16="http://schemas.microsoft.com/office/drawing/2014/main" id="{4EAE8334-016C-47DA-83EF-77096EA3DF16}"/>
+                <a16:creationId xmlns:a16="http://schemas.microsoft.com/office/drawing/2014/main" id="{A198CBB2-BA60-4D2F-A350-3ED7CF6B8063}"/>
               </a:ext>
             </a:extLst>
           </p:cNvPr>
@@ -7412,7 +7412,7 @@
           <p:cNvPr id="7" name="question-c">
             <a:extLst xmlns:a="http://schemas.openxmlformats.org/drawingml/2006/main">
               <a:ext uri="{FF2B5EF4-FFF2-40B4-BE49-F238E27FC236}">
-                <a16:creationId xmlns:a16="http://schemas.microsoft.com/office/drawing/2014/main" id="{02329C50-9078-4BC1-A80D-1A92087A8759}"/>
+                <a16:creationId xmlns:a16="http://schemas.microsoft.com/office/drawing/2014/main" id="{EF652CE1-0251-4728-8133-144157859BD9}"/>
               </a:ext>
             </a:extLst>
           </p:cNvPr>
@@ -7469,7 +7469,7 @@
           <p:cNvPr id="8" name="marks">
             <a:extLst xmlns:a="http://schemas.openxmlformats.org/drawingml/2006/main">
               <a:ext uri="{FF2B5EF4-FFF2-40B4-BE49-F238E27FC236}">
-                <a16:creationId xmlns:a16="http://schemas.microsoft.com/office/drawing/2014/main" id="{94118082-7B8E-45ED-B80B-9481E8A022D9}"/>
+                <a16:creationId xmlns:a16="http://schemas.microsoft.com/office/drawing/2014/main" id="{EECF20BD-85B9-4635-8E7E-148CD4E473DB}"/>
               </a:ext>
             </a:extLst>
           </p:cNvPr>
@@ -7524,7 +7524,7 @@
     </p:spTree>
     <p:extLst>
       <p:ext uri="{BB962C8B-B14F-4D97-AF65-F5344CB8AC3E}">
-        <p14:creationId xmlns:p14="http://schemas.microsoft.com/office/powerpoint/2010/main" val="1483373575"/>
+        <p14:creationId xmlns:p14="http://schemas.microsoft.com/office/powerpoint/2010/main" val="1423641387"/>
       </p:ext>
     </p:extLst>
   </p:cSld>
@@ -7537,7 +7537,7 @@
     <p:bg>
       <p:bgPr>
         <a:solidFill xmlns:a="http://schemas.openxmlformats.org/drawingml/2006/main">
-          <a:srgbClr val="FFFFFF"/>
+          <a:srgbClr val="EAF3FF"/>
         </a:solidFill>
       </p:bgPr>
     </p:bg>
@@ -7555,7 +7555,7 @@
           <p:cNvPr id="8" name="topic">
             <a:extLst xmlns:a="http://schemas.openxmlformats.org/drawingml/2006/main">
               <a:ext uri="{FF2B5EF4-FFF2-40B4-BE49-F238E27FC236}">
-                <a16:creationId xmlns:a16="http://schemas.microsoft.com/office/drawing/2014/main" id="{55201553-E04E-4F39-B410-0F370BD47AC9}"/>
+                <a16:creationId xmlns:a16="http://schemas.microsoft.com/office/drawing/2014/main" id="{89D88E00-6A78-4613-A473-26E4EF011CC6}"/>
               </a:ext>
             </a:extLst>
           </p:cNvPr>
@@ -7567,7 +7567,7 @@
         <p:spPr>
           <a:xfrm xmlns:a="http://schemas.openxmlformats.org/drawingml/2006/main">
             <a:off x="666750" y="323850"/>
-            <a:ext cx="6667500" cy="276225"/>
+            <a:ext cx="9810750" cy="276225"/>
           </a:xfrm>
           <a:prstGeom xmlns:a="http://schemas.openxmlformats.org/drawingml/2006/main" prst="rect">
             <a:avLst/>
@@ -7602,7 +7602,7 @@
                 <a:ea typeface="DejaVu Sans"/>
                 <a:cs typeface="DejaVu Sans"/>
               </a:rPr>
-              <a:t>TOPIC 1.1   LESSON 03</a:t>
+              <a:t>TOPIC 1.1   /   LESSON 03   /   CHECK</a:t>
             </a:r>
           </a:p>
         </p:txBody>
@@ -7612,7 +7612,7 @@
           <p:cNvPr id="2" name="heading">
             <a:extLst xmlns:a="http://schemas.openxmlformats.org/drawingml/2006/main">
               <a:ext uri="{FF2B5EF4-FFF2-40B4-BE49-F238E27FC236}">
-                <a16:creationId xmlns:a16="http://schemas.microsoft.com/office/drawing/2014/main" id="{81437AB1-C91D-4D7C-A551-1E58C474528A}"/>
+                <a16:creationId xmlns:a16="http://schemas.microsoft.com/office/drawing/2014/main" id="{674FC5F5-F4A0-46F8-B98F-FE03E7C49FDA}"/>
               </a:ext>
             </a:extLst>
           </p:cNvPr>
@@ -7659,7 +7659,7 @@
                 <a:ea typeface="DejaVu Sans"/>
                 <a:cs typeface="DejaVu Sans"/>
               </a:rPr>
-              <a:t>Exam practice: answers (a–b)</a:t>
+              <a:t>Plenary: answers (a–b)</a:t>
             </a:r>
           </a:p>
         </p:txBody>
@@ -7669,7 +7669,7 @@
           <p:cNvPr id="3" name="footer">
             <a:extLst xmlns:a="http://schemas.openxmlformats.org/drawingml/2006/main">
               <a:ext uri="{FF2B5EF4-FFF2-40B4-BE49-F238E27FC236}">
-                <a16:creationId xmlns:a16="http://schemas.microsoft.com/office/drawing/2014/main" id="{3FE36806-199F-49F9-BAAD-31638A1E9A95}"/>
+                <a16:creationId xmlns:a16="http://schemas.microsoft.com/office/drawing/2014/main" id="{934DCB83-AA90-4A78-8A7B-A8439314451F}"/>
               </a:ext>
             </a:extLst>
           </p:cNvPr>
@@ -7716,7 +7716,7 @@
                 <a:ea typeface="DejaVu Sans"/>
                 <a:cs typeface="DejaVu Sans"/>
               </a:rPr>
-              <a:t>Revise 360    OCR J277 1.1 Systems architecture    Check</a:t>
+              <a:t>Revise 360    OCR J277 1.1 Systems architecture</a:t>
             </a:r>
           </a:p>
         </p:txBody>
@@ -7726,7 +7726,7 @@
           <p:cNvPr id="4" name="page">
             <a:extLst xmlns:a="http://schemas.openxmlformats.org/drawingml/2006/main">
               <a:ext uri="{FF2B5EF4-FFF2-40B4-BE49-F238E27FC236}">
-                <a16:creationId xmlns:a16="http://schemas.microsoft.com/office/drawing/2014/main" id="{82CF00F9-E9A4-4DC7-9B7A-1E3D64CA7232}"/>
+                <a16:creationId xmlns:a16="http://schemas.microsoft.com/office/drawing/2014/main" id="{E952093B-9F23-41B0-ABBB-1FACF28F78BB}"/>
               </a:ext>
             </a:extLst>
           </p:cNvPr>
@@ -7783,7 +7783,7 @@
           <p:cNvPr id="5" name="scheme-intro">
             <a:extLst xmlns:a="http://schemas.openxmlformats.org/drawingml/2006/main">
               <a:ext uri="{FF2B5EF4-FFF2-40B4-BE49-F238E27FC236}">
-                <a16:creationId xmlns:a16="http://schemas.microsoft.com/office/drawing/2014/main" id="{CB19CE17-6129-42B3-855D-F559A0F4DB49}"/>
+                <a16:creationId xmlns:a16="http://schemas.microsoft.com/office/drawing/2014/main" id="{FFD38E00-47EE-4670-BC42-5CDCD618B37E}"/>
               </a:ext>
             </a:extLst>
           </p:cNvPr>
@@ -7840,7 +7840,7 @@
           <p:cNvPr id="6" name="scheme-a">
             <a:extLst xmlns:a="http://schemas.openxmlformats.org/drawingml/2006/main">
               <a:ext uri="{FF2B5EF4-FFF2-40B4-BE49-F238E27FC236}">
-                <a16:creationId xmlns:a16="http://schemas.microsoft.com/office/drawing/2014/main" id="{956C80BE-919B-40DC-87A1-D11B2973F2DF}"/>
+                <a16:creationId xmlns:a16="http://schemas.microsoft.com/office/drawing/2014/main" id="{34B97E33-3247-49FF-9C7E-15CC144C4DD0}"/>
               </a:ext>
             </a:extLst>
           </p:cNvPr>
@@ -7897,7 +7897,7 @@
           <p:cNvPr id="7" name="scheme-b">
             <a:extLst xmlns:a="http://schemas.openxmlformats.org/drawingml/2006/main">
               <a:ext uri="{FF2B5EF4-FFF2-40B4-BE49-F238E27FC236}">
-                <a16:creationId xmlns:a16="http://schemas.microsoft.com/office/drawing/2014/main" id="{AE471A4D-0A3C-45E8-95A2-9022914D7738}"/>
+                <a16:creationId xmlns:a16="http://schemas.microsoft.com/office/drawing/2014/main" id="{60DA8485-D35B-4C6A-827D-C1935C529B8F}"/>
               </a:ext>
             </a:extLst>
           </p:cNvPr>
@@ -7952,7 +7952,7 @@
     </p:spTree>
     <p:extLst>
       <p:ext uri="{BB962C8B-B14F-4D97-AF65-F5344CB8AC3E}">
-        <p14:creationId xmlns:p14="http://schemas.microsoft.com/office/powerpoint/2010/main" val="1462781687"/>
+        <p14:creationId xmlns:p14="http://schemas.microsoft.com/office/powerpoint/2010/main" val="1470308533"/>
       </p:ext>
     </p:extLst>
   </p:cSld>
@@ -7965,7 +7965,7 @@
     <p:bg>
       <p:bgPr>
         <a:solidFill xmlns:a="http://schemas.openxmlformats.org/drawingml/2006/main">
-          <a:srgbClr val="FFFFFF"/>
+          <a:srgbClr val="EAF3FF"/>
         </a:solidFill>
       </p:bgPr>
     </p:bg>
@@ -7983,7 +7983,7 @@
           <p:cNvPr id="12" name="topic">
             <a:extLst xmlns:a="http://schemas.openxmlformats.org/drawingml/2006/main">
               <a:ext uri="{FF2B5EF4-FFF2-40B4-BE49-F238E27FC236}">
-                <a16:creationId xmlns:a16="http://schemas.microsoft.com/office/drawing/2014/main" id="{72872443-1F63-4836-99E9-1A8AD2441D75}"/>
+                <a16:creationId xmlns:a16="http://schemas.microsoft.com/office/drawing/2014/main" id="{73F38134-5436-4B8B-9467-6BAA84B82F16}"/>
               </a:ext>
             </a:extLst>
           </p:cNvPr>
@@ -7995,7 +7995,7 @@
         <p:spPr>
           <a:xfrm xmlns:a="http://schemas.openxmlformats.org/drawingml/2006/main">
             <a:off x="666750" y="323850"/>
-            <a:ext cx="6667500" cy="276225"/>
+            <a:ext cx="9810750" cy="276225"/>
           </a:xfrm>
           <a:prstGeom xmlns:a="http://schemas.openxmlformats.org/drawingml/2006/main" prst="rect">
             <a:avLst/>
@@ -8030,7 +8030,7 @@
                 <a:ea typeface="DejaVu Sans"/>
                 <a:cs typeface="DejaVu Sans"/>
               </a:rPr>
-              <a:t>TOPIC 1.1   LESSON 03</a:t>
+              <a:t>TOPIC 1.1   /   LESSON 03   /   CHECK</a:t>
             </a:r>
           </a:p>
         </p:txBody>
@@ -8040,7 +8040,7 @@
           <p:cNvPr id="2" name="heading">
             <a:extLst xmlns:a="http://schemas.openxmlformats.org/drawingml/2006/main">
               <a:ext uri="{FF2B5EF4-FFF2-40B4-BE49-F238E27FC236}">
-                <a16:creationId xmlns:a16="http://schemas.microsoft.com/office/drawing/2014/main" id="{2FFA5C12-187D-4E93-A5C6-AF5E514D7E17}"/>
+                <a16:creationId xmlns:a16="http://schemas.microsoft.com/office/drawing/2014/main" id="{CD03ADDC-F5C8-4AF8-8EE3-A3A200B8F839}"/>
               </a:ext>
             </a:extLst>
           </p:cNvPr>
@@ -8087,7 +8087,7 @@
                 <a:ea typeface="DejaVu Sans"/>
                 <a:cs typeface="DejaVu Sans"/>
               </a:rPr>
-              <a:t>Exam practice: answer (c)</a:t>
+              <a:t>Plenary: answer (c)</a:t>
             </a:r>
           </a:p>
         </p:txBody>
@@ -8097,7 +8097,7 @@
           <p:cNvPr id="3" name="footer">
             <a:extLst xmlns:a="http://schemas.openxmlformats.org/drawingml/2006/main">
               <a:ext uri="{FF2B5EF4-FFF2-40B4-BE49-F238E27FC236}">
-                <a16:creationId xmlns:a16="http://schemas.microsoft.com/office/drawing/2014/main" id="{74209451-6FC7-4CF8-8B30-885E9DA438DA}"/>
+                <a16:creationId xmlns:a16="http://schemas.microsoft.com/office/drawing/2014/main" id="{C9F83834-54FB-468C-8B6F-80246FEB5CD1}"/>
               </a:ext>
             </a:extLst>
           </p:cNvPr>
@@ -8144,7 +8144,7 @@
                 <a:ea typeface="DejaVu Sans"/>
                 <a:cs typeface="DejaVu Sans"/>
               </a:rPr>
-              <a:t>Revise 360    OCR J277 1.1 Systems architecture    Check</a:t>
+              <a:t>Revise 360    OCR J277 1.1 Systems architecture</a:t>
             </a:r>
           </a:p>
         </p:txBody>
@@ -8154,7 +8154,7 @@
           <p:cNvPr id="4" name="page">
             <a:extLst xmlns:a="http://schemas.openxmlformats.org/drawingml/2006/main">
               <a:ext uri="{FF2B5EF4-FFF2-40B4-BE49-F238E27FC236}">
-                <a16:creationId xmlns:a16="http://schemas.microsoft.com/office/drawing/2014/main" id="{1E9000B6-2181-4B33-BDD9-AC3D1A404343}"/>
+                <a16:creationId xmlns:a16="http://schemas.microsoft.com/office/drawing/2014/main" id="{6F3D5A8E-358F-45B3-9DA0-992D59D1D33C}"/>
               </a:ext>
             </a:extLst>
           </p:cNvPr>
@@ -8211,7 +8211,7 @@
           <p:cNvPr id="5" name="scheme-intro">
             <a:extLst xmlns:a="http://schemas.openxmlformats.org/drawingml/2006/main">
               <a:ext uri="{FF2B5EF4-FFF2-40B4-BE49-F238E27FC236}">
-                <a16:creationId xmlns:a16="http://schemas.microsoft.com/office/drawing/2014/main" id="{05A7EC48-0C4E-4164-B31D-4B0442AF874B}"/>
+                <a16:creationId xmlns:a16="http://schemas.microsoft.com/office/drawing/2014/main" id="{30DC50FC-57A8-4364-9C3B-CA36207E0FA0}"/>
               </a:ext>
             </a:extLst>
           </p:cNvPr>
@@ -8268,7 +8268,7 @@
           <p:cNvPr id="6" name="number-1">
             <a:extLst xmlns:a="http://schemas.openxmlformats.org/drawingml/2006/main">
               <a:ext uri="{FF2B5EF4-FFF2-40B4-BE49-F238E27FC236}">
-                <a16:creationId xmlns:a16="http://schemas.microsoft.com/office/drawing/2014/main" id="{FF08FE6B-39AC-4026-B68B-AC5FC39EFEBE}"/>
+                <a16:creationId xmlns:a16="http://schemas.microsoft.com/office/drawing/2014/main" id="{5E00BB8F-7D32-47F2-B495-A84F5871FF88}"/>
               </a:ext>
             </a:extLst>
           </p:cNvPr>
@@ -8325,7 +8325,7 @@
           <p:cNvPr id="7" name="item-1">
             <a:extLst xmlns:a="http://schemas.openxmlformats.org/drawingml/2006/main">
               <a:ext uri="{FF2B5EF4-FFF2-40B4-BE49-F238E27FC236}">
-                <a16:creationId xmlns:a16="http://schemas.microsoft.com/office/drawing/2014/main" id="{4543098A-BC95-4A89-B093-844A606EAD33}"/>
+                <a16:creationId xmlns:a16="http://schemas.microsoft.com/office/drawing/2014/main" id="{21F7DB45-CDF3-4046-914E-B7DE2906621D}"/>
               </a:ext>
             </a:extLst>
           </p:cNvPr>
@@ -8382,7 +8382,7 @@
           <p:cNvPr id="8" name="number-2">
             <a:extLst xmlns:a="http://schemas.openxmlformats.org/drawingml/2006/main">
               <a:ext uri="{FF2B5EF4-FFF2-40B4-BE49-F238E27FC236}">
-                <a16:creationId xmlns:a16="http://schemas.microsoft.com/office/drawing/2014/main" id="{8D966AAA-3B5C-4094-8982-347F065C90F4}"/>
+                <a16:creationId xmlns:a16="http://schemas.microsoft.com/office/drawing/2014/main" id="{1C2E40BA-7A83-45D4-B3F5-EF4F37B318B9}"/>
               </a:ext>
             </a:extLst>
           </p:cNvPr>
@@ -8439,7 +8439,7 @@
           <p:cNvPr id="9" name="item-2">
             <a:extLst xmlns:a="http://schemas.openxmlformats.org/drawingml/2006/main">
               <a:ext uri="{FF2B5EF4-FFF2-40B4-BE49-F238E27FC236}">
-                <a16:creationId xmlns:a16="http://schemas.microsoft.com/office/drawing/2014/main" id="{3778BD06-181D-4F9E-8AF9-6E8538319936}"/>
+                <a16:creationId xmlns:a16="http://schemas.microsoft.com/office/drawing/2014/main" id="{FCB5005A-5EB3-4EA0-8D44-91EA70742650}"/>
               </a:ext>
             </a:extLst>
           </p:cNvPr>
@@ -8496,7 +8496,7 @@
           <p:cNvPr id="10" name="number-3">
             <a:extLst xmlns:a="http://schemas.openxmlformats.org/drawingml/2006/main">
               <a:ext uri="{FF2B5EF4-FFF2-40B4-BE49-F238E27FC236}">
-                <a16:creationId xmlns:a16="http://schemas.microsoft.com/office/drawing/2014/main" id="{E43D1095-6173-46A0-845D-27CB20AA8231}"/>
+                <a16:creationId xmlns:a16="http://schemas.microsoft.com/office/drawing/2014/main" id="{A4162743-2302-4ABC-A928-65B1D105EC36}"/>
               </a:ext>
             </a:extLst>
           </p:cNvPr>
@@ -8553,7 +8553,7 @@
           <p:cNvPr id="11" name="item-3">
             <a:extLst xmlns:a="http://schemas.openxmlformats.org/drawingml/2006/main">
               <a:ext uri="{FF2B5EF4-FFF2-40B4-BE49-F238E27FC236}">
-                <a16:creationId xmlns:a16="http://schemas.microsoft.com/office/drawing/2014/main" id="{1A17DED0-23D1-496F-83D7-88632CD28D8E}"/>
+                <a16:creationId xmlns:a16="http://schemas.microsoft.com/office/drawing/2014/main" id="{4E258EEC-8280-45C2-9C3E-1CD1A0CF0503}"/>
               </a:ext>
             </a:extLst>
           </p:cNvPr>
@@ -8608,7 +8608,7 @@
     </p:spTree>
     <p:extLst>
       <p:ext uri="{BB962C8B-B14F-4D97-AF65-F5344CB8AC3E}">
-        <p14:creationId xmlns:p14="http://schemas.microsoft.com/office/powerpoint/2010/main" val="2023030766"/>
+        <p14:creationId xmlns:p14="http://schemas.microsoft.com/office/powerpoint/2010/main" val="571307330"/>
       </p:ext>
     </p:extLst>
   </p:cSld>
@@ -8639,7 +8639,7 @@
           <p:cNvPr id="11" name="topic">
             <a:extLst xmlns:a="http://schemas.openxmlformats.org/drawingml/2006/main">
               <a:ext uri="{FF2B5EF4-FFF2-40B4-BE49-F238E27FC236}">
-                <a16:creationId xmlns:a16="http://schemas.microsoft.com/office/drawing/2014/main" id="{CE32DDC7-2A16-4896-9C53-7B99DDF4A598}"/>
+                <a16:creationId xmlns:a16="http://schemas.microsoft.com/office/drawing/2014/main" id="{A316C46B-9546-4542-BCE0-5D3DD299020B}"/>
               </a:ext>
             </a:extLst>
           </p:cNvPr>
@@ -8651,7 +8651,7 @@
         <p:spPr>
           <a:xfrm xmlns:a="http://schemas.openxmlformats.org/drawingml/2006/main">
             <a:off x="666750" y="323850"/>
-            <a:ext cx="6667500" cy="276225"/>
+            <a:ext cx="9810750" cy="276225"/>
           </a:xfrm>
           <a:prstGeom xmlns:a="http://schemas.openxmlformats.org/drawingml/2006/main" prst="rect">
             <a:avLst/>
@@ -8686,7 +8686,7 @@
                 <a:ea typeface="DejaVu Sans"/>
                 <a:cs typeface="DejaVu Sans"/>
               </a:rPr>
-              <a:t>TOPIC 1.1   LESSON 03</a:t>
+              <a:t>TOPIC 1.1   /   LESSON 03   /   WORKSHEET</a:t>
             </a:r>
           </a:p>
         </p:txBody>
@@ -8696,7 +8696,7 @@
           <p:cNvPr id="2" name="heading">
             <a:extLst xmlns:a="http://schemas.openxmlformats.org/drawingml/2006/main">
               <a:ext uri="{FF2B5EF4-FFF2-40B4-BE49-F238E27FC236}">
-                <a16:creationId xmlns:a16="http://schemas.microsoft.com/office/drawing/2014/main" id="{7CEB2A94-7E32-477A-A6C5-49FBC838E618}"/>
+                <a16:creationId xmlns:a16="http://schemas.microsoft.com/office/drawing/2014/main" id="{B5340807-456E-4D7A-9F3E-C503CF98B330}"/>
               </a:ext>
             </a:extLst>
           </p:cNvPr>
@@ -8753,7 +8753,7 @@
           <p:cNvPr id="3" name="footer">
             <a:extLst xmlns:a="http://schemas.openxmlformats.org/drawingml/2006/main">
               <a:ext uri="{FF2B5EF4-FFF2-40B4-BE49-F238E27FC236}">
-                <a16:creationId xmlns:a16="http://schemas.microsoft.com/office/drawing/2014/main" id="{D69A3EE8-E1D2-42DF-86DD-9ECFAFB4CBE8}"/>
+                <a16:creationId xmlns:a16="http://schemas.microsoft.com/office/drawing/2014/main" id="{200B4124-0B7B-46D5-BBB2-5B1C338E9B32}"/>
               </a:ext>
             </a:extLst>
           </p:cNvPr>
@@ -8800,7 +8800,7 @@
                 <a:ea typeface="DejaVu Sans"/>
                 <a:cs typeface="DejaVu Sans"/>
               </a:rPr>
-              <a:t>Revise 360    OCR J277 1.1 Systems architecture    Worksheet</a:t>
+              <a:t>Revise 360    OCR J277 1.1 Systems architecture</a:t>
             </a:r>
           </a:p>
         </p:txBody>
@@ -8810,7 +8810,7 @@
           <p:cNvPr id="4" name="page">
             <a:extLst xmlns:a="http://schemas.openxmlformats.org/drawingml/2006/main">
               <a:ext uri="{FF2B5EF4-FFF2-40B4-BE49-F238E27FC236}">
-                <a16:creationId xmlns:a16="http://schemas.microsoft.com/office/drawing/2014/main" id="{819D2975-B39D-4C2F-90A2-E967E8B968C0}"/>
+                <a16:creationId xmlns:a16="http://schemas.microsoft.com/office/drawing/2014/main" id="{8B54C444-C18A-4B59-8081-D5DDEAF198D9}"/>
               </a:ext>
             </a:extLst>
           </p:cNvPr>
@@ -8867,7 +8867,7 @@
           <p:cNvPr id="5" name="outcome-intro">
             <a:extLst xmlns:a="http://schemas.openxmlformats.org/drawingml/2006/main">
               <a:ext uri="{FF2B5EF4-FFF2-40B4-BE49-F238E27FC236}">
-                <a16:creationId xmlns:a16="http://schemas.microsoft.com/office/drawing/2014/main" id="{AAFB601F-2FE4-4FBF-8CED-02FF40172246}"/>
+                <a16:creationId xmlns:a16="http://schemas.microsoft.com/office/drawing/2014/main" id="{6A402D10-0BAF-4924-9EE1-0A515ADB957C}"/>
               </a:ext>
             </a:extLst>
           </p:cNvPr>
@@ -8924,7 +8924,7 @@
           <p:cNvPr id="6" name="number-1">
             <a:extLst xmlns:a="http://schemas.openxmlformats.org/drawingml/2006/main">
               <a:ext uri="{FF2B5EF4-FFF2-40B4-BE49-F238E27FC236}">
-                <a16:creationId xmlns:a16="http://schemas.microsoft.com/office/drawing/2014/main" id="{BDC2DB7A-C3AD-4F27-B42E-B4AAFC461DF3}"/>
+                <a16:creationId xmlns:a16="http://schemas.microsoft.com/office/drawing/2014/main" id="{0E653945-993B-490D-B538-9D56E8AC4BB4}"/>
               </a:ext>
             </a:extLst>
           </p:cNvPr>
@@ -8981,7 +8981,7 @@
           <p:cNvPr id="7" name="item-1">
             <a:extLst xmlns:a="http://schemas.openxmlformats.org/drawingml/2006/main">
               <a:ext uri="{FF2B5EF4-FFF2-40B4-BE49-F238E27FC236}">
-                <a16:creationId xmlns:a16="http://schemas.microsoft.com/office/drawing/2014/main" id="{39A60570-71D6-446F-BA07-F4DD04F1DD7F}"/>
+                <a16:creationId xmlns:a16="http://schemas.microsoft.com/office/drawing/2014/main" id="{B91E5143-0026-4D3E-B1F1-13F7338BAFE7}"/>
               </a:ext>
             </a:extLst>
           </p:cNvPr>
@@ -9038,7 +9038,7 @@
           <p:cNvPr id="8" name="number-2">
             <a:extLst xmlns:a="http://schemas.openxmlformats.org/drawingml/2006/main">
               <a:ext uri="{FF2B5EF4-FFF2-40B4-BE49-F238E27FC236}">
-                <a16:creationId xmlns:a16="http://schemas.microsoft.com/office/drawing/2014/main" id="{C177148A-0AC4-4303-B2C7-CA7A0E652D01}"/>
+                <a16:creationId xmlns:a16="http://schemas.microsoft.com/office/drawing/2014/main" id="{F1DE19B8-AEC9-448B-9A02-B199B4C14310}"/>
               </a:ext>
             </a:extLst>
           </p:cNvPr>
@@ -9095,7 +9095,7 @@
           <p:cNvPr id="9" name="item-2">
             <a:extLst xmlns:a="http://schemas.openxmlformats.org/drawingml/2006/main">
               <a:ext uri="{FF2B5EF4-FFF2-40B4-BE49-F238E27FC236}">
-                <a16:creationId xmlns:a16="http://schemas.microsoft.com/office/drawing/2014/main" id="{0F957B64-F9F6-4875-BD43-3C4F3519AABC}"/>
+                <a16:creationId xmlns:a16="http://schemas.microsoft.com/office/drawing/2014/main" id="{B7B05CF4-7F9A-4D5D-A709-9C685294D95F}"/>
               </a:ext>
             </a:extLst>
           </p:cNvPr>
@@ -9152,36 +9152,36 @@
           <p:cNvPr id="10" name="starter-next">
             <a:extLst xmlns:a="http://schemas.openxmlformats.org/drawingml/2006/main">
               <a:ext uri="{FF2B5EF4-FFF2-40B4-BE49-F238E27FC236}">
-                <a16:creationId xmlns:a16="http://schemas.microsoft.com/office/drawing/2014/main" id="{04B89795-B0A3-423F-9529-6A9FB242A749}"/>
-              </a:ext>
-            </a:extLst>
-          </p:cNvPr>
-          <p:cNvSpPr>
-            <a:spLocks xmlns:a="http://schemas.openxmlformats.org/drawingml/2006/main" noGrp="1"/>
-          </p:cNvSpPr>
-          <p:nvPr/>
-        </p:nvSpPr>
-        <p:spPr>
-          <a:xfrm xmlns:a="http://schemas.openxmlformats.org/drawingml/2006/main">
-            <a:off x="704850" y="5800725"/>
-            <a:ext cx="10477500" cy="361950"/>
-          </a:xfrm>
-          <a:prstGeom xmlns:a="http://schemas.openxmlformats.org/drawingml/2006/main" prst="rect">
-            <a:avLst/>
-          </a:prstGeom>
-          <a:noFill xmlns:a="http://schemas.openxmlformats.org/drawingml/2006/main"/>
-          <a:ln xmlns:a="http://schemas.openxmlformats.org/drawingml/2006/main" w="0">
-            <a:noFill/>
-          </a:ln>
-        </p:spPr>
-        <p:txBody>
-          <a:bodyPr xmlns:a="http://schemas.openxmlformats.org/drawingml/2006/main" wrap="square" lIns="0" tIns="0" rIns="0" bIns="0" anchor="t">
-            <a:noAutofit/>
-          </a:bodyPr>
-          <a:lstStyle xmlns:a="http://schemas.openxmlformats.org/drawingml/2006/main"/>
-          <a:p xmlns:a="http://schemas.openxmlformats.org/drawingml/2006/main">
-            <a:pPr>
-              <a:defRPr sz="1650" b="0">
+                <a16:creationId xmlns:a16="http://schemas.microsoft.com/office/drawing/2014/main" id="{A4C02B74-9E81-42A8-9323-365E55AC33A5}"/>
+              </a:ext>
+            </a:extLst>
+          </p:cNvPr>
+          <p:cNvSpPr>
+            <a:spLocks xmlns:a="http://schemas.openxmlformats.org/drawingml/2006/main" noGrp="1"/>
+          </p:cNvSpPr>
+          <p:nvPr/>
+        </p:nvSpPr>
+        <p:spPr>
+          <a:xfrm xmlns:a="http://schemas.openxmlformats.org/drawingml/2006/main">
+            <a:off x="704850" y="5781675"/>
+            <a:ext cx="10477500" cy="400050"/>
+          </a:xfrm>
+          <a:prstGeom xmlns:a="http://schemas.openxmlformats.org/drawingml/2006/main" prst="rect">
+            <a:avLst/>
+          </a:prstGeom>
+          <a:noFill xmlns:a="http://schemas.openxmlformats.org/drawingml/2006/main"/>
+          <a:ln xmlns:a="http://schemas.openxmlformats.org/drawingml/2006/main" w="0">
+            <a:noFill/>
+          </a:ln>
+        </p:spPr>
+        <p:txBody>
+          <a:bodyPr xmlns:a="http://schemas.openxmlformats.org/drawingml/2006/main" wrap="square" lIns="0" tIns="0" rIns="0" bIns="0" anchor="t">
+            <a:noAutofit/>
+          </a:bodyPr>
+          <a:lstStyle xmlns:a="http://schemas.openxmlformats.org/drawingml/2006/main"/>
+          <a:p xmlns:a="http://schemas.openxmlformats.org/drawingml/2006/main">
+            <a:pPr>
+              <a:defRPr sz="1650" b="1">
                 <a:solidFill>
                   <a:srgbClr val="2D63FF"/>
                 </a:solidFill>
@@ -9191,7 +9191,7 @@
               </a:defRPr>
             </a:pPr>
             <a:r>
-              <a:rPr sz="1650" b="0">
+              <a:rPr sz="1650" b="1">
                 <a:solidFill>
                   <a:srgbClr val="2D63FF"/>
                 </a:solidFill>
@@ -9199,7 +9199,7 @@
                 <a:ea typeface="DejaVu Sans"/>
                 <a:cs typeface="DejaVu Sans"/>
               </a:rPr>
-              <a:t>Complete the worksheet starter before opening the experience.</a:t>
+              <a:t>Complete the experience in this lesson; finish with the plenary knowledge check.</a:t>
             </a:r>
           </a:p>
         </p:txBody>
@@ -9207,7 +9207,7 @@
     </p:spTree>
     <p:extLst>
       <p:ext uri="{BB962C8B-B14F-4D97-AF65-F5344CB8AC3E}">
-        <p14:creationId xmlns:p14="http://schemas.microsoft.com/office/powerpoint/2010/main" val="1476397527"/>
+        <p14:creationId xmlns:p14="http://schemas.microsoft.com/office/powerpoint/2010/main" val="1810011060"/>
       </p:ext>
     </p:extLst>
   </p:cSld>
@@ -9238,7 +9238,7 @@
           <p:cNvPr id="12" name="topic">
             <a:extLst xmlns:a="http://schemas.openxmlformats.org/drawingml/2006/main">
               <a:ext uri="{FF2B5EF4-FFF2-40B4-BE49-F238E27FC236}">
-                <a16:creationId xmlns:a16="http://schemas.microsoft.com/office/drawing/2014/main" id="{C8696627-8B0A-453C-8BA9-F03AC5B64BDC}"/>
+                <a16:creationId xmlns:a16="http://schemas.microsoft.com/office/drawing/2014/main" id="{6F4F0DC8-F69F-473B-8134-F2467528496E}"/>
               </a:ext>
             </a:extLst>
           </p:cNvPr>
@@ -9250,7 +9250,7 @@
         <p:spPr>
           <a:xfrm xmlns:a="http://schemas.openxmlformats.org/drawingml/2006/main">
             <a:off x="666750" y="323850"/>
-            <a:ext cx="6667500" cy="276225"/>
+            <a:ext cx="9810750" cy="276225"/>
           </a:xfrm>
           <a:prstGeom xmlns:a="http://schemas.openxmlformats.org/drawingml/2006/main" prst="rect">
             <a:avLst/>
@@ -9285,7 +9285,7 @@
                 <a:ea typeface="DejaVu Sans"/>
                 <a:cs typeface="DejaVu Sans"/>
               </a:rPr>
-              <a:t>TOPIC 1.1   LESSON 03</a:t>
+              <a:t>TOPIC 1.1   /   LESSON 03   /   SELF-CHECK</a:t>
             </a:r>
           </a:p>
         </p:txBody>
@@ -9295,7 +9295,7 @@
           <p:cNvPr id="2" name="heading">
             <a:extLst xmlns:a="http://schemas.openxmlformats.org/drawingml/2006/main">
               <a:ext uri="{FF2B5EF4-FFF2-40B4-BE49-F238E27FC236}">
-                <a16:creationId xmlns:a16="http://schemas.microsoft.com/office/drawing/2014/main" id="{94E3342F-240E-4EF8-AC41-65C4922E0906}"/>
+                <a16:creationId xmlns:a16="http://schemas.microsoft.com/office/drawing/2014/main" id="{D480890F-0A18-4D51-9CB9-C070FAE454E9}"/>
               </a:ext>
             </a:extLst>
           </p:cNvPr>
@@ -9352,7 +9352,7 @@
           <p:cNvPr id="3" name="footer">
             <a:extLst xmlns:a="http://schemas.openxmlformats.org/drawingml/2006/main">
               <a:ext uri="{FF2B5EF4-FFF2-40B4-BE49-F238E27FC236}">
-                <a16:creationId xmlns:a16="http://schemas.microsoft.com/office/drawing/2014/main" id="{AA8FDBF9-B428-4536-9FD9-0EC508932CA9}"/>
+                <a16:creationId xmlns:a16="http://schemas.microsoft.com/office/drawing/2014/main" id="{9536F89C-5EC6-40A0-8EB8-D0C0EC84A19A}"/>
               </a:ext>
             </a:extLst>
           </p:cNvPr>
@@ -9399,7 +9399,7 @@
                 <a:ea typeface="DejaVu Sans"/>
                 <a:cs typeface="DejaVu Sans"/>
               </a:rPr>
-              <a:t>Revise 360    OCR J277 1.1 Systems architecture    Self-check</a:t>
+              <a:t>Revise 360    OCR J277 1.1 Systems architecture</a:t>
             </a:r>
           </a:p>
         </p:txBody>
@@ -9409,7 +9409,7 @@
           <p:cNvPr id="4" name="page">
             <a:extLst xmlns:a="http://schemas.openxmlformats.org/drawingml/2006/main">
               <a:ext uri="{FF2B5EF4-FFF2-40B4-BE49-F238E27FC236}">
-                <a16:creationId xmlns:a16="http://schemas.microsoft.com/office/drawing/2014/main" id="{9D45A81F-7392-4B2F-ADF4-C5A6CA194CE7}"/>
+                <a16:creationId xmlns:a16="http://schemas.microsoft.com/office/drawing/2014/main" id="{6A645108-AC13-4EA3-B991-216E6F0391A1}"/>
               </a:ext>
             </a:extLst>
           </p:cNvPr>
@@ -9466,7 +9466,7 @@
           <p:cNvPr id="5" name="confidence-instruction">
             <a:extLst xmlns:a="http://schemas.openxmlformats.org/drawingml/2006/main">
               <a:ext uri="{FF2B5EF4-FFF2-40B4-BE49-F238E27FC236}">
-                <a16:creationId xmlns:a16="http://schemas.microsoft.com/office/drawing/2014/main" id="{3B1B954A-E2EA-4F12-B658-5BDD2A5F8356}"/>
+                <a16:creationId xmlns:a16="http://schemas.microsoft.com/office/drawing/2014/main" id="{8F4BCAF4-1684-4EFB-94EB-3F5CCD55FB69}"/>
               </a:ext>
             </a:extLst>
           </p:cNvPr>
@@ -9523,7 +9523,7 @@
           <p:cNvPr id="6" name="number-1">
             <a:extLst xmlns:a="http://schemas.openxmlformats.org/drawingml/2006/main">
               <a:ext uri="{FF2B5EF4-FFF2-40B4-BE49-F238E27FC236}">
-                <a16:creationId xmlns:a16="http://schemas.microsoft.com/office/drawing/2014/main" id="{25FAA6D2-EE89-49E9-BFFD-5AE3682B534E}"/>
+                <a16:creationId xmlns:a16="http://schemas.microsoft.com/office/drawing/2014/main" id="{5DA5E7E3-641C-45F4-97FF-D18D9DDBD512}"/>
               </a:ext>
             </a:extLst>
           </p:cNvPr>
@@ -9580,7 +9580,7 @@
           <p:cNvPr id="7" name="item-1">
             <a:extLst xmlns:a="http://schemas.openxmlformats.org/drawingml/2006/main">
               <a:ext uri="{FF2B5EF4-FFF2-40B4-BE49-F238E27FC236}">
-                <a16:creationId xmlns:a16="http://schemas.microsoft.com/office/drawing/2014/main" id="{4E42CEE1-4DF8-493B-AC60-B0E7A601908D}"/>
+                <a16:creationId xmlns:a16="http://schemas.microsoft.com/office/drawing/2014/main" id="{1AEACDE0-D918-432C-BE97-39C0D0237269}"/>
               </a:ext>
             </a:extLst>
           </p:cNvPr>
@@ -9637,7 +9637,7 @@
           <p:cNvPr id="8" name="number-2">
             <a:extLst xmlns:a="http://schemas.openxmlformats.org/drawingml/2006/main">
               <a:ext uri="{FF2B5EF4-FFF2-40B4-BE49-F238E27FC236}">
-                <a16:creationId xmlns:a16="http://schemas.microsoft.com/office/drawing/2014/main" id="{63D303F0-192A-4E08-A28D-A2DC24AF3525}"/>
+                <a16:creationId xmlns:a16="http://schemas.microsoft.com/office/drawing/2014/main" id="{027AB85C-8B0A-49E9-996E-DB92243B0151}"/>
               </a:ext>
             </a:extLst>
           </p:cNvPr>
@@ -9694,7 +9694,7 @@
           <p:cNvPr id="9" name="item-2">
             <a:extLst xmlns:a="http://schemas.openxmlformats.org/drawingml/2006/main">
               <a:ext uri="{FF2B5EF4-FFF2-40B4-BE49-F238E27FC236}">
-                <a16:creationId xmlns:a16="http://schemas.microsoft.com/office/drawing/2014/main" id="{0D0A7BCF-685F-4373-9BBD-D1884453277B}"/>
+                <a16:creationId xmlns:a16="http://schemas.microsoft.com/office/drawing/2014/main" id="{9EDE1773-0395-4545-B10B-EF8E9CADA677}"/>
               </a:ext>
             </a:extLst>
           </p:cNvPr>
@@ -9751,7 +9751,7 @@
           <p:cNvPr id="10" name="number-3">
             <a:extLst xmlns:a="http://schemas.openxmlformats.org/drawingml/2006/main">
               <a:ext uri="{FF2B5EF4-FFF2-40B4-BE49-F238E27FC236}">
-                <a16:creationId xmlns:a16="http://schemas.microsoft.com/office/drawing/2014/main" id="{95B3FF59-25E6-4A4E-95EE-BD5FCD9BA96F}"/>
+                <a16:creationId xmlns:a16="http://schemas.microsoft.com/office/drawing/2014/main" id="{0F093DCA-7B18-4771-9998-EF0DCC073ED5}"/>
               </a:ext>
             </a:extLst>
           </p:cNvPr>
@@ -9808,7 +9808,7 @@
           <p:cNvPr id="11" name="item-3">
             <a:extLst xmlns:a="http://schemas.openxmlformats.org/drawingml/2006/main">
               <a:ext uri="{FF2B5EF4-FFF2-40B4-BE49-F238E27FC236}">
-                <a16:creationId xmlns:a16="http://schemas.microsoft.com/office/drawing/2014/main" id="{A07C6D53-4265-40F0-ACE1-C0B66051B8FD}"/>
+                <a16:creationId xmlns:a16="http://schemas.microsoft.com/office/drawing/2014/main" id="{C10295E7-C6C7-4708-B5E9-4A569985591D}"/>
               </a:ext>
             </a:extLst>
           </p:cNvPr>
@@ -9863,7 +9863,7 @@
     </p:spTree>
     <p:extLst>
       <p:ext uri="{BB962C8B-B14F-4D97-AF65-F5344CB8AC3E}">
-        <p14:creationId xmlns:p14="http://schemas.microsoft.com/office/powerpoint/2010/main" val="943362862"/>
+        <p14:creationId xmlns:p14="http://schemas.microsoft.com/office/powerpoint/2010/main" val="2022700313"/>
       </p:ext>
     </p:extLst>
   </p:cSld>
@@ -9876,7 +9876,7 @@
     <p:bg>
       <p:bgPr>
         <a:solidFill xmlns:a="http://schemas.openxmlformats.org/drawingml/2006/main">
-          <a:srgbClr val="FFFFFF"/>
+          <a:srgbClr val="FFF8E9"/>
         </a:solidFill>
       </p:bgPr>
     </p:bg>
@@ -9894,7 +9894,7 @@
           <p:cNvPr id="8" name="topic">
             <a:extLst xmlns:a="http://schemas.openxmlformats.org/drawingml/2006/main">
               <a:ext uri="{FF2B5EF4-FFF2-40B4-BE49-F238E27FC236}">
-                <a16:creationId xmlns:a16="http://schemas.microsoft.com/office/drawing/2014/main" id="{CDD5AE5D-03FC-493F-8D7D-D20CCB1411C1}"/>
+                <a16:creationId xmlns:a16="http://schemas.microsoft.com/office/drawing/2014/main" id="{39203890-6B51-4832-B923-ACF3D23DF629}"/>
               </a:ext>
             </a:extLst>
           </p:cNvPr>
@@ -9906,7 +9906,7 @@
         <p:spPr>
           <a:xfrm xmlns:a="http://schemas.openxmlformats.org/drawingml/2006/main">
             <a:off x="666750" y="323850"/>
-            <a:ext cx="6667500" cy="276225"/>
+            <a:ext cx="9810750" cy="276225"/>
           </a:xfrm>
           <a:prstGeom xmlns:a="http://schemas.openxmlformats.org/drawingml/2006/main" prst="rect">
             <a:avLst/>
@@ -9941,7 +9941,7 @@
                 <a:ea typeface="DejaVu Sans"/>
                 <a:cs typeface="DejaVu Sans"/>
               </a:rPr>
-              <a:t>TOPIC 1.1   LESSON 03</a:t>
+              <a:t>TOPIC 1.1   /   LESSON 03   /   WORKSHEET STARTER</a:t>
             </a:r>
           </a:p>
         </p:txBody>
@@ -9951,7 +9951,7 @@
           <p:cNvPr id="2" name="heading">
             <a:extLst xmlns:a="http://schemas.openxmlformats.org/drawingml/2006/main">
               <a:ext uri="{FF2B5EF4-FFF2-40B4-BE49-F238E27FC236}">
-                <a16:creationId xmlns:a16="http://schemas.microsoft.com/office/drawing/2014/main" id="{A3E68634-6B11-4F81-AE87-579673B397BD}"/>
+                <a16:creationId xmlns:a16="http://schemas.microsoft.com/office/drawing/2014/main" id="{2733B8A0-C09A-4E73-A27C-5D4DD7E53180}"/>
               </a:ext>
             </a:extLst>
           </p:cNvPr>
@@ -10008,7 +10008,7 @@
           <p:cNvPr id="3" name="footer">
             <a:extLst xmlns:a="http://schemas.openxmlformats.org/drawingml/2006/main">
               <a:ext uri="{FF2B5EF4-FFF2-40B4-BE49-F238E27FC236}">
-                <a16:creationId xmlns:a16="http://schemas.microsoft.com/office/drawing/2014/main" id="{5088A871-B93D-4514-8E4A-D0AE79E8C24D}"/>
+                <a16:creationId xmlns:a16="http://schemas.microsoft.com/office/drawing/2014/main" id="{7C883B70-1592-4152-BE77-973F51ECECDA}"/>
               </a:ext>
             </a:extLst>
           </p:cNvPr>
@@ -10055,7 +10055,7 @@
                 <a:ea typeface="DejaVu Sans"/>
                 <a:cs typeface="DejaVu Sans"/>
               </a:rPr>
-              <a:t>Revise 360    OCR J277 1.1 Systems architecture    Worksheet starter</a:t>
+              <a:t>Revise 360    OCR J277 1.1 Systems architecture</a:t>
             </a:r>
           </a:p>
         </p:txBody>
@@ -10065,7 +10065,7 @@
           <p:cNvPr id="4" name="page">
             <a:extLst xmlns:a="http://schemas.openxmlformats.org/drawingml/2006/main">
               <a:ext uri="{FF2B5EF4-FFF2-40B4-BE49-F238E27FC236}">
-                <a16:creationId xmlns:a16="http://schemas.microsoft.com/office/drawing/2014/main" id="{F2ECDC67-CC9D-42D1-A0DE-8B177215E6C4}"/>
+                <a16:creationId xmlns:a16="http://schemas.microsoft.com/office/drawing/2014/main" id="{FB528CDD-9DDE-44C0-A8A5-011D865BA3C9}"/>
               </a:ext>
             </a:extLst>
           </p:cNvPr>
@@ -10122,7 +10122,7 @@
           <p:cNvPr id="5" name="write-first">
             <a:extLst xmlns:a="http://schemas.openxmlformats.org/drawingml/2006/main">
               <a:ext uri="{FF2B5EF4-FFF2-40B4-BE49-F238E27FC236}">
-                <a16:creationId xmlns:a16="http://schemas.microsoft.com/office/drawing/2014/main" id="{7014F1ED-9DAF-4014-9FFA-50EDAC5DCADE}"/>
+                <a16:creationId xmlns:a16="http://schemas.microsoft.com/office/drawing/2014/main" id="{8781C891-F2A8-41DD-98A5-3121EAFBACA7}"/>
               </a:ext>
             </a:extLst>
           </p:cNvPr>
@@ -10179,7 +10179,7 @@
           <p:cNvPr id="6" name="worksheet-starter">
             <a:extLst xmlns:a="http://schemas.openxmlformats.org/drawingml/2006/main">
               <a:ext uri="{FF2B5EF4-FFF2-40B4-BE49-F238E27FC236}">
-                <a16:creationId xmlns:a16="http://schemas.microsoft.com/office/drawing/2014/main" id="{C69B53F6-913F-4859-A7DC-F41C71796ADC}"/>
+                <a16:creationId xmlns:a16="http://schemas.microsoft.com/office/drawing/2014/main" id="{046D91AA-F198-4293-946A-B2A6F8E7DEB9}"/>
               </a:ext>
             </a:extLst>
           </p:cNvPr>
@@ -10236,7 +10236,7 @@
           <p:cNvPr id="7" name="no-open">
             <a:extLst xmlns:a="http://schemas.openxmlformats.org/drawingml/2006/main">
               <a:ext uri="{FF2B5EF4-FFF2-40B4-BE49-F238E27FC236}">
-                <a16:creationId xmlns:a16="http://schemas.microsoft.com/office/drawing/2014/main" id="{2EE88F58-4B82-4388-A005-FF5FC5BE9674}"/>
+                <a16:creationId xmlns:a16="http://schemas.microsoft.com/office/drawing/2014/main" id="{0DC96AF0-0DD6-475A-A928-1C006E82F4DD}"/>
               </a:ext>
             </a:extLst>
           </p:cNvPr>
@@ -10291,7 +10291,7 @@
     </p:spTree>
     <p:extLst>
       <p:ext uri="{BB962C8B-B14F-4D97-AF65-F5344CB8AC3E}">
-        <p14:creationId xmlns:p14="http://schemas.microsoft.com/office/powerpoint/2010/main" val="711926360"/>
+        <p14:creationId xmlns:p14="http://schemas.microsoft.com/office/powerpoint/2010/main" val="460701197"/>
       </p:ext>
     </p:extLst>
   </p:cSld>
@@ -10304,7 +10304,7 @@
     <p:bg>
       <p:bgPr>
         <a:solidFill xmlns:a="http://schemas.openxmlformats.org/drawingml/2006/main">
-          <a:srgbClr val="FFFFFF"/>
+          <a:srgbClr val="EAF3FF"/>
         </a:solidFill>
       </p:bgPr>
     </p:bg>
@@ -10322,7 +10322,7 @@
           <p:cNvPr id="10" name="topic">
             <a:extLst xmlns:a="http://schemas.openxmlformats.org/drawingml/2006/main">
               <a:ext uri="{FF2B5EF4-FFF2-40B4-BE49-F238E27FC236}">
-                <a16:creationId xmlns:a16="http://schemas.microsoft.com/office/drawing/2014/main" id="{387B0778-8BB1-4CF8-A931-7C55C1C79AF0}"/>
+                <a16:creationId xmlns:a16="http://schemas.microsoft.com/office/drawing/2014/main" id="{597BD07C-4354-4951-80F6-6E49597B2159}"/>
               </a:ext>
             </a:extLst>
           </p:cNvPr>
@@ -10334,7 +10334,7 @@
         <p:spPr>
           <a:xfrm xmlns:a="http://schemas.openxmlformats.org/drawingml/2006/main">
             <a:off x="666750" y="323850"/>
-            <a:ext cx="6667500" cy="276225"/>
+            <a:ext cx="9810750" cy="276225"/>
           </a:xfrm>
           <a:prstGeom xmlns:a="http://schemas.openxmlformats.org/drawingml/2006/main" prst="rect">
             <a:avLst/>
@@ -10369,7 +10369,7 @@
                 <a:ea typeface="DejaVu Sans"/>
                 <a:cs typeface="DejaVu Sans"/>
               </a:rPr>
-              <a:t>TOPIC 1.1   LESSON 03</a:t>
+              <a:t>TOPIC 1.1   /   LESSON 03   /   CHECK</a:t>
             </a:r>
           </a:p>
         </p:txBody>
@@ -10379,7 +10379,7 @@
           <p:cNvPr id="2" name="heading">
             <a:extLst xmlns:a="http://schemas.openxmlformats.org/drawingml/2006/main">
               <a:ext uri="{FF2B5EF4-FFF2-40B4-BE49-F238E27FC236}">
-                <a16:creationId xmlns:a16="http://schemas.microsoft.com/office/drawing/2014/main" id="{6697DA5A-08BB-434D-9384-4EF2BA9A8896}"/>
+                <a16:creationId xmlns:a16="http://schemas.microsoft.com/office/drawing/2014/main" id="{4DD02269-BA43-431A-99EB-6ACE9209BD19}"/>
               </a:ext>
             </a:extLst>
           </p:cNvPr>
@@ -10426,7 +10426,7 @@
                 <a:ea typeface="DejaVu Sans"/>
                 <a:cs typeface="DejaVu Sans"/>
               </a:rPr>
-              <a:t>Key terminology quiz</a:t>
+              <a:t>Starter: sample answers</a:t>
             </a:r>
           </a:p>
         </p:txBody>
@@ -10436,7 +10436,7 @@
           <p:cNvPr id="3" name="footer">
             <a:extLst xmlns:a="http://schemas.openxmlformats.org/drawingml/2006/main">
               <a:ext uri="{FF2B5EF4-FFF2-40B4-BE49-F238E27FC236}">
-                <a16:creationId xmlns:a16="http://schemas.microsoft.com/office/drawing/2014/main" id="{9F4120BB-184A-441C-A448-EF08A9B75736}"/>
+                <a16:creationId xmlns:a16="http://schemas.microsoft.com/office/drawing/2014/main" id="{FEC39770-9C01-4937-8C87-C07123D1CE72}"/>
               </a:ext>
             </a:extLst>
           </p:cNvPr>
@@ -10483,7 +10483,7 @@
                 <a:ea typeface="DejaVu Sans"/>
                 <a:cs typeface="DejaVu Sans"/>
               </a:rPr>
-              <a:t>Revise 360    OCR J277 1.1 Systems architecture    Worksheet key terms</a:t>
+              <a:t>Revise 360    OCR J277 1.1 Systems architecture</a:t>
             </a:r>
           </a:p>
         </p:txBody>
@@ -10493,7 +10493,7 @@
           <p:cNvPr id="4" name="page">
             <a:extLst xmlns:a="http://schemas.openxmlformats.org/drawingml/2006/main">
               <a:ext uri="{FF2B5EF4-FFF2-40B4-BE49-F238E27FC236}">
-                <a16:creationId xmlns:a16="http://schemas.microsoft.com/office/drawing/2014/main" id="{110DA496-73EB-4FD4-8A42-7152F2E85B4D}"/>
+                <a16:creationId xmlns:a16="http://schemas.microsoft.com/office/drawing/2014/main" id="{CAB6461C-53ED-40CA-AD6C-AE97635813F0}"/>
               </a:ext>
             </a:extLst>
           </p:cNvPr>
@@ -10547,10 +10547,10 @@
       </p:sp>
       <p:sp>
         <p:nvSpPr>
-          <p:cNvPr id="5" name="define-first">
-            <a:extLst xmlns:a="http://schemas.openxmlformats.org/drawingml/2006/main">
-              <a:ext uri="{FF2B5EF4-FFF2-40B4-BE49-F238E27FC236}">
-                <a16:creationId xmlns:a16="http://schemas.microsoft.com/office/drawing/2014/main" id="{9DB188A4-4C6F-4FB4-B295-F9550526396B}"/>
+          <p:cNvPr id="5" name="sample-note">
+            <a:extLst xmlns:a="http://schemas.openxmlformats.org/drawingml/2006/main">
+              <a:ext uri="{FF2B5EF4-FFF2-40B4-BE49-F238E27FC236}">
+                <a16:creationId xmlns:a16="http://schemas.microsoft.com/office/drawing/2014/main" id="{0CA9465D-235B-48FE-8E10-DFA2F2E19C50}"/>
               </a:ext>
             </a:extLst>
           </p:cNvPr>
@@ -10562,24 +10562,24 @@
         <p:spPr>
           <a:xfrm xmlns:a="http://schemas.openxmlformats.org/drawingml/2006/main">
             <a:off x="704850" y="1562100"/>
-            <a:ext cx="10572750" cy="790575"/>
-          </a:xfrm>
-          <a:prstGeom xmlns:a="http://schemas.openxmlformats.org/drawingml/2006/main" prst="rect">
-            <a:avLst/>
-          </a:prstGeom>
-          <a:noFill xmlns:a="http://schemas.openxmlformats.org/drawingml/2006/main"/>
-          <a:ln xmlns:a="http://schemas.openxmlformats.org/drawingml/2006/main" w="0">
-            <a:noFill/>
-          </a:ln>
-        </p:spPr>
-        <p:txBody>
-          <a:bodyPr xmlns:a="http://schemas.openxmlformats.org/drawingml/2006/main" wrap="square" lIns="0" tIns="0" rIns="0" bIns="0" anchor="t">
-            <a:noAutofit/>
-          </a:bodyPr>
-          <a:lstStyle xmlns:a="http://schemas.openxmlformats.org/drawingml/2006/main"/>
-          <a:p xmlns:a="http://schemas.openxmlformats.org/drawingml/2006/main">
-            <a:pPr>
-              <a:defRPr sz="1875" b="0">
+            <a:ext cx="10477500" cy="533400"/>
+          </a:xfrm>
+          <a:prstGeom xmlns:a="http://schemas.openxmlformats.org/drawingml/2006/main" prst="rect">
+            <a:avLst/>
+          </a:prstGeom>
+          <a:noFill xmlns:a="http://schemas.openxmlformats.org/drawingml/2006/main"/>
+          <a:ln xmlns:a="http://schemas.openxmlformats.org/drawingml/2006/main" w="0">
+            <a:noFill/>
+          </a:ln>
+        </p:spPr>
+        <p:txBody>
+          <a:bodyPr xmlns:a="http://schemas.openxmlformats.org/drawingml/2006/main" wrap="square" lIns="0" tIns="0" rIns="0" bIns="0" anchor="t">
+            <a:noAutofit/>
+          </a:bodyPr>
+          <a:lstStyle xmlns:a="http://schemas.openxmlformats.org/drawingml/2006/main"/>
+          <a:p xmlns:a="http://schemas.openxmlformats.org/drawingml/2006/main">
+            <a:pPr>
+              <a:defRPr sz="1800" b="0">
                 <a:solidFill>
                   <a:srgbClr val="526174"/>
                 </a:solidFill>
@@ -10589,7 +10589,7 @@
               </a:defRPr>
             </a:pPr>
             <a:r>
-              <a:rPr sz="1875" b="0">
+              <a:rPr sz="1800" b="0">
                 <a:solidFill>
                   <a:srgbClr val="526174"/>
                 </a:solidFill>
@@ -10597,46 +10597,46 @@
                 <a:ea typeface="DejaVu Sans"/>
                 <a:cs typeface="DejaVu Sans"/>
               </a:rPr>
-              <a:t>Define the two terms listed in the key terminology section of your worksheet.</a:t>
-            </a:r>
-          </a:p>
-        </p:txBody>
-      </p:sp>
-      <p:sp>
-        <p:nvSpPr>
-          <p:cNvPr id="6" name="term-number-0">
-            <a:extLst xmlns:a="http://schemas.openxmlformats.org/drawingml/2006/main">
-              <a:ext uri="{FF2B5EF4-FFF2-40B4-BE49-F238E27FC236}">
-                <a16:creationId xmlns:a16="http://schemas.microsoft.com/office/drawing/2014/main" id="{E1358281-FA11-476F-9096-72B288AA9ED5}"/>
-              </a:ext>
-            </a:extLst>
-          </p:cNvPr>
-          <p:cNvSpPr>
-            <a:spLocks xmlns:a="http://schemas.openxmlformats.org/drawingml/2006/main" noGrp="1"/>
-          </p:cNvSpPr>
-          <p:nvPr/>
-        </p:nvSpPr>
-        <p:spPr>
-          <a:xfrm xmlns:a="http://schemas.openxmlformats.org/drawingml/2006/main">
-            <a:off x="723900" y="2686050"/>
-            <a:ext cx="590550" cy="533400"/>
-          </a:xfrm>
-          <a:prstGeom xmlns:a="http://schemas.openxmlformats.org/drawingml/2006/main" prst="rect">
-            <a:avLst/>
-          </a:prstGeom>
-          <a:noFill xmlns:a="http://schemas.openxmlformats.org/drawingml/2006/main"/>
-          <a:ln xmlns:a="http://schemas.openxmlformats.org/drawingml/2006/main" w="0">
-            <a:noFill/>
-          </a:ln>
-        </p:spPr>
-        <p:txBody>
-          <a:bodyPr xmlns:a="http://schemas.openxmlformats.org/drawingml/2006/main" wrap="square" lIns="0" tIns="0" rIns="0" bIns="0" anchor="t">
-            <a:noAutofit/>
-          </a:bodyPr>
-          <a:lstStyle xmlns:a="http://schemas.openxmlformats.org/drawingml/2006/main"/>
-          <a:p xmlns:a="http://schemas.openxmlformats.org/drawingml/2006/main">
-            <a:pPr>
-              <a:defRPr sz="2625" b="1">
+              <a:t>Compare your worksheet answer with these examples. Other accurate examples count.</a:t>
+            </a:r>
+          </a:p>
+        </p:txBody>
+      </p:sp>
+      <p:sp>
+        <p:nvSpPr>
+          <p:cNvPr id="6" name="number-1">
+            <a:extLst xmlns:a="http://schemas.openxmlformats.org/drawingml/2006/main">
+              <a:ext uri="{FF2B5EF4-FFF2-40B4-BE49-F238E27FC236}">
+                <a16:creationId xmlns:a16="http://schemas.microsoft.com/office/drawing/2014/main" id="{BB88E6D8-C984-420D-AD50-682F0A06543D}"/>
+              </a:ext>
+            </a:extLst>
+          </p:cNvPr>
+          <p:cNvSpPr>
+            <a:spLocks xmlns:a="http://schemas.openxmlformats.org/drawingml/2006/main" noGrp="1"/>
+          </p:cNvSpPr>
+          <p:nvPr/>
+        </p:nvSpPr>
+        <p:spPr>
+          <a:xfrm xmlns:a="http://schemas.openxmlformats.org/drawingml/2006/main">
+            <a:off x="723900" y="2476500"/>
+            <a:ext cx="590550" cy="476250"/>
+          </a:xfrm>
+          <a:prstGeom xmlns:a="http://schemas.openxmlformats.org/drawingml/2006/main" prst="rect">
+            <a:avLst/>
+          </a:prstGeom>
+          <a:noFill xmlns:a="http://schemas.openxmlformats.org/drawingml/2006/main"/>
+          <a:ln xmlns:a="http://schemas.openxmlformats.org/drawingml/2006/main" w="0">
+            <a:noFill/>
+          </a:ln>
+        </p:spPr>
+        <p:txBody>
+          <a:bodyPr xmlns:a="http://schemas.openxmlformats.org/drawingml/2006/main" wrap="square" lIns="0" tIns="0" rIns="0" bIns="0" anchor="t">
+            <a:noAutofit/>
+          </a:bodyPr>
+          <a:lstStyle xmlns:a="http://schemas.openxmlformats.org/drawingml/2006/main"/>
+          <a:p xmlns:a="http://schemas.openxmlformats.org/drawingml/2006/main">
+            <a:pPr>
+              <a:defRPr sz="2175" b="1">
                 <a:solidFill>
                   <a:srgbClr val="2D63FF"/>
                 </a:solidFill>
@@ -10646,7 +10646,7 @@
               </a:defRPr>
             </a:pPr>
             <a:r>
-              <a:rPr sz="2625" b="1">
+              <a:rPr sz="2175" b="1">
                 <a:solidFill>
                   <a:srgbClr val="2D63FF"/>
                 </a:solidFill>
@@ -10661,39 +10661,39 @@
       </p:sp>
       <p:sp>
         <p:nvSpPr>
-          <p:cNvPr id="7" name="term-0">
-            <a:extLst xmlns:a="http://schemas.openxmlformats.org/drawingml/2006/main">
-              <a:ext uri="{FF2B5EF4-FFF2-40B4-BE49-F238E27FC236}">
-                <a16:creationId xmlns:a16="http://schemas.microsoft.com/office/drawing/2014/main" id="{90F2D684-3A31-4FAE-B055-F6A02E7C4D3D}"/>
-              </a:ext>
-            </a:extLst>
-          </p:cNvPr>
-          <p:cNvSpPr>
-            <a:spLocks xmlns:a="http://schemas.openxmlformats.org/drawingml/2006/main" noGrp="1"/>
-          </p:cNvSpPr>
-          <p:nvPr/>
-        </p:nvSpPr>
-        <p:spPr>
-          <a:xfrm xmlns:a="http://schemas.openxmlformats.org/drawingml/2006/main">
-            <a:off x="1371600" y="2686050"/>
-            <a:ext cx="9667875" cy="666750"/>
-          </a:xfrm>
-          <a:prstGeom xmlns:a="http://schemas.openxmlformats.org/drawingml/2006/main" prst="rect">
-            <a:avLst/>
-          </a:prstGeom>
-          <a:noFill xmlns:a="http://schemas.openxmlformats.org/drawingml/2006/main"/>
-          <a:ln xmlns:a="http://schemas.openxmlformats.org/drawingml/2006/main" w="0">
-            <a:noFill/>
-          </a:ln>
-        </p:spPr>
-        <p:txBody>
-          <a:bodyPr xmlns:a="http://schemas.openxmlformats.org/drawingml/2006/main" wrap="square" lIns="0" tIns="0" rIns="0" bIns="0" anchor="t">
-            <a:noAutofit/>
-          </a:bodyPr>
-          <a:lstStyle xmlns:a="http://schemas.openxmlformats.org/drawingml/2006/main"/>
-          <a:p xmlns:a="http://schemas.openxmlformats.org/drawingml/2006/main">
-            <a:pPr>
-              <a:defRPr sz="2700" b="1">
+          <p:cNvPr id="7" name="item-1">
+            <a:extLst xmlns:a="http://schemas.openxmlformats.org/drawingml/2006/main">
+              <a:ext uri="{FF2B5EF4-FFF2-40B4-BE49-F238E27FC236}">
+                <a16:creationId xmlns:a16="http://schemas.microsoft.com/office/drawing/2014/main" id="{5B9FCC40-0CFB-449B-AEE6-F1B7AE161BB8}"/>
+              </a:ext>
+            </a:extLst>
+          </p:cNvPr>
+          <p:cNvSpPr>
+            <a:spLocks xmlns:a="http://schemas.openxmlformats.org/drawingml/2006/main" noGrp="1"/>
+          </p:cNvSpPr>
+          <p:nvPr/>
+        </p:nvSpPr>
+        <p:spPr>
+          <a:xfrm xmlns:a="http://schemas.openxmlformats.org/drawingml/2006/main">
+            <a:off x="1352550" y="2476500"/>
+            <a:ext cx="9925050" cy="1276350"/>
+          </a:xfrm>
+          <a:prstGeom xmlns:a="http://schemas.openxmlformats.org/drawingml/2006/main" prst="rect">
+            <a:avLst/>
+          </a:prstGeom>
+          <a:noFill xmlns:a="http://schemas.openxmlformats.org/drawingml/2006/main"/>
+          <a:ln xmlns:a="http://schemas.openxmlformats.org/drawingml/2006/main" w="0">
+            <a:noFill/>
+          </a:ln>
+        </p:spPr>
+        <p:txBody>
+          <a:bodyPr xmlns:a="http://schemas.openxmlformats.org/drawingml/2006/main" wrap="square" lIns="0" tIns="0" rIns="0" bIns="0" anchor="t">
+            <a:noAutofit/>
+          </a:bodyPr>
+          <a:lstStyle xmlns:a="http://schemas.openxmlformats.org/drawingml/2006/main"/>
+          <a:p xmlns:a="http://schemas.openxmlformats.org/drawingml/2006/main">
+            <a:pPr>
+              <a:defRPr sz="2175" b="0">
                 <a:solidFill>
                   <a:srgbClr val="101828"/>
                 </a:solidFill>
@@ -10703,7 +10703,7 @@
               </a:defRPr>
             </a:pPr>
             <a:r>
-              <a:rPr sz="2700" b="1">
+              <a:rPr sz="2175" b="0">
                 <a:solidFill>
                   <a:srgbClr val="101828"/>
                 </a:solidFill>
@@ -10711,46 +10711,46 @@
                 <a:ea typeface="DejaVu Sans"/>
                 <a:cs typeface="DejaVu Sans"/>
               </a:rPr>
-              <a:t>Cache</a:t>
-            </a:r>
-          </a:p>
-        </p:txBody>
-      </p:sp>
-      <p:sp>
-        <p:nvSpPr>
-          <p:cNvPr id="8" name="term-number-1">
-            <a:extLst xmlns:a="http://schemas.openxmlformats.org/drawingml/2006/main">
-              <a:ext uri="{FF2B5EF4-FFF2-40B4-BE49-F238E27FC236}">
-                <a16:creationId xmlns:a16="http://schemas.microsoft.com/office/drawing/2014/main" id="{1FC13571-A85B-4DF1-AC8B-13B4382D3E36}"/>
-              </a:ext>
-            </a:extLst>
-          </p:cNvPr>
-          <p:cNvSpPr>
-            <a:spLocks xmlns:a="http://schemas.openxmlformats.org/drawingml/2006/main" noGrp="1"/>
-          </p:cNvSpPr>
-          <p:nvPr/>
-        </p:nvSpPr>
-        <p:spPr>
-          <a:xfrm xmlns:a="http://schemas.openxmlformats.org/drawingml/2006/main">
-            <a:off x="723900" y="4324350"/>
-            <a:ext cx="590550" cy="533400"/>
-          </a:xfrm>
-          <a:prstGeom xmlns:a="http://schemas.openxmlformats.org/drawingml/2006/main" prst="rect">
-            <a:avLst/>
-          </a:prstGeom>
-          <a:noFill xmlns:a="http://schemas.openxmlformats.org/drawingml/2006/main"/>
-          <a:ln xmlns:a="http://schemas.openxmlformats.org/drawingml/2006/main" w="0">
-            <a:noFill/>
-          </a:ln>
-        </p:spPr>
-        <p:txBody>
-          <a:bodyPr xmlns:a="http://schemas.openxmlformats.org/drawingml/2006/main" wrap="square" lIns="0" tIns="0" rIns="0" bIns="0" anchor="t">
-            <a:noAutofit/>
-          </a:bodyPr>
-          <a:lstStyle xmlns:a="http://schemas.openxmlformats.org/drawingml/2006/main"/>
-          <a:p xmlns:a="http://schemas.openxmlformats.org/drawingml/2006/main">
-            <a:pPr>
-              <a:defRPr sz="2625" b="1">
+              <a:t>The processors may differ in clock speed, cache size and number of cores.</a:t>
+            </a:r>
+          </a:p>
+        </p:txBody>
+      </p:sp>
+      <p:sp>
+        <p:nvSpPr>
+          <p:cNvPr id="8" name="number-2">
+            <a:extLst xmlns:a="http://schemas.openxmlformats.org/drawingml/2006/main">
+              <a:ext uri="{FF2B5EF4-FFF2-40B4-BE49-F238E27FC236}">
+                <a16:creationId xmlns:a16="http://schemas.microsoft.com/office/drawing/2014/main" id="{28E55198-FA1E-4041-83C8-42D8923519D2}"/>
+              </a:ext>
+            </a:extLst>
+          </p:cNvPr>
+          <p:cNvSpPr>
+            <a:spLocks xmlns:a="http://schemas.openxmlformats.org/drawingml/2006/main" noGrp="1"/>
+          </p:cNvSpPr>
+          <p:nvPr/>
+        </p:nvSpPr>
+        <p:spPr>
+          <a:xfrm xmlns:a="http://schemas.openxmlformats.org/drawingml/2006/main">
+            <a:off x="723900" y="4000500"/>
+            <a:ext cx="590550" cy="476250"/>
+          </a:xfrm>
+          <a:prstGeom xmlns:a="http://schemas.openxmlformats.org/drawingml/2006/main" prst="rect">
+            <a:avLst/>
+          </a:prstGeom>
+          <a:noFill xmlns:a="http://schemas.openxmlformats.org/drawingml/2006/main"/>
+          <a:ln xmlns:a="http://schemas.openxmlformats.org/drawingml/2006/main" w="0">
+            <a:noFill/>
+          </a:ln>
+        </p:spPr>
+        <p:txBody>
+          <a:bodyPr xmlns:a="http://schemas.openxmlformats.org/drawingml/2006/main" wrap="square" lIns="0" tIns="0" rIns="0" bIns="0" anchor="t">
+            <a:noAutofit/>
+          </a:bodyPr>
+          <a:lstStyle xmlns:a="http://schemas.openxmlformats.org/drawingml/2006/main"/>
+          <a:p xmlns:a="http://schemas.openxmlformats.org/drawingml/2006/main">
+            <a:pPr>
+              <a:defRPr sz="2175" b="1">
                 <a:solidFill>
                   <a:srgbClr val="2D63FF"/>
                 </a:solidFill>
@@ -10760,7 +10760,7 @@
               </a:defRPr>
             </a:pPr>
             <a:r>
-              <a:rPr sz="2625" b="1">
+              <a:rPr sz="2175" b="1">
                 <a:solidFill>
                   <a:srgbClr val="2D63FF"/>
                 </a:solidFill>
@@ -10775,39 +10775,39 @@
       </p:sp>
       <p:sp>
         <p:nvSpPr>
-          <p:cNvPr id="9" name="term-1">
-            <a:extLst xmlns:a="http://schemas.openxmlformats.org/drawingml/2006/main">
-              <a:ext uri="{FF2B5EF4-FFF2-40B4-BE49-F238E27FC236}">
-                <a16:creationId xmlns:a16="http://schemas.microsoft.com/office/drawing/2014/main" id="{13FA4EC4-4B1A-4063-ACD1-CB9F73406624}"/>
-              </a:ext>
-            </a:extLst>
-          </p:cNvPr>
-          <p:cNvSpPr>
-            <a:spLocks xmlns:a="http://schemas.openxmlformats.org/drawingml/2006/main" noGrp="1"/>
-          </p:cNvSpPr>
-          <p:nvPr/>
-        </p:nvSpPr>
-        <p:spPr>
-          <a:xfrm xmlns:a="http://schemas.openxmlformats.org/drawingml/2006/main">
-            <a:off x="1371600" y="4324350"/>
-            <a:ext cx="9667875" cy="666750"/>
-          </a:xfrm>
-          <a:prstGeom xmlns:a="http://schemas.openxmlformats.org/drawingml/2006/main" prst="rect">
-            <a:avLst/>
-          </a:prstGeom>
-          <a:noFill xmlns:a="http://schemas.openxmlformats.org/drawingml/2006/main"/>
-          <a:ln xmlns:a="http://schemas.openxmlformats.org/drawingml/2006/main" w="0">
-            <a:noFill/>
-          </a:ln>
-        </p:spPr>
-        <p:txBody>
-          <a:bodyPr xmlns:a="http://schemas.openxmlformats.org/drawingml/2006/main" wrap="square" lIns="0" tIns="0" rIns="0" bIns="0" anchor="t">
-            <a:noAutofit/>
-          </a:bodyPr>
-          <a:lstStyle xmlns:a="http://schemas.openxmlformats.org/drawingml/2006/main"/>
-          <a:p xmlns:a="http://schemas.openxmlformats.org/drawingml/2006/main">
-            <a:pPr>
-              <a:defRPr sz="2700" b="1">
+          <p:cNvPr id="9" name="item-2">
+            <a:extLst xmlns:a="http://schemas.openxmlformats.org/drawingml/2006/main">
+              <a:ext uri="{FF2B5EF4-FFF2-40B4-BE49-F238E27FC236}">
+                <a16:creationId xmlns:a16="http://schemas.microsoft.com/office/drawing/2014/main" id="{9C14E7F5-B07D-47A9-B6DD-502AEA88DFCC}"/>
+              </a:ext>
+            </a:extLst>
+          </p:cNvPr>
+          <p:cNvSpPr>
+            <a:spLocks xmlns:a="http://schemas.openxmlformats.org/drawingml/2006/main" noGrp="1"/>
+          </p:cNvSpPr>
+          <p:nvPr/>
+        </p:nvSpPr>
+        <p:spPr>
+          <a:xfrm xmlns:a="http://schemas.openxmlformats.org/drawingml/2006/main">
+            <a:off x="1352550" y="4000500"/>
+            <a:ext cx="9925050" cy="1276350"/>
+          </a:xfrm>
+          <a:prstGeom xmlns:a="http://schemas.openxmlformats.org/drawingml/2006/main" prst="rect">
+            <a:avLst/>
+          </a:prstGeom>
+          <a:noFill xmlns:a="http://schemas.openxmlformats.org/drawingml/2006/main"/>
+          <a:ln xmlns:a="http://schemas.openxmlformats.org/drawingml/2006/main" w="0">
+            <a:noFill/>
+          </a:ln>
+        </p:spPr>
+        <p:txBody>
+          <a:bodyPr xmlns:a="http://schemas.openxmlformats.org/drawingml/2006/main" wrap="square" lIns="0" tIns="0" rIns="0" bIns="0" anchor="t">
+            <a:noAutofit/>
+          </a:bodyPr>
+          <a:lstStyle xmlns:a="http://schemas.openxmlformats.org/drawingml/2006/main"/>
+          <a:p xmlns:a="http://schemas.openxmlformats.org/drawingml/2006/main">
+            <a:pPr>
+              <a:defRPr sz="2175" b="0">
                 <a:solidFill>
                   <a:srgbClr val="101828"/>
                 </a:solidFill>
@@ -10817,7 +10817,7 @@
               </a:defRPr>
             </a:pPr>
             <a:r>
-              <a:rPr sz="2700" b="1">
+              <a:rPr sz="2175" b="0">
                 <a:solidFill>
                   <a:srgbClr val="101828"/>
                 </a:solidFill>
@@ -10825,7 +10825,7 @@
                 <a:ea typeface="DejaVu Sans"/>
                 <a:cs typeface="DejaVu Sans"/>
               </a:rPr>
-              <a:t>Register</a:t>
+              <a:t>The benefit depends on the task. Extra cores help most when software can use them.</a:t>
             </a:r>
           </a:p>
         </p:txBody>
@@ -10833,7 +10833,7 @@
     </p:spTree>
     <p:extLst>
       <p:ext uri="{BB962C8B-B14F-4D97-AF65-F5344CB8AC3E}">
-        <p14:creationId xmlns:p14="http://schemas.microsoft.com/office/powerpoint/2010/main" val="1927283968"/>
+        <p14:creationId xmlns:p14="http://schemas.microsoft.com/office/powerpoint/2010/main" val="1845958204"/>
       </p:ext>
     </p:extLst>
   </p:cSld>
@@ -10846,7 +10846,7 @@
     <p:bg>
       <p:bgPr>
         <a:solidFill xmlns:a="http://schemas.openxmlformats.org/drawingml/2006/main">
-          <a:srgbClr val="FFFFFF"/>
+          <a:srgbClr val="FFF8E9"/>
         </a:solidFill>
       </p:bgPr>
     </p:bg>
@@ -10864,7 +10864,7 @@
           <p:cNvPr id="10" name="topic">
             <a:extLst xmlns:a="http://schemas.openxmlformats.org/drawingml/2006/main">
               <a:ext uri="{FF2B5EF4-FFF2-40B4-BE49-F238E27FC236}">
-                <a16:creationId xmlns:a16="http://schemas.microsoft.com/office/drawing/2014/main" id="{AB849482-9800-4EE4-93EB-B0938E02124C}"/>
+                <a16:creationId xmlns:a16="http://schemas.microsoft.com/office/drawing/2014/main" id="{6CEF8607-CAC1-458A-BB14-497BD3E9E138}"/>
               </a:ext>
             </a:extLst>
           </p:cNvPr>
@@ -10876,7 +10876,7 @@
         <p:spPr>
           <a:xfrm xmlns:a="http://schemas.openxmlformats.org/drawingml/2006/main">
             <a:off x="666750" y="323850"/>
-            <a:ext cx="6667500" cy="276225"/>
+            <a:ext cx="9810750" cy="276225"/>
           </a:xfrm>
           <a:prstGeom xmlns:a="http://schemas.openxmlformats.org/drawingml/2006/main" prst="rect">
             <a:avLst/>
@@ -10911,7 +10911,7 @@
                 <a:ea typeface="DejaVu Sans"/>
                 <a:cs typeface="DejaVu Sans"/>
               </a:rPr>
-              <a:t>TOPIC 1.1   LESSON 03</a:t>
+              <a:t>TOPIC 1.1   /   LESSON 03   /   WORKSHEET KEY TERMS</a:t>
             </a:r>
           </a:p>
         </p:txBody>
@@ -10921,7 +10921,7 @@
           <p:cNvPr id="2" name="heading">
             <a:extLst xmlns:a="http://schemas.openxmlformats.org/drawingml/2006/main">
               <a:ext uri="{FF2B5EF4-FFF2-40B4-BE49-F238E27FC236}">
-                <a16:creationId xmlns:a16="http://schemas.microsoft.com/office/drawing/2014/main" id="{59E70613-0737-476E-8CAC-9C81EB150A6E}"/>
+                <a16:creationId xmlns:a16="http://schemas.microsoft.com/office/drawing/2014/main" id="{4AA0BDB4-7533-4FD0-9FEE-1CADA49DE528}"/>
               </a:ext>
             </a:extLst>
           </p:cNvPr>
@@ -10968,7 +10968,7 @@
                 <a:ea typeface="DejaVu Sans"/>
                 <a:cs typeface="DejaVu Sans"/>
               </a:rPr>
-              <a:t>Starter: sample answers</a:t>
+              <a:t>Key terminology quiz</a:t>
             </a:r>
           </a:p>
         </p:txBody>
@@ -10978,7 +10978,7 @@
           <p:cNvPr id="3" name="footer">
             <a:extLst xmlns:a="http://schemas.openxmlformats.org/drawingml/2006/main">
               <a:ext uri="{FF2B5EF4-FFF2-40B4-BE49-F238E27FC236}">
-                <a16:creationId xmlns:a16="http://schemas.microsoft.com/office/drawing/2014/main" id="{5D3058D1-AED5-4A58-8E6C-9A36733F4CCE}"/>
+                <a16:creationId xmlns:a16="http://schemas.microsoft.com/office/drawing/2014/main" id="{BA7B3119-767B-4ADE-B229-B5DC861E34E1}"/>
               </a:ext>
             </a:extLst>
           </p:cNvPr>
@@ -11025,7 +11025,7 @@
                 <a:ea typeface="DejaVu Sans"/>
                 <a:cs typeface="DejaVu Sans"/>
               </a:rPr>
-              <a:t>Revise 360    OCR J277 1.1 Systems architecture    Check</a:t>
+              <a:t>Revise 360    OCR J277 1.1 Systems architecture</a:t>
             </a:r>
           </a:p>
         </p:txBody>
@@ -11035,7 +11035,7 @@
           <p:cNvPr id="4" name="page">
             <a:extLst xmlns:a="http://schemas.openxmlformats.org/drawingml/2006/main">
               <a:ext uri="{FF2B5EF4-FFF2-40B4-BE49-F238E27FC236}">
-                <a16:creationId xmlns:a16="http://schemas.microsoft.com/office/drawing/2014/main" id="{20B6A5F7-AACC-42D7-9BBF-525E111602A0}"/>
+                <a16:creationId xmlns:a16="http://schemas.microsoft.com/office/drawing/2014/main" id="{304F141E-F609-4EAB-8587-16D25A202EF2}"/>
               </a:ext>
             </a:extLst>
           </p:cNvPr>
@@ -11089,10 +11089,10 @@
       </p:sp>
       <p:sp>
         <p:nvSpPr>
-          <p:cNvPr id="5" name="sample-note">
-            <a:extLst xmlns:a="http://schemas.openxmlformats.org/drawingml/2006/main">
-              <a:ext uri="{FF2B5EF4-FFF2-40B4-BE49-F238E27FC236}">
-                <a16:creationId xmlns:a16="http://schemas.microsoft.com/office/drawing/2014/main" id="{AC701B6C-3975-4625-A20C-8A9C4EB55F6A}"/>
+          <p:cNvPr id="5" name="define-first">
+            <a:extLst xmlns:a="http://schemas.openxmlformats.org/drawingml/2006/main">
+              <a:ext uri="{FF2B5EF4-FFF2-40B4-BE49-F238E27FC236}">
+                <a16:creationId xmlns:a16="http://schemas.microsoft.com/office/drawing/2014/main" id="{387F475A-48B9-49DD-941A-EF58B6FBC0CC}"/>
               </a:ext>
             </a:extLst>
           </p:cNvPr>
@@ -11104,24 +11104,24 @@
         <p:spPr>
           <a:xfrm xmlns:a="http://schemas.openxmlformats.org/drawingml/2006/main">
             <a:off x="704850" y="1562100"/>
-            <a:ext cx="10477500" cy="533400"/>
-          </a:xfrm>
-          <a:prstGeom xmlns:a="http://schemas.openxmlformats.org/drawingml/2006/main" prst="rect">
-            <a:avLst/>
-          </a:prstGeom>
-          <a:noFill xmlns:a="http://schemas.openxmlformats.org/drawingml/2006/main"/>
-          <a:ln xmlns:a="http://schemas.openxmlformats.org/drawingml/2006/main" w="0">
-            <a:noFill/>
-          </a:ln>
-        </p:spPr>
-        <p:txBody>
-          <a:bodyPr xmlns:a="http://schemas.openxmlformats.org/drawingml/2006/main" wrap="square" lIns="0" tIns="0" rIns="0" bIns="0" anchor="t">
-            <a:noAutofit/>
-          </a:bodyPr>
-          <a:lstStyle xmlns:a="http://schemas.openxmlformats.org/drawingml/2006/main"/>
-          <a:p xmlns:a="http://schemas.openxmlformats.org/drawingml/2006/main">
-            <a:pPr>
-              <a:defRPr sz="1800" b="0">
+            <a:ext cx="10572750" cy="790575"/>
+          </a:xfrm>
+          <a:prstGeom xmlns:a="http://schemas.openxmlformats.org/drawingml/2006/main" prst="rect">
+            <a:avLst/>
+          </a:prstGeom>
+          <a:noFill xmlns:a="http://schemas.openxmlformats.org/drawingml/2006/main"/>
+          <a:ln xmlns:a="http://schemas.openxmlformats.org/drawingml/2006/main" w="0">
+            <a:noFill/>
+          </a:ln>
+        </p:spPr>
+        <p:txBody>
+          <a:bodyPr xmlns:a="http://schemas.openxmlformats.org/drawingml/2006/main" wrap="square" lIns="0" tIns="0" rIns="0" bIns="0" anchor="t">
+            <a:noAutofit/>
+          </a:bodyPr>
+          <a:lstStyle xmlns:a="http://schemas.openxmlformats.org/drawingml/2006/main"/>
+          <a:p xmlns:a="http://schemas.openxmlformats.org/drawingml/2006/main">
+            <a:pPr>
+              <a:defRPr sz="1875" b="0">
                 <a:solidFill>
                   <a:srgbClr val="526174"/>
                 </a:solidFill>
@@ -11131,7 +11131,7 @@
               </a:defRPr>
             </a:pPr>
             <a:r>
-              <a:rPr sz="1800" b="0">
+              <a:rPr sz="1875" b="0">
                 <a:solidFill>
                   <a:srgbClr val="526174"/>
                 </a:solidFill>
@@ -11139,46 +11139,46 @@
                 <a:ea typeface="DejaVu Sans"/>
                 <a:cs typeface="DejaVu Sans"/>
               </a:rPr>
-              <a:t>Compare your worksheet answer with these examples. Other accurate examples count.</a:t>
-            </a:r>
-          </a:p>
-        </p:txBody>
-      </p:sp>
-      <p:sp>
-        <p:nvSpPr>
-          <p:cNvPr id="6" name="number-1">
-            <a:extLst xmlns:a="http://schemas.openxmlformats.org/drawingml/2006/main">
-              <a:ext uri="{FF2B5EF4-FFF2-40B4-BE49-F238E27FC236}">
-                <a16:creationId xmlns:a16="http://schemas.microsoft.com/office/drawing/2014/main" id="{B3267801-C6FF-4EA7-8F2A-DE84FDB8DEEB}"/>
-              </a:ext>
-            </a:extLst>
-          </p:cNvPr>
-          <p:cNvSpPr>
-            <a:spLocks xmlns:a="http://schemas.openxmlformats.org/drawingml/2006/main" noGrp="1"/>
-          </p:cNvSpPr>
-          <p:nvPr/>
-        </p:nvSpPr>
-        <p:spPr>
-          <a:xfrm xmlns:a="http://schemas.openxmlformats.org/drawingml/2006/main">
-            <a:off x="723900" y="2476500"/>
-            <a:ext cx="590550" cy="476250"/>
-          </a:xfrm>
-          <a:prstGeom xmlns:a="http://schemas.openxmlformats.org/drawingml/2006/main" prst="rect">
-            <a:avLst/>
-          </a:prstGeom>
-          <a:noFill xmlns:a="http://schemas.openxmlformats.org/drawingml/2006/main"/>
-          <a:ln xmlns:a="http://schemas.openxmlformats.org/drawingml/2006/main" w="0">
-            <a:noFill/>
-          </a:ln>
-        </p:spPr>
-        <p:txBody>
-          <a:bodyPr xmlns:a="http://schemas.openxmlformats.org/drawingml/2006/main" wrap="square" lIns="0" tIns="0" rIns="0" bIns="0" anchor="t">
-            <a:noAutofit/>
-          </a:bodyPr>
-          <a:lstStyle xmlns:a="http://schemas.openxmlformats.org/drawingml/2006/main"/>
-          <a:p xmlns:a="http://schemas.openxmlformats.org/drawingml/2006/main">
-            <a:pPr>
-              <a:defRPr sz="2175" b="1">
+              <a:t>Define the two terms listed in the key terminology section of your worksheet.</a:t>
+            </a:r>
+          </a:p>
+        </p:txBody>
+      </p:sp>
+      <p:sp>
+        <p:nvSpPr>
+          <p:cNvPr id="6" name="term-number-0">
+            <a:extLst xmlns:a="http://schemas.openxmlformats.org/drawingml/2006/main">
+              <a:ext uri="{FF2B5EF4-FFF2-40B4-BE49-F238E27FC236}">
+                <a16:creationId xmlns:a16="http://schemas.microsoft.com/office/drawing/2014/main" id="{589D98D9-D733-4B45-AF1A-E00E07DD5C2A}"/>
+              </a:ext>
+            </a:extLst>
+          </p:cNvPr>
+          <p:cNvSpPr>
+            <a:spLocks xmlns:a="http://schemas.openxmlformats.org/drawingml/2006/main" noGrp="1"/>
+          </p:cNvSpPr>
+          <p:nvPr/>
+        </p:nvSpPr>
+        <p:spPr>
+          <a:xfrm xmlns:a="http://schemas.openxmlformats.org/drawingml/2006/main">
+            <a:off x="723900" y="2686050"/>
+            <a:ext cx="590550" cy="533400"/>
+          </a:xfrm>
+          <a:prstGeom xmlns:a="http://schemas.openxmlformats.org/drawingml/2006/main" prst="rect">
+            <a:avLst/>
+          </a:prstGeom>
+          <a:noFill xmlns:a="http://schemas.openxmlformats.org/drawingml/2006/main"/>
+          <a:ln xmlns:a="http://schemas.openxmlformats.org/drawingml/2006/main" w="0">
+            <a:noFill/>
+          </a:ln>
+        </p:spPr>
+        <p:txBody>
+          <a:bodyPr xmlns:a="http://schemas.openxmlformats.org/drawingml/2006/main" wrap="square" lIns="0" tIns="0" rIns="0" bIns="0" anchor="t">
+            <a:noAutofit/>
+          </a:bodyPr>
+          <a:lstStyle xmlns:a="http://schemas.openxmlformats.org/drawingml/2006/main"/>
+          <a:p xmlns:a="http://schemas.openxmlformats.org/drawingml/2006/main">
+            <a:pPr>
+              <a:defRPr sz="2625" b="1">
                 <a:solidFill>
                   <a:srgbClr val="2D63FF"/>
                 </a:solidFill>
@@ -11188,7 +11188,7 @@
               </a:defRPr>
             </a:pPr>
             <a:r>
-              <a:rPr sz="2175" b="1">
+              <a:rPr sz="2625" b="1">
                 <a:solidFill>
                   <a:srgbClr val="2D63FF"/>
                 </a:solidFill>
@@ -11203,39 +11203,39 @@
       </p:sp>
       <p:sp>
         <p:nvSpPr>
-          <p:cNvPr id="7" name="item-1">
-            <a:extLst xmlns:a="http://schemas.openxmlformats.org/drawingml/2006/main">
-              <a:ext uri="{FF2B5EF4-FFF2-40B4-BE49-F238E27FC236}">
-                <a16:creationId xmlns:a16="http://schemas.microsoft.com/office/drawing/2014/main" id="{C82A9D6D-1E31-48D2-9130-ADFB7056D842}"/>
-              </a:ext>
-            </a:extLst>
-          </p:cNvPr>
-          <p:cNvSpPr>
-            <a:spLocks xmlns:a="http://schemas.openxmlformats.org/drawingml/2006/main" noGrp="1"/>
-          </p:cNvSpPr>
-          <p:nvPr/>
-        </p:nvSpPr>
-        <p:spPr>
-          <a:xfrm xmlns:a="http://schemas.openxmlformats.org/drawingml/2006/main">
-            <a:off x="1352550" y="2476500"/>
-            <a:ext cx="9925050" cy="1276350"/>
-          </a:xfrm>
-          <a:prstGeom xmlns:a="http://schemas.openxmlformats.org/drawingml/2006/main" prst="rect">
-            <a:avLst/>
-          </a:prstGeom>
-          <a:noFill xmlns:a="http://schemas.openxmlformats.org/drawingml/2006/main"/>
-          <a:ln xmlns:a="http://schemas.openxmlformats.org/drawingml/2006/main" w="0">
-            <a:noFill/>
-          </a:ln>
-        </p:spPr>
-        <p:txBody>
-          <a:bodyPr xmlns:a="http://schemas.openxmlformats.org/drawingml/2006/main" wrap="square" lIns="0" tIns="0" rIns="0" bIns="0" anchor="t">
-            <a:noAutofit/>
-          </a:bodyPr>
-          <a:lstStyle xmlns:a="http://schemas.openxmlformats.org/drawingml/2006/main"/>
-          <a:p xmlns:a="http://schemas.openxmlformats.org/drawingml/2006/main">
-            <a:pPr>
-              <a:defRPr sz="2175" b="0">
+          <p:cNvPr id="7" name="term-0">
+            <a:extLst xmlns:a="http://schemas.openxmlformats.org/drawingml/2006/main">
+              <a:ext uri="{FF2B5EF4-FFF2-40B4-BE49-F238E27FC236}">
+                <a16:creationId xmlns:a16="http://schemas.microsoft.com/office/drawing/2014/main" id="{DD77800D-D322-48F5-A27E-BB9824B0F3F9}"/>
+              </a:ext>
+            </a:extLst>
+          </p:cNvPr>
+          <p:cNvSpPr>
+            <a:spLocks xmlns:a="http://schemas.openxmlformats.org/drawingml/2006/main" noGrp="1"/>
+          </p:cNvSpPr>
+          <p:nvPr/>
+        </p:nvSpPr>
+        <p:spPr>
+          <a:xfrm xmlns:a="http://schemas.openxmlformats.org/drawingml/2006/main">
+            <a:off x="1371600" y="2686050"/>
+            <a:ext cx="9667875" cy="666750"/>
+          </a:xfrm>
+          <a:prstGeom xmlns:a="http://schemas.openxmlformats.org/drawingml/2006/main" prst="rect">
+            <a:avLst/>
+          </a:prstGeom>
+          <a:noFill xmlns:a="http://schemas.openxmlformats.org/drawingml/2006/main"/>
+          <a:ln xmlns:a="http://schemas.openxmlformats.org/drawingml/2006/main" w="0">
+            <a:noFill/>
+          </a:ln>
+        </p:spPr>
+        <p:txBody>
+          <a:bodyPr xmlns:a="http://schemas.openxmlformats.org/drawingml/2006/main" wrap="square" lIns="0" tIns="0" rIns="0" bIns="0" anchor="t">
+            <a:noAutofit/>
+          </a:bodyPr>
+          <a:lstStyle xmlns:a="http://schemas.openxmlformats.org/drawingml/2006/main"/>
+          <a:p xmlns:a="http://schemas.openxmlformats.org/drawingml/2006/main">
+            <a:pPr>
+              <a:defRPr sz="2700" b="1">
                 <a:solidFill>
                   <a:srgbClr val="101828"/>
                 </a:solidFill>
@@ -11245,7 +11245,7 @@
               </a:defRPr>
             </a:pPr>
             <a:r>
-              <a:rPr sz="2175" b="0">
+              <a:rPr sz="2700" b="1">
                 <a:solidFill>
                   <a:srgbClr val="101828"/>
                 </a:solidFill>
@@ -11253,46 +11253,46 @@
                 <a:ea typeface="DejaVu Sans"/>
                 <a:cs typeface="DejaVu Sans"/>
               </a:rPr>
-              <a:t>The processors may differ in clock speed, cache size and number of cores.</a:t>
-            </a:r>
-          </a:p>
-        </p:txBody>
-      </p:sp>
-      <p:sp>
-        <p:nvSpPr>
-          <p:cNvPr id="8" name="number-2">
-            <a:extLst xmlns:a="http://schemas.openxmlformats.org/drawingml/2006/main">
-              <a:ext uri="{FF2B5EF4-FFF2-40B4-BE49-F238E27FC236}">
-                <a16:creationId xmlns:a16="http://schemas.microsoft.com/office/drawing/2014/main" id="{DE3EE4D2-E591-408B-8212-FA6A9A2E1FB0}"/>
-              </a:ext>
-            </a:extLst>
-          </p:cNvPr>
-          <p:cNvSpPr>
-            <a:spLocks xmlns:a="http://schemas.openxmlformats.org/drawingml/2006/main" noGrp="1"/>
-          </p:cNvSpPr>
-          <p:nvPr/>
-        </p:nvSpPr>
-        <p:spPr>
-          <a:xfrm xmlns:a="http://schemas.openxmlformats.org/drawingml/2006/main">
-            <a:off x="723900" y="4000500"/>
-            <a:ext cx="590550" cy="476250"/>
-          </a:xfrm>
-          <a:prstGeom xmlns:a="http://schemas.openxmlformats.org/drawingml/2006/main" prst="rect">
-            <a:avLst/>
-          </a:prstGeom>
-          <a:noFill xmlns:a="http://schemas.openxmlformats.org/drawingml/2006/main"/>
-          <a:ln xmlns:a="http://schemas.openxmlformats.org/drawingml/2006/main" w="0">
-            <a:noFill/>
-          </a:ln>
-        </p:spPr>
-        <p:txBody>
-          <a:bodyPr xmlns:a="http://schemas.openxmlformats.org/drawingml/2006/main" wrap="square" lIns="0" tIns="0" rIns="0" bIns="0" anchor="t">
-            <a:noAutofit/>
-          </a:bodyPr>
-          <a:lstStyle xmlns:a="http://schemas.openxmlformats.org/drawingml/2006/main"/>
-          <a:p xmlns:a="http://schemas.openxmlformats.org/drawingml/2006/main">
-            <a:pPr>
-              <a:defRPr sz="2175" b="1">
+              <a:t>Cache</a:t>
+            </a:r>
+          </a:p>
+        </p:txBody>
+      </p:sp>
+      <p:sp>
+        <p:nvSpPr>
+          <p:cNvPr id="8" name="term-number-1">
+            <a:extLst xmlns:a="http://schemas.openxmlformats.org/drawingml/2006/main">
+              <a:ext uri="{FF2B5EF4-FFF2-40B4-BE49-F238E27FC236}">
+                <a16:creationId xmlns:a16="http://schemas.microsoft.com/office/drawing/2014/main" id="{894F47C6-A1E0-4BB3-99AB-105118072B00}"/>
+              </a:ext>
+            </a:extLst>
+          </p:cNvPr>
+          <p:cNvSpPr>
+            <a:spLocks xmlns:a="http://schemas.openxmlformats.org/drawingml/2006/main" noGrp="1"/>
+          </p:cNvSpPr>
+          <p:nvPr/>
+        </p:nvSpPr>
+        <p:spPr>
+          <a:xfrm xmlns:a="http://schemas.openxmlformats.org/drawingml/2006/main">
+            <a:off x="723900" y="4324350"/>
+            <a:ext cx="590550" cy="533400"/>
+          </a:xfrm>
+          <a:prstGeom xmlns:a="http://schemas.openxmlformats.org/drawingml/2006/main" prst="rect">
+            <a:avLst/>
+          </a:prstGeom>
+          <a:noFill xmlns:a="http://schemas.openxmlformats.org/drawingml/2006/main"/>
+          <a:ln xmlns:a="http://schemas.openxmlformats.org/drawingml/2006/main" w="0">
+            <a:noFill/>
+          </a:ln>
+        </p:spPr>
+        <p:txBody>
+          <a:bodyPr xmlns:a="http://schemas.openxmlformats.org/drawingml/2006/main" wrap="square" lIns="0" tIns="0" rIns="0" bIns="0" anchor="t">
+            <a:noAutofit/>
+          </a:bodyPr>
+          <a:lstStyle xmlns:a="http://schemas.openxmlformats.org/drawingml/2006/main"/>
+          <a:p xmlns:a="http://schemas.openxmlformats.org/drawingml/2006/main">
+            <a:pPr>
+              <a:defRPr sz="2625" b="1">
                 <a:solidFill>
                   <a:srgbClr val="2D63FF"/>
                 </a:solidFill>
@@ -11302,7 +11302,7 @@
               </a:defRPr>
             </a:pPr>
             <a:r>
-              <a:rPr sz="2175" b="1">
+              <a:rPr sz="2625" b="1">
                 <a:solidFill>
                   <a:srgbClr val="2D63FF"/>
                 </a:solidFill>
@@ -11317,39 +11317,39 @@
       </p:sp>
       <p:sp>
         <p:nvSpPr>
-          <p:cNvPr id="9" name="item-2">
-            <a:extLst xmlns:a="http://schemas.openxmlformats.org/drawingml/2006/main">
-              <a:ext uri="{FF2B5EF4-FFF2-40B4-BE49-F238E27FC236}">
-                <a16:creationId xmlns:a16="http://schemas.microsoft.com/office/drawing/2014/main" id="{79386A90-1B29-4D77-8A97-54822E0F684F}"/>
-              </a:ext>
-            </a:extLst>
-          </p:cNvPr>
-          <p:cNvSpPr>
-            <a:spLocks xmlns:a="http://schemas.openxmlformats.org/drawingml/2006/main" noGrp="1"/>
-          </p:cNvSpPr>
-          <p:nvPr/>
-        </p:nvSpPr>
-        <p:spPr>
-          <a:xfrm xmlns:a="http://schemas.openxmlformats.org/drawingml/2006/main">
-            <a:off x="1352550" y="4000500"/>
-            <a:ext cx="9925050" cy="1276350"/>
-          </a:xfrm>
-          <a:prstGeom xmlns:a="http://schemas.openxmlformats.org/drawingml/2006/main" prst="rect">
-            <a:avLst/>
-          </a:prstGeom>
-          <a:noFill xmlns:a="http://schemas.openxmlformats.org/drawingml/2006/main"/>
-          <a:ln xmlns:a="http://schemas.openxmlformats.org/drawingml/2006/main" w="0">
-            <a:noFill/>
-          </a:ln>
-        </p:spPr>
-        <p:txBody>
-          <a:bodyPr xmlns:a="http://schemas.openxmlformats.org/drawingml/2006/main" wrap="square" lIns="0" tIns="0" rIns="0" bIns="0" anchor="t">
-            <a:noAutofit/>
-          </a:bodyPr>
-          <a:lstStyle xmlns:a="http://schemas.openxmlformats.org/drawingml/2006/main"/>
-          <a:p xmlns:a="http://schemas.openxmlformats.org/drawingml/2006/main">
-            <a:pPr>
-              <a:defRPr sz="2175" b="0">
+          <p:cNvPr id="9" name="term-1">
+            <a:extLst xmlns:a="http://schemas.openxmlformats.org/drawingml/2006/main">
+              <a:ext uri="{FF2B5EF4-FFF2-40B4-BE49-F238E27FC236}">
+                <a16:creationId xmlns:a16="http://schemas.microsoft.com/office/drawing/2014/main" id="{42AA1130-143D-44DD-91B3-422EBE2EB9BB}"/>
+              </a:ext>
+            </a:extLst>
+          </p:cNvPr>
+          <p:cNvSpPr>
+            <a:spLocks xmlns:a="http://schemas.openxmlformats.org/drawingml/2006/main" noGrp="1"/>
+          </p:cNvSpPr>
+          <p:nvPr/>
+        </p:nvSpPr>
+        <p:spPr>
+          <a:xfrm xmlns:a="http://schemas.openxmlformats.org/drawingml/2006/main">
+            <a:off x="1371600" y="4324350"/>
+            <a:ext cx="9667875" cy="666750"/>
+          </a:xfrm>
+          <a:prstGeom xmlns:a="http://schemas.openxmlformats.org/drawingml/2006/main" prst="rect">
+            <a:avLst/>
+          </a:prstGeom>
+          <a:noFill xmlns:a="http://schemas.openxmlformats.org/drawingml/2006/main"/>
+          <a:ln xmlns:a="http://schemas.openxmlformats.org/drawingml/2006/main" w="0">
+            <a:noFill/>
+          </a:ln>
+        </p:spPr>
+        <p:txBody>
+          <a:bodyPr xmlns:a="http://schemas.openxmlformats.org/drawingml/2006/main" wrap="square" lIns="0" tIns="0" rIns="0" bIns="0" anchor="t">
+            <a:noAutofit/>
+          </a:bodyPr>
+          <a:lstStyle xmlns:a="http://schemas.openxmlformats.org/drawingml/2006/main"/>
+          <a:p xmlns:a="http://schemas.openxmlformats.org/drawingml/2006/main">
+            <a:pPr>
+              <a:defRPr sz="2700" b="1">
                 <a:solidFill>
                   <a:srgbClr val="101828"/>
                 </a:solidFill>
@@ -11359,7 +11359,7 @@
               </a:defRPr>
             </a:pPr>
             <a:r>
-              <a:rPr sz="2175" b="0">
+              <a:rPr sz="2700" b="1">
                 <a:solidFill>
                   <a:srgbClr val="101828"/>
                 </a:solidFill>
@@ -11367,7 +11367,7 @@
                 <a:ea typeface="DejaVu Sans"/>
                 <a:cs typeface="DejaVu Sans"/>
               </a:rPr>
-              <a:t>The benefit depends on the task. Extra cores help most when software can use them.</a:t>
+              <a:t>Register</a:t>
             </a:r>
           </a:p>
         </p:txBody>
@@ -11375,7 +11375,7 @@
     </p:spTree>
     <p:extLst>
       <p:ext uri="{BB962C8B-B14F-4D97-AF65-F5344CB8AC3E}">
-        <p14:creationId xmlns:p14="http://schemas.microsoft.com/office/powerpoint/2010/main" val="735382246"/>
+        <p14:creationId xmlns:p14="http://schemas.microsoft.com/office/powerpoint/2010/main" val="1891053066"/>
       </p:ext>
     </p:extLst>
   </p:cSld>
@@ -11388,7 +11388,7 @@
     <p:bg>
       <p:bgPr>
         <a:solidFill xmlns:a="http://schemas.openxmlformats.org/drawingml/2006/main">
-          <a:srgbClr val="FFFFFF"/>
+          <a:srgbClr val="EAF3FF"/>
         </a:solidFill>
       </p:bgPr>
     </p:bg>
@@ -11406,7 +11406,7 @@
           <p:cNvPr id="10" name="topic">
             <a:extLst xmlns:a="http://schemas.openxmlformats.org/drawingml/2006/main">
               <a:ext uri="{FF2B5EF4-FFF2-40B4-BE49-F238E27FC236}">
-                <a16:creationId xmlns:a16="http://schemas.microsoft.com/office/drawing/2014/main" id="{71E3C75D-2C9A-41A8-9399-033E18CBB97C}"/>
+                <a16:creationId xmlns:a16="http://schemas.microsoft.com/office/drawing/2014/main" id="{D24A0D16-C2FF-4F83-AEE8-7A9D55451D45}"/>
               </a:ext>
             </a:extLst>
           </p:cNvPr>
@@ -11418,7 +11418,7 @@
         <p:spPr>
           <a:xfrm xmlns:a="http://schemas.openxmlformats.org/drawingml/2006/main">
             <a:off x="666750" y="323850"/>
-            <a:ext cx="6667500" cy="276225"/>
+            <a:ext cx="9810750" cy="276225"/>
           </a:xfrm>
           <a:prstGeom xmlns:a="http://schemas.openxmlformats.org/drawingml/2006/main" prst="rect">
             <a:avLst/>
@@ -11453,7 +11453,7 @@
                 <a:ea typeface="DejaVu Sans"/>
                 <a:cs typeface="DejaVu Sans"/>
               </a:rPr>
-              <a:t>TOPIC 1.1   LESSON 03</a:t>
+              <a:t>TOPIC 1.1   /   LESSON 03   /   CHECK</a:t>
             </a:r>
           </a:p>
         </p:txBody>
@@ -11463,7 +11463,7 @@
           <p:cNvPr id="2" name="heading">
             <a:extLst xmlns:a="http://schemas.openxmlformats.org/drawingml/2006/main">
               <a:ext uri="{FF2B5EF4-FFF2-40B4-BE49-F238E27FC236}">
-                <a16:creationId xmlns:a16="http://schemas.microsoft.com/office/drawing/2014/main" id="{5231F614-6658-4B7E-ACC5-801E5E8952C9}"/>
+                <a16:creationId xmlns:a16="http://schemas.microsoft.com/office/drawing/2014/main" id="{A590BF7D-3D39-4ADE-A2B7-9AFE975108F7}"/>
               </a:ext>
             </a:extLst>
           </p:cNvPr>
@@ -11520,7 +11520,7 @@
           <p:cNvPr id="3" name="footer">
             <a:extLst xmlns:a="http://schemas.openxmlformats.org/drawingml/2006/main">
               <a:ext uri="{FF2B5EF4-FFF2-40B4-BE49-F238E27FC236}">
-                <a16:creationId xmlns:a16="http://schemas.microsoft.com/office/drawing/2014/main" id="{7336CCA5-FA65-4EDE-B4EC-10EB993ED0AB}"/>
+                <a16:creationId xmlns:a16="http://schemas.microsoft.com/office/drawing/2014/main" id="{54397140-1362-49A4-AC6A-74A7B6ADB97A}"/>
               </a:ext>
             </a:extLst>
           </p:cNvPr>
@@ -11567,7 +11567,7 @@
                 <a:ea typeface="DejaVu Sans"/>
                 <a:cs typeface="DejaVu Sans"/>
               </a:rPr>
-              <a:t>Revise 360    OCR J277 1.1 Systems architecture    Check</a:t>
+              <a:t>Revise 360    OCR J277 1.1 Systems architecture</a:t>
             </a:r>
           </a:p>
         </p:txBody>
@@ -11577,7 +11577,7 @@
           <p:cNvPr id="4" name="page">
             <a:extLst xmlns:a="http://schemas.openxmlformats.org/drawingml/2006/main">
               <a:ext uri="{FF2B5EF4-FFF2-40B4-BE49-F238E27FC236}">
-                <a16:creationId xmlns:a16="http://schemas.microsoft.com/office/drawing/2014/main" id="{D0C07DDD-98D8-4425-909F-5A146DD6CE64}"/>
+                <a16:creationId xmlns:a16="http://schemas.microsoft.com/office/drawing/2014/main" id="{E346264A-D929-49B1-A0BD-A5E6A02384B8}"/>
               </a:ext>
             </a:extLst>
           </p:cNvPr>
@@ -11634,7 +11634,7 @@
           <p:cNvPr id="5" name="terms-note">
             <a:extLst xmlns:a="http://schemas.openxmlformats.org/drawingml/2006/main">
               <a:ext uri="{FF2B5EF4-FFF2-40B4-BE49-F238E27FC236}">
-                <a16:creationId xmlns:a16="http://schemas.microsoft.com/office/drawing/2014/main" id="{D11EC899-6CB1-430C-98D8-CB1251FE4C81}"/>
+                <a16:creationId xmlns:a16="http://schemas.microsoft.com/office/drawing/2014/main" id="{97827DB8-C159-4A55-8294-2FAEB3774293}"/>
               </a:ext>
             </a:extLst>
           </p:cNvPr>
@@ -11691,7 +11691,7 @@
           <p:cNvPr id="6" name="answer-term-0">
             <a:extLst xmlns:a="http://schemas.openxmlformats.org/drawingml/2006/main">
               <a:ext uri="{FF2B5EF4-FFF2-40B4-BE49-F238E27FC236}">
-                <a16:creationId xmlns:a16="http://schemas.microsoft.com/office/drawing/2014/main" id="{C74FC17F-EA99-4EAC-9973-F10C1CC0E083}"/>
+                <a16:creationId xmlns:a16="http://schemas.microsoft.com/office/drawing/2014/main" id="{AD9DA486-B535-476C-8908-FC11C966D5C0}"/>
               </a:ext>
             </a:extLst>
           </p:cNvPr>
@@ -11748,7 +11748,7 @@
           <p:cNvPr id="7" name="answer-definition-0">
             <a:extLst xmlns:a="http://schemas.openxmlformats.org/drawingml/2006/main">
               <a:ext uri="{FF2B5EF4-FFF2-40B4-BE49-F238E27FC236}">
-                <a16:creationId xmlns:a16="http://schemas.microsoft.com/office/drawing/2014/main" id="{145DCAF2-F46C-49E0-AA84-013E68DDB61B}"/>
+                <a16:creationId xmlns:a16="http://schemas.microsoft.com/office/drawing/2014/main" id="{5332B334-7A34-48D9-947C-A55476734D1C}"/>
               </a:ext>
             </a:extLst>
           </p:cNvPr>
@@ -11805,7 +11805,7 @@
           <p:cNvPr id="8" name="answer-term-1">
             <a:extLst xmlns:a="http://schemas.openxmlformats.org/drawingml/2006/main">
               <a:ext uri="{FF2B5EF4-FFF2-40B4-BE49-F238E27FC236}">
-                <a16:creationId xmlns:a16="http://schemas.microsoft.com/office/drawing/2014/main" id="{64F66F39-2068-42A0-9113-188BED6BAB81}"/>
+                <a16:creationId xmlns:a16="http://schemas.microsoft.com/office/drawing/2014/main" id="{220F00F2-FEFE-4917-9CE4-37E3780DDCEB}"/>
               </a:ext>
             </a:extLst>
           </p:cNvPr>
@@ -11862,7 +11862,7 @@
           <p:cNvPr id="9" name="answer-definition-1">
             <a:extLst xmlns:a="http://schemas.openxmlformats.org/drawingml/2006/main">
               <a:ext uri="{FF2B5EF4-FFF2-40B4-BE49-F238E27FC236}">
-                <a16:creationId xmlns:a16="http://schemas.microsoft.com/office/drawing/2014/main" id="{BEF8CC71-FC2A-410B-84A7-615459470F54}"/>
+                <a16:creationId xmlns:a16="http://schemas.microsoft.com/office/drawing/2014/main" id="{F96FB848-8D45-4D28-9412-89BC3000EBF8}"/>
               </a:ext>
             </a:extLst>
           </p:cNvPr>
@@ -11917,7 +11917,7 @@
     </p:spTree>
     <p:extLst>
       <p:ext uri="{BB962C8B-B14F-4D97-AF65-F5344CB8AC3E}">
-        <p14:creationId xmlns:p14="http://schemas.microsoft.com/office/powerpoint/2010/main" val="422365568"/>
+        <p14:creationId xmlns:p14="http://schemas.microsoft.com/office/powerpoint/2010/main" val="1007440197"/>
       </p:ext>
     </p:extLst>
   </p:cSld>
@@ -11930,7 +11930,7 @@
     <p:bg>
       <p:bgPr>
         <a:solidFill xmlns:a="http://schemas.openxmlformats.org/drawingml/2006/main">
-          <a:srgbClr val="FFFFFF"/>
+          <a:srgbClr val="122448"/>
         </a:solidFill>
       </p:bgPr>
     </p:bg>
@@ -11945,10 +11945,10 @@
       </p:grpSpPr>
       <p:sp>
         <p:nvSpPr>
-          <p:cNvPr id="14" name="topic">
-            <a:extLst xmlns:a="http://schemas.openxmlformats.org/drawingml/2006/main">
-              <a:ext uri="{FF2B5EF4-FFF2-40B4-BE49-F238E27FC236}">
-                <a16:creationId xmlns:a16="http://schemas.microsoft.com/office/drawing/2014/main" id="{20F84B88-E9AA-4249-A6A8-9BA1D38997F5}"/>
+          <p:cNvPr id="12" name="topic">
+            <a:extLst xmlns:a="http://schemas.openxmlformats.org/drawingml/2006/main">
+              <a:ext uri="{FF2B5EF4-FFF2-40B4-BE49-F238E27FC236}">
+                <a16:creationId xmlns:a16="http://schemas.microsoft.com/office/drawing/2014/main" id="{33C98A6D-50C6-4BC0-ABF6-3F475BAF1B1E}"/>
               </a:ext>
             </a:extLst>
           </p:cNvPr>
@@ -11960,7 +11960,7 @@
         <p:spPr>
           <a:xfrm xmlns:a="http://schemas.openxmlformats.org/drawingml/2006/main">
             <a:off x="666750" y="323850"/>
-            <a:ext cx="6667500" cy="276225"/>
+            <a:ext cx="9810750" cy="276225"/>
           </a:xfrm>
           <a:prstGeom xmlns:a="http://schemas.openxmlformats.org/drawingml/2006/main" prst="rect">
             <a:avLst/>
@@ -11979,7 +11979,7 @@
             <a:pPr>
               <a:defRPr sz="1125" b="1">
                 <a:solidFill>
-                  <a:srgbClr val="2D63FF"/>
+                  <a:srgbClr val="77D8FF"/>
                 </a:solidFill>
                 <a:latin typeface="DejaVu Sans"/>
                 <a:ea typeface="DejaVu Sans"/>
@@ -11989,13 +11989,13 @@
             <a:r>
               <a:rPr sz="1125" b="1">
                 <a:solidFill>
-                  <a:srgbClr val="2D63FF"/>
-                </a:solidFill>
-                <a:latin typeface="DejaVu Sans"/>
-                <a:ea typeface="DejaVu Sans"/>
-                <a:cs typeface="DejaVu Sans"/>
-              </a:rPr>
-              <a:t>TOPIC 1.1   LESSON 03</a:t>
+                  <a:srgbClr val="77D8FF"/>
+                </a:solidFill>
+                <a:latin typeface="DejaVu Sans"/>
+                <a:ea typeface="DejaVu Sans"/>
+                <a:cs typeface="DejaVu Sans"/>
+              </a:rPr>
+              <a:t>TOPIC 1.1   /   LESSON 03   /   EXPERIENCE</a:t>
             </a:r>
           </a:p>
         </p:txBody>
@@ -12005,7 +12005,7 @@
           <p:cNvPr id="2" name="heading">
             <a:extLst xmlns:a="http://schemas.openxmlformats.org/drawingml/2006/main">
               <a:ext uri="{FF2B5EF4-FFF2-40B4-BE49-F238E27FC236}">
-                <a16:creationId xmlns:a16="http://schemas.microsoft.com/office/drawing/2014/main" id="{1AF783C5-6438-4957-828B-612D64DD3784}"/>
+                <a16:creationId xmlns:a16="http://schemas.microsoft.com/office/drawing/2014/main" id="{94FBE03B-A499-403C-B667-86F7D140ECD4}"/>
               </a:ext>
             </a:extLst>
           </p:cNvPr>
@@ -12036,7 +12036,7 @@
             <a:pPr>
               <a:defRPr sz="3225" b="1">
                 <a:solidFill>
-                  <a:srgbClr val="101828"/>
+                  <a:srgbClr val="FFFFFF"/>
                 </a:solidFill>
                 <a:latin typeface="DejaVu Sans"/>
                 <a:ea typeface="DejaVu Sans"/>
@@ -12046,7 +12046,7 @@
             <a:r>
               <a:rPr sz="3225" b="1">
                 <a:solidFill>
-                  <a:srgbClr val="101828"/>
+                  <a:srgbClr val="FFFFFF"/>
                 </a:solidFill>
                 <a:latin typeface="DejaVu Sans"/>
                 <a:ea typeface="DejaVu Sans"/>
@@ -12062,7 +12062,7 @@
           <p:cNvPr id="3" name="footer">
             <a:extLst xmlns:a="http://schemas.openxmlformats.org/drawingml/2006/main">
               <a:ext uri="{FF2B5EF4-FFF2-40B4-BE49-F238E27FC236}">
-                <a16:creationId xmlns:a16="http://schemas.microsoft.com/office/drawing/2014/main" id="{1D75DC88-DE70-4BEB-9831-D44D315766DB}"/>
+                <a16:creationId xmlns:a16="http://schemas.microsoft.com/office/drawing/2014/main" id="{6DD695BB-F3E3-4235-A126-6FA2094B084A}"/>
               </a:ext>
             </a:extLst>
           </p:cNvPr>
@@ -12093,7 +12093,7 @@
             <a:pPr>
               <a:defRPr sz="1050" b="0">
                 <a:solidFill>
-                  <a:srgbClr val="526174"/>
+                  <a:srgbClr val="D7E4F3"/>
                 </a:solidFill>
                 <a:latin typeface="DejaVu Sans"/>
                 <a:ea typeface="DejaVu Sans"/>
@@ -12103,13 +12103,13 @@
             <a:r>
               <a:rPr sz="1050" b="0">
                 <a:solidFill>
-                  <a:srgbClr val="526174"/>
-                </a:solidFill>
-                <a:latin typeface="DejaVu Sans"/>
-                <a:ea typeface="DejaVu Sans"/>
-                <a:cs typeface="DejaVu Sans"/>
-              </a:rPr>
-              <a:t>Revise 360    OCR J277 1.1 Systems architecture    Experience</a:t>
+                  <a:srgbClr val="D7E4F3"/>
+                </a:solidFill>
+                <a:latin typeface="DejaVu Sans"/>
+                <a:ea typeface="DejaVu Sans"/>
+                <a:cs typeface="DejaVu Sans"/>
+              </a:rPr>
+              <a:t>Revise 360    OCR J277 1.1 Systems architecture</a:t>
             </a:r>
           </a:p>
         </p:txBody>
@@ -12119,7 +12119,7 @@
           <p:cNvPr id="4" name="page">
             <a:extLst xmlns:a="http://schemas.openxmlformats.org/drawingml/2006/main">
               <a:ext uri="{FF2B5EF4-FFF2-40B4-BE49-F238E27FC236}">
-                <a16:creationId xmlns:a16="http://schemas.microsoft.com/office/drawing/2014/main" id="{6E355A81-14CD-48E7-89BF-4B37BCB8B8B1}"/>
+                <a16:creationId xmlns:a16="http://schemas.microsoft.com/office/drawing/2014/main" id="{C200F376-9259-45BD-989E-2469E379C56C}"/>
               </a:ext>
             </a:extLst>
           </p:cNvPr>
@@ -12150,7 +12150,7 @@
             <a:pPr>
               <a:defRPr sz="1050" b="0">
                 <a:solidFill>
-                  <a:srgbClr val="526174"/>
+                  <a:srgbClr val="D7E4F3"/>
                 </a:solidFill>
                 <a:latin typeface="DejaVu Sans"/>
                 <a:ea typeface="DejaVu Sans"/>
@@ -12160,7 +12160,7 @@
             <a:r>
               <a:rPr sz="1050" b="0">
                 <a:solidFill>
-                  <a:srgbClr val="526174"/>
+                  <a:srgbClr val="D7E4F3"/>
                 </a:solidFill>
                 <a:latin typeface="DejaVu Sans"/>
                 <a:ea typeface="DejaVu Sans"/>
@@ -12173,79 +12173,79 @@
       </p:sp>
       <p:sp>
         <p:nvSpPr>
-          <p:cNvPr id="5" name="number-1">
-            <a:extLst xmlns:a="http://schemas.openxmlformats.org/drawingml/2006/main">
-              <a:ext uri="{FF2B5EF4-FFF2-40B4-BE49-F238E27FC236}">
-                <a16:creationId xmlns:a16="http://schemas.microsoft.com/office/drawing/2014/main" id="{41412019-18BD-4494-B396-761F67463EDB}"/>
-              </a:ext>
-            </a:extLst>
-          </p:cNvPr>
-          <p:cNvSpPr>
-            <a:spLocks xmlns:a="http://schemas.openxmlformats.org/drawingml/2006/main" noGrp="1"/>
-          </p:cNvSpPr>
-          <p:nvPr/>
-        </p:nvSpPr>
-        <p:spPr>
-          <a:xfrm xmlns:a="http://schemas.openxmlformats.org/drawingml/2006/main">
-            <a:off x="723900" y="1676400"/>
-            <a:ext cx="590550" cy="476250"/>
-          </a:xfrm>
-          <a:prstGeom xmlns:a="http://schemas.openxmlformats.org/drawingml/2006/main" prst="rect">
-            <a:avLst/>
-          </a:prstGeom>
-          <a:noFill xmlns:a="http://schemas.openxmlformats.org/drawingml/2006/main"/>
-          <a:ln xmlns:a="http://schemas.openxmlformats.org/drawingml/2006/main" w="0">
-            <a:noFill/>
-          </a:ln>
-        </p:spPr>
-        <p:txBody>
-          <a:bodyPr xmlns:a="http://schemas.openxmlformats.org/drawingml/2006/main" wrap="square" lIns="0" tIns="0" rIns="0" bIns="0" anchor="t">
-            <a:noAutofit/>
-          </a:bodyPr>
-          <a:lstStyle xmlns:a="http://schemas.openxmlformats.org/drawingml/2006/main"/>
-          <a:p xmlns:a="http://schemas.openxmlformats.org/drawingml/2006/main">
-            <a:pPr>
-              <a:defRPr sz="1950" b="1">
-                <a:solidFill>
-                  <a:srgbClr val="2D63FF"/>
-                </a:solidFill>
-                <a:latin typeface="DejaVu Sans"/>
-                <a:ea typeface="DejaVu Sans"/>
-                <a:cs typeface="DejaVu Sans"/>
-              </a:defRPr>
-            </a:pPr>
-            <a:r>
-              <a:rPr sz="1950" b="1">
-                <a:solidFill>
-                  <a:srgbClr val="2D63FF"/>
-                </a:solidFill>
-                <a:latin typeface="DejaVu Sans"/>
-                <a:ea typeface="DejaVu Sans"/>
-                <a:cs typeface="DejaVu Sans"/>
-              </a:rPr>
-              <a:t>1.</a:t>
-            </a:r>
-          </a:p>
-        </p:txBody>
-      </p:sp>
-      <p:sp>
-        <p:nvSpPr>
-          <p:cNvPr id="6" name="item-1">
-            <a:extLst xmlns:a="http://schemas.openxmlformats.org/drawingml/2006/main">
-              <a:ext uri="{FF2B5EF4-FFF2-40B4-BE49-F238E27FC236}">
-                <a16:creationId xmlns:a16="http://schemas.microsoft.com/office/drawing/2014/main" id="{5FF7FB48-8AB4-48B0-9B29-DA841FA833BC}"/>
-              </a:ext>
-            </a:extLst>
-          </p:cNvPr>
-          <p:cNvSpPr>
-            <a:spLocks xmlns:a="http://schemas.openxmlformats.org/drawingml/2006/main" noGrp="1"/>
-          </p:cNvSpPr>
-          <p:nvPr/>
-        </p:nvSpPr>
-        <p:spPr>
-          <a:xfrm xmlns:a="http://schemas.openxmlformats.org/drawingml/2006/main">
-            <a:off x="1352550" y="1676400"/>
-            <a:ext cx="9925050" cy="781050"/>
+          <p:cNvPr id="5" name="start-label">
+            <a:extLst xmlns:a="http://schemas.openxmlformats.org/drawingml/2006/main">
+              <a:ext uri="{FF2B5EF4-FFF2-40B4-BE49-F238E27FC236}">
+                <a16:creationId xmlns:a16="http://schemas.microsoft.com/office/drawing/2014/main" id="{507D2CE9-6B58-4D6B-8B56-D0AD593DB230}"/>
+              </a:ext>
+            </a:extLst>
+          </p:cNvPr>
+          <p:cNvSpPr>
+            <a:spLocks xmlns:a="http://schemas.openxmlformats.org/drawingml/2006/main" noGrp="1"/>
+          </p:cNvSpPr>
+          <p:nvPr/>
+        </p:nvSpPr>
+        <p:spPr>
+          <a:xfrm xmlns:a="http://schemas.openxmlformats.org/drawingml/2006/main">
+            <a:off x="723900" y="1657350"/>
+            <a:ext cx="1428750" cy="352425"/>
+          </a:xfrm>
+          <a:prstGeom xmlns:a="http://schemas.openxmlformats.org/drawingml/2006/main" prst="rect">
+            <a:avLst/>
+          </a:prstGeom>
+          <a:noFill xmlns:a="http://schemas.openxmlformats.org/drawingml/2006/main"/>
+          <a:ln xmlns:a="http://schemas.openxmlformats.org/drawingml/2006/main" w="0">
+            <a:noFill/>
+          </a:ln>
+        </p:spPr>
+        <p:txBody>
+          <a:bodyPr xmlns:a="http://schemas.openxmlformats.org/drawingml/2006/main" wrap="square" lIns="0" tIns="0" rIns="0" bIns="0" anchor="t">
+            <a:noAutofit/>
+          </a:bodyPr>
+          <a:lstStyle xmlns:a="http://schemas.openxmlformats.org/drawingml/2006/main"/>
+          <a:p xmlns:a="http://schemas.openxmlformats.org/drawingml/2006/main">
+            <a:pPr>
+              <a:defRPr sz="1575" b="1">
+                <a:solidFill>
+                  <a:srgbClr val="77D8FF"/>
+                </a:solidFill>
+                <a:latin typeface="DejaVu Sans"/>
+                <a:ea typeface="DejaVu Sans"/>
+                <a:cs typeface="DejaVu Sans"/>
+              </a:defRPr>
+            </a:pPr>
+            <a:r>
+              <a:rPr sz="1575" b="1">
+                <a:solidFill>
+                  <a:srgbClr val="77D8FF"/>
+                </a:solidFill>
+                <a:latin typeface="DejaVu Sans"/>
+                <a:ea typeface="DejaVu Sans"/>
+                <a:cs typeface="DejaVu Sans"/>
+              </a:rPr>
+              <a:t>START</a:t>
+            </a:r>
+          </a:p>
+        </p:txBody>
+      </p:sp>
+      <p:sp>
+        <p:nvSpPr>
+          <p:cNvPr id="6" name="start">
+            <a:extLst xmlns:a="http://schemas.openxmlformats.org/drawingml/2006/main">
+              <a:ext uri="{FF2B5EF4-FFF2-40B4-BE49-F238E27FC236}">
+                <a16:creationId xmlns:a16="http://schemas.microsoft.com/office/drawing/2014/main" id="{9ADA9ED8-D573-407C-8FFD-E72526512432}"/>
+              </a:ext>
+            </a:extLst>
+          </p:cNvPr>
+          <p:cNvSpPr>
+            <a:spLocks xmlns:a="http://schemas.openxmlformats.org/drawingml/2006/main" noGrp="1"/>
+          </p:cNvSpPr>
+          <p:nvPr/>
+        </p:nvSpPr>
+        <p:spPr>
+          <a:xfrm xmlns:a="http://schemas.openxmlformats.org/drawingml/2006/main">
+            <a:off x="723900" y="1990725"/>
+            <a:ext cx="10572750" cy="685800"/>
           </a:xfrm>
           <a:prstGeom xmlns:a="http://schemas.openxmlformats.org/drawingml/2006/main" prst="rect">
             <a:avLst/>
@@ -12264,7 +12264,7 @@
             <a:pPr>
               <a:defRPr sz="1950" b="0">
                 <a:solidFill>
-                  <a:srgbClr val="101828"/>
+                  <a:srgbClr val="FFFFFF"/>
                 </a:solidFill>
                 <a:latin typeface="DejaVu Sans"/>
                 <a:ea typeface="DejaVu Sans"/>
@@ -12274,206 +12274,206 @@
             <a:r>
               <a:rPr sz="1950" b="0">
                 <a:solidFill>
-                  <a:srgbClr val="101828"/>
-                </a:solidFill>
-                <a:latin typeface="DejaVu Sans"/>
-                <a:ea typeface="DejaVu Sans"/>
-                <a:cs typeface="DejaVu Sans"/>
-              </a:rPr>
-              <a:t>Select Speed lab from Topic 1.1. Keep your worksheet beside you.</a:t>
-            </a:r>
-          </a:p>
-        </p:txBody>
-      </p:sp>
-      <p:sp>
-        <p:nvSpPr>
-          <p:cNvPr id="7" name="number-2">
-            <a:extLst xmlns:a="http://schemas.openxmlformats.org/drawingml/2006/main">
-              <a:ext uri="{FF2B5EF4-FFF2-40B4-BE49-F238E27FC236}">
-                <a16:creationId xmlns:a16="http://schemas.microsoft.com/office/drawing/2014/main" id="{15F1BD0F-8400-4F25-82A3-6E2722FA8911}"/>
-              </a:ext>
-            </a:extLst>
-          </p:cNvPr>
-          <p:cNvSpPr>
-            <a:spLocks xmlns:a="http://schemas.openxmlformats.org/drawingml/2006/main" noGrp="1"/>
-          </p:cNvSpPr>
-          <p:nvPr/>
-        </p:nvSpPr>
-        <p:spPr>
-          <a:xfrm xmlns:a="http://schemas.openxmlformats.org/drawingml/2006/main">
-            <a:off x="723900" y="2647950"/>
-            <a:ext cx="590550" cy="476250"/>
-          </a:xfrm>
-          <a:prstGeom xmlns:a="http://schemas.openxmlformats.org/drawingml/2006/main" prst="rect">
-            <a:avLst/>
-          </a:prstGeom>
-          <a:noFill xmlns:a="http://schemas.openxmlformats.org/drawingml/2006/main"/>
-          <a:ln xmlns:a="http://schemas.openxmlformats.org/drawingml/2006/main" w="0">
-            <a:noFill/>
-          </a:ln>
-        </p:spPr>
-        <p:txBody>
-          <a:bodyPr xmlns:a="http://schemas.openxmlformats.org/drawingml/2006/main" wrap="square" lIns="0" tIns="0" rIns="0" bIns="0" anchor="t">
-            <a:noAutofit/>
-          </a:bodyPr>
-          <a:lstStyle xmlns:a="http://schemas.openxmlformats.org/drawingml/2006/main"/>
-          <a:p xmlns:a="http://schemas.openxmlformats.org/drawingml/2006/main">
-            <a:pPr>
-              <a:defRPr sz="1875" b="1">
-                <a:solidFill>
-                  <a:srgbClr val="2D63FF"/>
-                </a:solidFill>
-                <a:latin typeface="DejaVu Sans"/>
-                <a:ea typeface="DejaVu Sans"/>
-                <a:cs typeface="DejaVu Sans"/>
-              </a:defRPr>
-            </a:pPr>
-            <a:r>
-              <a:rPr sz="1875" b="1">
-                <a:solidFill>
-                  <a:srgbClr val="2D63FF"/>
-                </a:solidFill>
-                <a:latin typeface="DejaVu Sans"/>
-                <a:ea typeface="DejaVu Sans"/>
-                <a:cs typeface="DejaVu Sans"/>
-              </a:rPr>
-              <a:t>2.</a:t>
-            </a:r>
-          </a:p>
-        </p:txBody>
-      </p:sp>
-      <p:sp>
-        <p:nvSpPr>
-          <p:cNvPr id="8" name="item-2">
-            <a:extLst xmlns:a="http://schemas.openxmlformats.org/drawingml/2006/main">
-              <a:ext uri="{FF2B5EF4-FFF2-40B4-BE49-F238E27FC236}">
-                <a16:creationId xmlns:a16="http://schemas.microsoft.com/office/drawing/2014/main" id="{64E5EF48-199D-4E35-AC9D-9DD5BA1598D5}"/>
-              </a:ext>
-            </a:extLst>
-          </p:cNvPr>
-          <p:cNvSpPr>
-            <a:spLocks xmlns:a="http://schemas.openxmlformats.org/drawingml/2006/main" noGrp="1"/>
-          </p:cNvSpPr>
-          <p:nvPr/>
-        </p:nvSpPr>
-        <p:spPr>
-          <a:xfrm xmlns:a="http://schemas.openxmlformats.org/drawingml/2006/main">
-            <a:off x="1352550" y="2647950"/>
-            <a:ext cx="9925050" cy="838200"/>
-          </a:xfrm>
-          <a:prstGeom xmlns:a="http://schemas.openxmlformats.org/drawingml/2006/main" prst="rect">
-            <a:avLst/>
-          </a:prstGeom>
-          <a:noFill xmlns:a="http://schemas.openxmlformats.org/drawingml/2006/main"/>
-          <a:ln xmlns:a="http://schemas.openxmlformats.org/drawingml/2006/main" w="0">
-            <a:noFill/>
-          </a:ln>
-        </p:spPr>
-        <p:txBody>
-          <a:bodyPr xmlns:a="http://schemas.openxmlformats.org/drawingml/2006/main" wrap="square" lIns="0" tIns="0" rIns="0" bIns="0" anchor="t">
-            <a:noAutofit/>
-          </a:bodyPr>
-          <a:lstStyle xmlns:a="http://schemas.openxmlformats.org/drawingml/2006/main"/>
-          <a:p xmlns:a="http://schemas.openxmlformats.org/drawingml/2006/main">
-            <a:pPr>
-              <a:defRPr sz="1875" b="0">
-                <a:solidFill>
-                  <a:srgbClr val="101828"/>
-                </a:solidFill>
-                <a:latin typeface="DejaVu Sans"/>
-                <a:ea typeface="DejaVu Sans"/>
-                <a:cs typeface="DejaVu Sans"/>
-              </a:defRPr>
-            </a:pPr>
-            <a:r>
-              <a:rPr sz="1875" b="0">
-                <a:solidFill>
-                  <a:srgbClr val="101828"/>
-                </a:solidFill>
-                <a:latin typeface="DejaVu Sans"/>
-                <a:ea typeface="DejaVu Sans"/>
-                <a:cs typeface="DejaVu Sans"/>
-              </a:rPr>
-              <a:t>At each station, read the wall panel and write the key fact and challenge answer before tapping the badge.</a:t>
-            </a:r>
-          </a:p>
-        </p:txBody>
-      </p:sp>
-      <p:sp>
-        <p:nvSpPr>
-          <p:cNvPr id="9" name="number-3">
-            <a:extLst xmlns:a="http://schemas.openxmlformats.org/drawingml/2006/main">
-              <a:ext uri="{FF2B5EF4-FFF2-40B4-BE49-F238E27FC236}">
-                <a16:creationId xmlns:a16="http://schemas.microsoft.com/office/drawing/2014/main" id="{C2245581-53F4-43DE-AFA8-CCFE71FD6BB8}"/>
-              </a:ext>
-            </a:extLst>
-          </p:cNvPr>
-          <p:cNvSpPr>
-            <a:spLocks xmlns:a="http://schemas.openxmlformats.org/drawingml/2006/main" noGrp="1"/>
-          </p:cNvSpPr>
-          <p:nvPr/>
-        </p:nvSpPr>
-        <p:spPr>
-          <a:xfrm xmlns:a="http://schemas.openxmlformats.org/drawingml/2006/main">
-            <a:off x="723900" y="3705225"/>
-            <a:ext cx="590550" cy="476250"/>
-          </a:xfrm>
-          <a:prstGeom xmlns:a="http://schemas.openxmlformats.org/drawingml/2006/main" prst="rect">
-            <a:avLst/>
-          </a:prstGeom>
-          <a:noFill xmlns:a="http://schemas.openxmlformats.org/drawingml/2006/main"/>
-          <a:ln xmlns:a="http://schemas.openxmlformats.org/drawingml/2006/main" w="0">
-            <a:noFill/>
-          </a:ln>
-        </p:spPr>
-        <p:txBody>
-          <a:bodyPr xmlns:a="http://schemas.openxmlformats.org/drawingml/2006/main" wrap="square" lIns="0" tIns="0" rIns="0" bIns="0" anchor="t">
-            <a:noAutofit/>
-          </a:bodyPr>
-          <a:lstStyle xmlns:a="http://schemas.openxmlformats.org/drawingml/2006/main"/>
-          <a:p xmlns:a="http://schemas.openxmlformats.org/drawingml/2006/main">
-            <a:pPr>
-              <a:defRPr sz="1950" b="1">
-                <a:solidFill>
-                  <a:srgbClr val="2D63FF"/>
-                </a:solidFill>
-                <a:latin typeface="DejaVu Sans"/>
-                <a:ea typeface="DejaVu Sans"/>
-                <a:cs typeface="DejaVu Sans"/>
-              </a:defRPr>
-            </a:pPr>
-            <a:r>
-              <a:rPr sz="1950" b="1">
-                <a:solidFill>
-                  <a:srgbClr val="2D63FF"/>
-                </a:solidFill>
-                <a:latin typeface="DejaVu Sans"/>
-                <a:ea typeface="DejaVu Sans"/>
-                <a:cs typeface="DejaVu Sans"/>
-              </a:rPr>
-              <a:t>3.</a:t>
-            </a:r>
-          </a:p>
-        </p:txBody>
-      </p:sp>
-      <p:sp>
-        <p:nvSpPr>
-          <p:cNvPr id="10" name="item-3">
-            <a:extLst xmlns:a="http://schemas.openxmlformats.org/drawingml/2006/main">
-              <a:ext uri="{FF2B5EF4-FFF2-40B4-BE49-F238E27FC236}">
-                <a16:creationId xmlns:a16="http://schemas.microsoft.com/office/drawing/2014/main" id="{27AE27E6-6752-4F49-A4E1-EE46A0BD21F7}"/>
-              </a:ext>
-            </a:extLst>
-          </p:cNvPr>
-          <p:cNvSpPr>
-            <a:spLocks xmlns:a="http://schemas.openxmlformats.org/drawingml/2006/main" noGrp="1"/>
-          </p:cNvSpPr>
-          <p:nvPr/>
-        </p:nvSpPr>
-        <p:spPr>
-          <a:xfrm xmlns:a="http://schemas.openxmlformats.org/drawingml/2006/main">
-            <a:off x="1352550" y="3705225"/>
-            <a:ext cx="9925050" cy="714375"/>
+                  <a:srgbClr val="FFFFFF"/>
+                </a:solidFill>
+                <a:latin typeface="DejaVu Sans"/>
+                <a:ea typeface="DejaVu Sans"/>
+                <a:cs typeface="DejaVu Sans"/>
+              </a:rPr>
+              <a:t>Select Speed lab from Topic 1.1 and keep your worksheet beside you.</a:t>
+            </a:r>
+          </a:p>
+        </p:txBody>
+      </p:sp>
+      <p:sp>
+        <p:nvSpPr>
+          <p:cNvPr id="7" name="own-words-label">
+            <a:extLst xmlns:a="http://schemas.openxmlformats.org/drawingml/2006/main">
+              <a:ext uri="{FF2B5EF4-FFF2-40B4-BE49-F238E27FC236}">
+                <a16:creationId xmlns:a16="http://schemas.microsoft.com/office/drawing/2014/main" id="{DA027AD0-A527-43C1-9FC8-855097F3432A}"/>
+              </a:ext>
+            </a:extLst>
+          </p:cNvPr>
+          <p:cNvSpPr>
+            <a:spLocks xmlns:a="http://schemas.openxmlformats.org/drawingml/2006/main" noGrp="1"/>
+          </p:cNvSpPr>
+          <p:nvPr/>
+        </p:nvSpPr>
+        <p:spPr>
+          <a:xfrm xmlns:a="http://schemas.openxmlformats.org/drawingml/2006/main">
+            <a:off x="723900" y="2924175"/>
+            <a:ext cx="4000500" cy="352425"/>
+          </a:xfrm>
+          <a:prstGeom xmlns:a="http://schemas.openxmlformats.org/drawingml/2006/main" prst="rect">
+            <a:avLst/>
+          </a:prstGeom>
+          <a:noFill xmlns:a="http://schemas.openxmlformats.org/drawingml/2006/main"/>
+          <a:ln xmlns:a="http://schemas.openxmlformats.org/drawingml/2006/main" w="0">
+            <a:noFill/>
+          </a:ln>
+        </p:spPr>
+        <p:txBody>
+          <a:bodyPr xmlns:a="http://schemas.openxmlformats.org/drawingml/2006/main" wrap="square" lIns="0" tIns="0" rIns="0" bIns="0" anchor="t">
+            <a:noAutofit/>
+          </a:bodyPr>
+          <a:lstStyle xmlns:a="http://schemas.openxmlformats.org/drawingml/2006/main"/>
+          <a:p xmlns:a="http://schemas.openxmlformats.org/drawingml/2006/main">
+            <a:pPr>
+              <a:defRPr sz="1575" b="1">
+                <a:solidFill>
+                  <a:srgbClr val="77D8FF"/>
+                </a:solidFill>
+                <a:latin typeface="DejaVu Sans"/>
+                <a:ea typeface="DejaVu Sans"/>
+                <a:cs typeface="DejaVu Sans"/>
+              </a:defRPr>
+            </a:pPr>
+            <a:r>
+              <a:rPr sz="1575" b="1">
+                <a:solidFill>
+                  <a:srgbClr val="77D8FF"/>
+                </a:solidFill>
+                <a:latin typeface="DejaVu Sans"/>
+                <a:ea typeface="DejaVu Sans"/>
+                <a:cs typeface="DejaVu Sans"/>
+              </a:rPr>
+              <a:t>AT EVERY STATION</a:t>
+            </a:r>
+          </a:p>
+        </p:txBody>
+      </p:sp>
+      <p:sp>
+        <p:nvSpPr>
+          <p:cNvPr id="8" name="own-words">
+            <a:extLst xmlns:a="http://schemas.openxmlformats.org/drawingml/2006/main">
+              <a:ext uri="{FF2B5EF4-FFF2-40B4-BE49-F238E27FC236}">
+                <a16:creationId xmlns:a16="http://schemas.microsoft.com/office/drawing/2014/main" id="{FBDEEF73-0B90-430F-A092-3A92B1936ACC}"/>
+              </a:ext>
+            </a:extLst>
+          </p:cNvPr>
+          <p:cNvSpPr>
+            <a:spLocks xmlns:a="http://schemas.openxmlformats.org/drawingml/2006/main" noGrp="1"/>
+          </p:cNvSpPr>
+          <p:nvPr/>
+        </p:nvSpPr>
+        <p:spPr>
+          <a:xfrm xmlns:a="http://schemas.openxmlformats.org/drawingml/2006/main">
+            <a:off x="723900" y="3276600"/>
+            <a:ext cx="10572750" cy="1104900"/>
+          </a:xfrm>
+          <a:prstGeom xmlns:a="http://schemas.openxmlformats.org/drawingml/2006/main" prst="rect">
+            <a:avLst/>
+          </a:prstGeom>
+          <a:noFill xmlns:a="http://schemas.openxmlformats.org/drawingml/2006/main"/>
+          <a:ln xmlns:a="http://schemas.openxmlformats.org/drawingml/2006/main" w="0">
+            <a:noFill/>
+          </a:ln>
+        </p:spPr>
+        <p:txBody>
+          <a:bodyPr xmlns:a="http://schemas.openxmlformats.org/drawingml/2006/main" wrap="square" lIns="0" tIns="0" rIns="0" bIns="0" anchor="t">
+            <a:noAutofit/>
+          </a:bodyPr>
+          <a:lstStyle xmlns:a="http://schemas.openxmlformats.org/drawingml/2006/main"/>
+          <a:p xmlns:a="http://schemas.openxmlformats.org/drawingml/2006/main">
+            <a:pPr>
+              <a:defRPr sz="2250" b="1">
+                <a:solidFill>
+                  <a:srgbClr val="FFFFFF"/>
+                </a:solidFill>
+                <a:latin typeface="DejaVu Sans"/>
+                <a:ea typeface="DejaVu Sans"/>
+                <a:cs typeface="DejaVu Sans"/>
+              </a:defRPr>
+            </a:pPr>
+            <a:r>
+              <a:rPr sz="2250" b="1">
+                <a:solidFill>
+                  <a:srgbClr val="FFFFFF"/>
+                </a:solidFill>
+                <a:latin typeface="DejaVu Sans"/>
+                <a:ea typeface="DejaVu Sans"/>
+                <a:cs typeface="DejaVu Sans"/>
+              </a:rPr>
+              <a:t>Write the key fact IN YOUR OWN WORDS and answer the worksheet challenge before tapping the badge.</a:t>
+            </a:r>
+          </a:p>
+        </p:txBody>
+      </p:sp>
+      <p:sp>
+        <p:nvSpPr>
+          <p:cNvPr id="9" name="finish-label">
+            <a:extLst xmlns:a="http://schemas.openxmlformats.org/drawingml/2006/main">
+              <a:ext uri="{FF2B5EF4-FFF2-40B4-BE49-F238E27FC236}">
+                <a16:creationId xmlns:a16="http://schemas.microsoft.com/office/drawing/2014/main" id="{22DC8388-E8F0-49FC-B5C1-C8428BAC090E}"/>
+              </a:ext>
+            </a:extLst>
+          </p:cNvPr>
+          <p:cNvSpPr>
+            <a:spLocks xmlns:a="http://schemas.openxmlformats.org/drawingml/2006/main" noGrp="1"/>
+          </p:cNvSpPr>
+          <p:nvPr/>
+        </p:nvSpPr>
+        <p:spPr>
+          <a:xfrm xmlns:a="http://schemas.openxmlformats.org/drawingml/2006/main">
+            <a:off x="723900" y="4638675"/>
+            <a:ext cx="1428750" cy="352425"/>
+          </a:xfrm>
+          <a:prstGeom xmlns:a="http://schemas.openxmlformats.org/drawingml/2006/main" prst="rect">
+            <a:avLst/>
+          </a:prstGeom>
+          <a:noFill xmlns:a="http://schemas.openxmlformats.org/drawingml/2006/main"/>
+          <a:ln xmlns:a="http://schemas.openxmlformats.org/drawingml/2006/main" w="0">
+            <a:noFill/>
+          </a:ln>
+        </p:spPr>
+        <p:txBody>
+          <a:bodyPr xmlns:a="http://schemas.openxmlformats.org/drawingml/2006/main" wrap="square" lIns="0" tIns="0" rIns="0" bIns="0" anchor="t">
+            <a:noAutofit/>
+          </a:bodyPr>
+          <a:lstStyle xmlns:a="http://schemas.openxmlformats.org/drawingml/2006/main"/>
+          <a:p xmlns:a="http://schemas.openxmlformats.org/drawingml/2006/main">
+            <a:pPr>
+              <a:defRPr sz="1575" b="1">
+                <a:solidFill>
+                  <a:srgbClr val="77D8FF"/>
+                </a:solidFill>
+                <a:latin typeface="DejaVu Sans"/>
+                <a:ea typeface="DejaVu Sans"/>
+                <a:cs typeface="DejaVu Sans"/>
+              </a:defRPr>
+            </a:pPr>
+            <a:r>
+              <a:rPr sz="1575" b="1">
+                <a:solidFill>
+                  <a:srgbClr val="77D8FF"/>
+                </a:solidFill>
+                <a:latin typeface="DejaVu Sans"/>
+                <a:ea typeface="DejaVu Sans"/>
+                <a:cs typeface="DejaVu Sans"/>
+              </a:rPr>
+              <a:t>FINISH</a:t>
+            </a:r>
+          </a:p>
+        </p:txBody>
+      </p:sp>
+      <p:sp>
+        <p:nvSpPr>
+          <p:cNvPr id="10" name="finish">
+            <a:extLst xmlns:a="http://schemas.openxmlformats.org/drawingml/2006/main">
+              <a:ext uri="{FF2B5EF4-FFF2-40B4-BE49-F238E27FC236}">
+                <a16:creationId xmlns:a16="http://schemas.microsoft.com/office/drawing/2014/main" id="{45F84F92-6FB6-46A1-8A3F-C993CB8D3F14}"/>
+              </a:ext>
+            </a:extLst>
+          </p:cNvPr>
+          <p:cNvSpPr>
+            <a:spLocks xmlns:a="http://schemas.openxmlformats.org/drawingml/2006/main" noGrp="1"/>
+          </p:cNvSpPr>
+          <p:nvPr/>
+        </p:nvSpPr>
+        <p:spPr>
+          <a:xfrm xmlns:a="http://schemas.openxmlformats.org/drawingml/2006/main">
+            <a:off x="723900" y="4972050"/>
+            <a:ext cx="10572750" cy="666750"/>
           </a:xfrm>
           <a:prstGeom xmlns:a="http://schemas.openxmlformats.org/drawingml/2006/main" prst="rect">
             <a:avLst/>
@@ -12492,7 +12492,7 @@
             <a:pPr>
               <a:defRPr sz="1950" b="0">
                 <a:solidFill>
-                  <a:srgbClr val="101828"/>
+                  <a:srgbClr val="FFFFFF"/>
                 </a:solidFill>
                 <a:latin typeface="DejaVu Sans"/>
                 <a:ea typeface="DejaVu Sans"/>
@@ -12502,185 +12502,82 @@
             <a:r>
               <a:rPr sz="1950" b="0">
                 <a:solidFill>
-                  <a:srgbClr val="101828"/>
-                </a:solidFill>
-                <a:latin typeface="DejaVu Sans"/>
-                <a:ea typeface="DejaVu Sans"/>
-                <a:cs typeface="DejaVu Sans"/>
-              </a:rPr>
-              <a:t>Tap the badge and answer on screen. Your first answer is the one that counts.</a:t>
-            </a:r>
-          </a:p>
-        </p:txBody>
-      </p:sp>
-      <p:sp>
-        <p:nvSpPr>
-          <p:cNvPr id="11" name="number-4">
-            <a:extLst xmlns:a="http://schemas.openxmlformats.org/drawingml/2006/main">
-              <a:ext uri="{FF2B5EF4-FFF2-40B4-BE49-F238E27FC236}">
-                <a16:creationId xmlns:a16="http://schemas.microsoft.com/office/drawing/2014/main" id="{7DCAF398-B916-417C-8579-72D2BA3CDA36}"/>
-              </a:ext>
-            </a:extLst>
-          </p:cNvPr>
-          <p:cNvSpPr>
-            <a:spLocks xmlns:a="http://schemas.openxmlformats.org/drawingml/2006/main" noGrp="1"/>
-          </p:cNvSpPr>
-          <p:nvPr/>
-        </p:nvSpPr>
-        <p:spPr>
-          <a:xfrm xmlns:a="http://schemas.openxmlformats.org/drawingml/2006/main">
-            <a:off x="723900" y="4695825"/>
-            <a:ext cx="590550" cy="476250"/>
-          </a:xfrm>
-          <a:prstGeom xmlns:a="http://schemas.openxmlformats.org/drawingml/2006/main" prst="rect">
-            <a:avLst/>
-          </a:prstGeom>
-          <a:noFill xmlns:a="http://schemas.openxmlformats.org/drawingml/2006/main"/>
-          <a:ln xmlns:a="http://schemas.openxmlformats.org/drawingml/2006/main" w="0">
-            <a:noFill/>
-          </a:ln>
-        </p:spPr>
-        <p:txBody>
-          <a:bodyPr xmlns:a="http://schemas.openxmlformats.org/drawingml/2006/main" wrap="square" lIns="0" tIns="0" rIns="0" bIns="0" anchor="t">
-            <a:noAutofit/>
-          </a:bodyPr>
-          <a:lstStyle xmlns:a="http://schemas.openxmlformats.org/drawingml/2006/main"/>
-          <a:p xmlns:a="http://schemas.openxmlformats.org/drawingml/2006/main">
-            <a:pPr>
-              <a:defRPr sz="1875" b="1">
-                <a:solidFill>
-                  <a:srgbClr val="2D63FF"/>
-                </a:solidFill>
-                <a:latin typeface="DejaVu Sans"/>
-                <a:ea typeface="DejaVu Sans"/>
-                <a:cs typeface="DejaVu Sans"/>
-              </a:defRPr>
-            </a:pPr>
-            <a:r>
-              <a:rPr sz="1875" b="1">
-                <a:solidFill>
-                  <a:srgbClr val="2D63FF"/>
-                </a:solidFill>
-                <a:latin typeface="DejaVu Sans"/>
-                <a:ea typeface="DejaVu Sans"/>
-                <a:cs typeface="DejaVu Sans"/>
-              </a:rPr>
-              <a:t>4.</a:t>
-            </a:r>
-          </a:p>
-        </p:txBody>
-      </p:sp>
-      <p:sp>
-        <p:nvSpPr>
-          <p:cNvPr id="12" name="item-4">
-            <a:extLst xmlns:a="http://schemas.openxmlformats.org/drawingml/2006/main">
-              <a:ext uri="{FF2B5EF4-FFF2-40B4-BE49-F238E27FC236}">
-                <a16:creationId xmlns:a16="http://schemas.microsoft.com/office/drawing/2014/main" id="{41F14DBC-AC69-43B8-AECD-E165825C1C66}"/>
-              </a:ext>
-            </a:extLst>
-          </p:cNvPr>
-          <p:cNvSpPr>
-            <a:spLocks xmlns:a="http://schemas.openxmlformats.org/drawingml/2006/main" noGrp="1"/>
-          </p:cNvSpPr>
-          <p:nvPr/>
-        </p:nvSpPr>
-        <p:spPr>
-          <a:xfrm xmlns:a="http://schemas.openxmlformats.org/drawingml/2006/main">
-            <a:off x="1352550" y="4695825"/>
-            <a:ext cx="9925050" cy="838200"/>
-          </a:xfrm>
-          <a:prstGeom xmlns:a="http://schemas.openxmlformats.org/drawingml/2006/main" prst="rect">
-            <a:avLst/>
-          </a:prstGeom>
-          <a:noFill xmlns:a="http://schemas.openxmlformats.org/drawingml/2006/main"/>
-          <a:ln xmlns:a="http://schemas.openxmlformats.org/drawingml/2006/main" w="0">
-            <a:noFill/>
-          </a:ln>
-        </p:spPr>
-        <p:txBody>
-          <a:bodyPr xmlns:a="http://schemas.openxmlformats.org/drawingml/2006/main" wrap="square" lIns="0" tIns="0" rIns="0" bIns="0" anchor="t">
-            <a:noAutofit/>
-          </a:bodyPr>
-          <a:lstStyle xmlns:a="http://schemas.openxmlformats.org/drawingml/2006/main"/>
-          <a:p xmlns:a="http://schemas.openxmlformats.org/drawingml/2006/main">
-            <a:pPr>
-              <a:defRPr sz="1875" b="0">
-                <a:solidFill>
-                  <a:srgbClr val="101828"/>
-                </a:solidFill>
-                <a:latin typeface="DejaVu Sans"/>
-                <a:ea typeface="DejaVu Sans"/>
-                <a:cs typeface="DejaVu Sans"/>
-              </a:defRPr>
-            </a:pPr>
-            <a:r>
-              <a:rPr sz="1875" b="0">
-                <a:solidFill>
-                  <a:srgbClr val="101828"/>
-                </a:solidFill>
-                <a:latin typeface="DejaVu Sans"/>
-                <a:ea typeface="DejaVu Sans"/>
-                <a:cs typeface="DejaVu Sans"/>
-              </a:rPr>
-              <a:t>When the score screen appears, copy your score into the yellow worksheet box (out of 17).</a:t>
-            </a:r>
-          </a:p>
-        </p:txBody>
-      </p:sp>
-      <p:sp>
-        <p:nvSpPr>
-          <p:cNvPr id="13" name="open-link">
-            <a:extLst xmlns:a="http://schemas.openxmlformats.org/drawingml/2006/main">
-              <a:ext uri="{FF2B5EF4-FFF2-40B4-BE49-F238E27FC236}">
-                <a16:creationId xmlns:a16="http://schemas.microsoft.com/office/drawing/2014/main" id="{42006F5D-70EE-4380-A2EC-15370F4FB58C}"/>
-              </a:ext>
-            </a:extLst>
-          </p:cNvPr>
-          <p:cNvSpPr>
-            <a:spLocks xmlns:a="http://schemas.openxmlformats.org/drawingml/2006/main" noGrp="1"/>
-          </p:cNvSpPr>
-          <p:nvPr/>
-        </p:nvSpPr>
-        <p:spPr>
-          <a:xfrm xmlns:a="http://schemas.openxmlformats.org/drawingml/2006/main">
-            <a:off x="723900" y="5781675"/>
-            <a:ext cx="4953000" cy="352425"/>
-          </a:xfrm>
-          <a:prstGeom xmlns:a="http://schemas.openxmlformats.org/drawingml/2006/main" prst="rect">
-            <a:avLst/>
-          </a:prstGeom>
-          <a:noFill xmlns:a="http://schemas.openxmlformats.org/drawingml/2006/main"/>
-          <a:ln xmlns:a="http://schemas.openxmlformats.org/drawingml/2006/main" w="0">
-            <a:noFill/>
-          </a:ln>
-        </p:spPr>
-        <p:txBody>
-          <a:bodyPr xmlns:a="http://schemas.openxmlformats.org/drawingml/2006/main" wrap="square" lIns="0" tIns="0" rIns="0" bIns="0" anchor="t">
-            <a:noAutofit/>
-          </a:bodyPr>
-          <a:lstStyle xmlns:a="http://schemas.openxmlformats.org/drawingml/2006/main"/>
-          <a:p xmlns:a="http://schemas.openxmlformats.org/drawingml/2006/main">
-            <a:pPr>
-              <a:defRPr sz="1650" b="1">
-                <a:solidFill>
-                  <a:srgbClr val="2D63FF"/>
-                </a:solidFill>
-                <a:latin typeface="DejaVu Sans"/>
-                <a:ea typeface="DejaVu Sans"/>
-                <a:cs typeface="DejaVu Sans"/>
-              </a:defRPr>
-            </a:pPr>
-            <a:r>
-              <a:rPr sz="1650" b="1">
-                <a:solidFill>
-                  <a:srgbClr val="2D63FF"/>
-                </a:solidFill>
-                <a:latin typeface="DejaVu Sans"/>
-                <a:ea typeface="DejaVu Sans"/>
-                <a:cs typeface="DejaVu Sans"/>
-                <a:hlinkClick xmlns:r="http://schemas.openxmlformats.org/officeDocument/2006/relationships" r:id="R164df8e6ea0949f5"/>
+                  <a:srgbClr val="FFFFFF"/>
+                </a:solidFill>
+                <a:latin typeface="DejaVu Sans"/>
+                <a:ea typeface="DejaVu Sans"/>
+                <a:cs typeface="DejaVu Sans"/>
+              </a:rPr>
+              <a:t>Answer on screen, then copy your score into the yellow worksheet box (out of 17).</a:t>
+            </a:r>
+          </a:p>
+        </p:txBody>
+      </p:sp>
+      <p:sp>
+        <p:nvSpPr>
+          <p:cNvPr id="11" name="open-link">
+            <a:extLst xmlns:a="http://schemas.openxmlformats.org/drawingml/2006/main">
+              <a:ext uri="{FF2B5EF4-FFF2-40B4-BE49-F238E27FC236}">
+                <a16:creationId xmlns:a16="http://schemas.microsoft.com/office/drawing/2014/main" id="{F7458EF2-B7D0-4622-8E4E-44032EADA32D}"/>
+              </a:ext>
+            </a:extLst>
+          </p:cNvPr>
+          <p:cNvSpPr>
+            <a:spLocks xmlns:a="http://schemas.openxmlformats.org/drawingml/2006/main" noGrp="1"/>
+          </p:cNvSpPr>
+          <p:nvPr/>
+        </p:nvSpPr>
+        <p:spPr>
+          <a:xfrm xmlns:a="http://schemas.openxmlformats.org/drawingml/2006/main">
+            <a:off x="723900" y="5838825"/>
+            <a:ext cx="5715000" cy="361950"/>
+          </a:xfrm>
+          <a:prstGeom xmlns:a="http://schemas.openxmlformats.org/drawingml/2006/main" prst="rect">
+            <a:avLst/>
+          </a:prstGeom>
+          <a:noFill xmlns:a="http://schemas.openxmlformats.org/drawingml/2006/main"/>
+          <a:ln xmlns:a="http://schemas.openxmlformats.org/drawingml/2006/main" w="0">
+            <a:noFill/>
+          </a:ln>
+        </p:spPr>
+        <p:txBody>
+          <a:bodyPr xmlns:a="http://schemas.openxmlformats.org/drawingml/2006/main" wrap="square" lIns="0" tIns="0" rIns="0" bIns="0" anchor="t">
+            <a:noAutofit/>
+          </a:bodyPr>
+          <a:lstStyle xmlns:a="http://schemas.openxmlformats.org/drawingml/2006/main"/>
+          <a:p xmlns:a="http://schemas.openxmlformats.org/drawingml/2006/main">
+            <a:pPr>
+              <a:defRPr sz="1725" b="1">
+                <a:solidFill>
+                  <a:srgbClr val="77D8FF"/>
+                </a:solidFill>
+                <a:latin typeface="DejaVu Sans"/>
+                <a:ea typeface="DejaVu Sans"/>
+                <a:cs typeface="DejaVu Sans"/>
+              </a:defRPr>
+            </a:pPr>
+            <a:r>
+              <a:rPr sz="1725" b="1">
+                <a:solidFill>
+                  <a:srgbClr val="77D8FF"/>
+                </a:solidFill>
+                <a:latin typeface="DejaVu Sans"/>
+                <a:ea typeface="DejaVu Sans"/>
+                <a:cs typeface="DejaVu Sans"/>
+                <a:hlinkClick xmlns:r="http://schemas.openxmlformats.org/officeDocument/2006/relationships" r:id="R3d6cf058053a4ca8"/>
               </a:rPr>
               <a:t>Open the experience online</a:t>
+            </a:r>
+            <a:r>
+              <a:rPr sz="1725" b="1">
+                <a:solidFill>
+                  <a:srgbClr val="77D8FF"/>
+                </a:solidFill>
+                <a:latin typeface="DejaVu Sans"/>
+                <a:ea typeface="DejaVu Sans"/>
+                <a:cs typeface="DejaVu Sans"/>
+              </a:rPr>
+              <a:t>  ↗</a:t>
             </a:r>
           </a:p>
         </p:txBody>
@@ -12688,7 +12585,7 @@
     </p:spTree>
     <p:extLst>
       <p:ext uri="{BB962C8B-B14F-4D97-AF65-F5344CB8AC3E}">
-        <p14:creationId xmlns:p14="http://schemas.microsoft.com/office/powerpoint/2010/main" val="702992181"/>
+        <p14:creationId xmlns:p14="http://schemas.microsoft.com/office/powerpoint/2010/main" val="169840269"/>
       </p:ext>
     </p:extLst>
   </p:cSld>
@@ -12719,7 +12616,7 @@
           <p:cNvPr id="15" name="topic">
             <a:extLst xmlns:a="http://schemas.openxmlformats.org/drawingml/2006/main">
               <a:ext uri="{FF2B5EF4-FFF2-40B4-BE49-F238E27FC236}">
-                <a16:creationId xmlns:a16="http://schemas.microsoft.com/office/drawing/2014/main" id="{5ACE4B23-EC67-425D-B073-FFC12FF2FDD5}"/>
+                <a16:creationId xmlns:a16="http://schemas.microsoft.com/office/drawing/2014/main" id="{88802313-1032-44D9-A6EE-F10AA51F758F}"/>
               </a:ext>
             </a:extLst>
           </p:cNvPr>
@@ -12731,7 +12628,7 @@
         <p:spPr>
           <a:xfrm xmlns:a="http://schemas.openxmlformats.org/drawingml/2006/main">
             <a:off x="666750" y="323850"/>
-            <a:ext cx="6667500" cy="276225"/>
+            <a:ext cx="9810750" cy="276225"/>
           </a:xfrm>
           <a:prstGeom xmlns:a="http://schemas.openxmlformats.org/drawingml/2006/main" prst="rect">
             <a:avLst/>
@@ -12766,7 +12663,7 @@
                 <a:ea typeface="DejaVu Sans"/>
                 <a:cs typeface="DejaVu Sans"/>
               </a:rPr>
-              <a:t>TOPIC 1.1   LESSON 03</a:t>
+              <a:t>TOPIC 1.1   /   LESSON 03   /   EXPERIENCE</a:t>
             </a:r>
           </a:p>
         </p:txBody>
@@ -12776,7 +12673,7 @@
           <p:cNvPr id="2" name="heading">
             <a:extLst xmlns:a="http://schemas.openxmlformats.org/drawingml/2006/main">
               <a:ext uri="{FF2B5EF4-FFF2-40B4-BE49-F238E27FC236}">
-                <a16:creationId xmlns:a16="http://schemas.microsoft.com/office/drawing/2014/main" id="{6C0B3A2D-4514-498D-BE5C-BC36791A3D63}"/>
+                <a16:creationId xmlns:a16="http://schemas.microsoft.com/office/drawing/2014/main" id="{664A5FC7-3A51-44D5-B268-88778FE7092B}"/>
               </a:ext>
             </a:extLst>
           </p:cNvPr>
@@ -12833,7 +12730,7 @@
           <p:cNvPr id="3" name="footer">
             <a:extLst xmlns:a="http://schemas.openxmlformats.org/drawingml/2006/main">
               <a:ext uri="{FF2B5EF4-FFF2-40B4-BE49-F238E27FC236}">
-                <a16:creationId xmlns:a16="http://schemas.microsoft.com/office/drawing/2014/main" id="{C1ED98B0-5538-4C5E-AFEA-2A01682CADFB}"/>
+                <a16:creationId xmlns:a16="http://schemas.microsoft.com/office/drawing/2014/main" id="{64F9F6F9-36F4-4235-A302-13715913CBA4}"/>
               </a:ext>
             </a:extLst>
           </p:cNvPr>
@@ -12880,7 +12777,7 @@
                 <a:ea typeface="DejaVu Sans"/>
                 <a:cs typeface="DejaVu Sans"/>
               </a:rPr>
-              <a:t>Revise 360    OCR J277 1.1 Systems architecture    Experience</a:t>
+              <a:t>Revise 360    OCR J277 1.1 Systems architecture</a:t>
             </a:r>
           </a:p>
         </p:txBody>
@@ -12890,7 +12787,7 @@
           <p:cNvPr id="4" name="page">
             <a:extLst xmlns:a="http://schemas.openxmlformats.org/drawingml/2006/main">
               <a:ext uri="{FF2B5EF4-FFF2-40B4-BE49-F238E27FC236}">
-                <a16:creationId xmlns:a16="http://schemas.microsoft.com/office/drawing/2014/main" id="{5E050D46-48CF-41DE-8D69-BC08D64214CB}"/>
+                <a16:creationId xmlns:a16="http://schemas.microsoft.com/office/drawing/2014/main" id="{2E6D1221-C562-496F-A800-9B0CB041BBC7}"/>
               </a:ext>
             </a:extLst>
           </p:cNvPr>
@@ -12947,19 +12844,19 @@
           <p:cNvPr id="5" name="route-intro">
             <a:extLst xmlns:a="http://schemas.openxmlformats.org/drawingml/2006/main">
               <a:ext uri="{FF2B5EF4-FFF2-40B4-BE49-F238E27FC236}">
-                <a16:creationId xmlns:a16="http://schemas.microsoft.com/office/drawing/2014/main" id="{8E2D50CA-785D-4DB7-905B-7EC5F206F5D8}"/>
-              </a:ext>
-            </a:extLst>
-          </p:cNvPr>
-          <p:cNvSpPr>
-            <a:spLocks xmlns:a="http://schemas.openxmlformats.org/drawingml/2006/main" noGrp="1"/>
-          </p:cNvSpPr>
-          <p:nvPr/>
-        </p:nvSpPr>
-        <p:spPr>
-          <a:xfrm xmlns:a="http://schemas.openxmlformats.org/drawingml/2006/main">
-            <a:off x="704850" y="1581150"/>
-            <a:ext cx="10477500" cy="504825"/>
+                <a16:creationId xmlns:a16="http://schemas.microsoft.com/office/drawing/2014/main" id="{364553E5-D51C-4B80-B991-CB1044C1B7C7}"/>
+              </a:ext>
+            </a:extLst>
+          </p:cNvPr>
+          <p:cNvSpPr>
+            <a:spLocks xmlns:a="http://schemas.openxmlformats.org/drawingml/2006/main" noGrp="1"/>
+          </p:cNvSpPr>
+          <p:nvPr/>
+        </p:nvSpPr>
+        <p:spPr>
+          <a:xfrm xmlns:a="http://schemas.openxmlformats.org/drawingml/2006/main">
+            <a:off x="704850" y="1533525"/>
+            <a:ext cx="10477500" cy="590550"/>
           </a:xfrm>
           <a:prstGeom xmlns:a="http://schemas.openxmlformats.org/drawingml/2006/main" prst="rect">
             <a:avLst/>
@@ -12994,7 +12891,7 @@
                 <a:ea typeface="DejaVu Sans"/>
                 <a:cs typeface="DejaVu Sans"/>
               </a:rPr>
-              <a:t>Use the same route as the experience and worksheet:</a:t>
+              <a:t>Follow your worksheet route. Write key facts in your own words before tapping each badge.</a:t>
             </a:r>
           </a:p>
         </p:txBody>
@@ -13004,7 +12901,7 @@
           <p:cNvPr id="6" name="route-direction-0">
             <a:extLst xmlns:a="http://schemas.openxmlformats.org/drawingml/2006/main">
               <a:ext uri="{FF2B5EF4-FFF2-40B4-BE49-F238E27FC236}">
-                <a16:creationId xmlns:a16="http://schemas.microsoft.com/office/drawing/2014/main" id="{BE3582AC-1086-40FE-9808-60AFB48AA713}"/>
+                <a16:creationId xmlns:a16="http://schemas.microsoft.com/office/drawing/2014/main" id="{E52AE46C-FE98-4DC9-ADEB-7AD74446E07E}"/>
               </a:ext>
             </a:extLst>
           </p:cNvPr>
@@ -13061,7 +12958,7 @@
           <p:cNvPr id="7" name="route-names-0">
             <a:extLst xmlns:a="http://schemas.openxmlformats.org/drawingml/2006/main">
               <a:ext uri="{FF2B5EF4-FFF2-40B4-BE49-F238E27FC236}">
-                <a16:creationId xmlns:a16="http://schemas.microsoft.com/office/drawing/2014/main" id="{5E6378C6-A494-4E68-943D-8C9268D37A78}"/>
+                <a16:creationId xmlns:a16="http://schemas.microsoft.com/office/drawing/2014/main" id="{0573D511-102C-4AC3-88E2-24BE9C4AC68A}"/>
               </a:ext>
             </a:extLst>
           </p:cNvPr>
@@ -13141,7 +13038,7 @@
           <p:cNvPr id="8" name="route-direction-1">
             <a:extLst xmlns:a="http://schemas.openxmlformats.org/drawingml/2006/main">
               <a:ext uri="{FF2B5EF4-FFF2-40B4-BE49-F238E27FC236}">
-                <a16:creationId xmlns:a16="http://schemas.microsoft.com/office/drawing/2014/main" id="{5301BB62-BE59-4C86-B3F8-DD2588C8FB80}"/>
+                <a16:creationId xmlns:a16="http://schemas.microsoft.com/office/drawing/2014/main" id="{0DA935FC-7483-476A-A689-41C3CB30AE59}"/>
               </a:ext>
             </a:extLst>
           </p:cNvPr>
@@ -13198,7 +13095,7 @@
           <p:cNvPr id="9" name="route-names-1">
             <a:extLst xmlns:a="http://schemas.openxmlformats.org/drawingml/2006/main">
               <a:ext uri="{FF2B5EF4-FFF2-40B4-BE49-F238E27FC236}">
-                <a16:creationId xmlns:a16="http://schemas.microsoft.com/office/drawing/2014/main" id="{72EDF584-F40A-4F03-AE44-F2AE7D9F432D}"/>
+                <a16:creationId xmlns:a16="http://schemas.microsoft.com/office/drawing/2014/main" id="{E9660505-A872-4C16-A224-093945134355}"/>
               </a:ext>
             </a:extLst>
           </p:cNvPr>
@@ -13278,7 +13175,7 @@
           <p:cNvPr id="10" name="route-direction-2">
             <a:extLst xmlns:a="http://schemas.openxmlformats.org/drawingml/2006/main">
               <a:ext uri="{FF2B5EF4-FFF2-40B4-BE49-F238E27FC236}">
-                <a16:creationId xmlns:a16="http://schemas.microsoft.com/office/drawing/2014/main" id="{7176C96F-23EA-443A-AA42-28A9758DC7FB}"/>
+                <a16:creationId xmlns:a16="http://schemas.microsoft.com/office/drawing/2014/main" id="{6100154C-00F3-4C46-B354-56A696136DEE}"/>
               </a:ext>
             </a:extLst>
           </p:cNvPr>
@@ -13335,7 +13232,7 @@
           <p:cNvPr id="11" name="route-names-2">
             <a:extLst xmlns:a="http://schemas.openxmlformats.org/drawingml/2006/main">
               <a:ext uri="{FF2B5EF4-FFF2-40B4-BE49-F238E27FC236}">
-                <a16:creationId xmlns:a16="http://schemas.microsoft.com/office/drawing/2014/main" id="{A0347D28-785C-4B27-8747-907C11EEAD2B}"/>
+                <a16:creationId xmlns:a16="http://schemas.microsoft.com/office/drawing/2014/main" id="{5FC4F464-102B-499A-9BB7-06CC807752B2}"/>
               </a:ext>
             </a:extLst>
           </p:cNvPr>
@@ -13415,7 +13312,7 @@
           <p:cNvPr id="12" name="route-direction-3">
             <a:extLst xmlns:a="http://schemas.openxmlformats.org/drawingml/2006/main">
               <a:ext uri="{FF2B5EF4-FFF2-40B4-BE49-F238E27FC236}">
-                <a16:creationId xmlns:a16="http://schemas.microsoft.com/office/drawing/2014/main" id="{45E198E5-B2E1-4272-94C3-08A66C250850}"/>
+                <a16:creationId xmlns:a16="http://schemas.microsoft.com/office/drawing/2014/main" id="{710FFD92-E493-4373-8C38-C7C45087ADD0}"/>
               </a:ext>
             </a:extLst>
           </p:cNvPr>
@@ -13472,7 +13369,7 @@
           <p:cNvPr id="13" name="route-names-3">
             <a:extLst xmlns:a="http://schemas.openxmlformats.org/drawingml/2006/main">
               <a:ext uri="{FF2B5EF4-FFF2-40B4-BE49-F238E27FC236}">
-                <a16:creationId xmlns:a16="http://schemas.microsoft.com/office/drawing/2014/main" id="{2CDF03FB-682A-484B-9FB5-68E41CD183A4}"/>
+                <a16:creationId xmlns:a16="http://schemas.microsoft.com/office/drawing/2014/main" id="{0B110ADF-1EC5-40B1-B7B1-58E66F3528D4}"/>
               </a:ext>
             </a:extLst>
           </p:cNvPr>
@@ -13533,7 +13430,7 @@
           <p:nvPr/>
         </p:nvPicPr>
         <p:blipFill>
-          <a:blip xmlns:r="http://schemas.openxmlformats.org/officeDocument/2006/relationships" xmlns:a="http://schemas.openxmlformats.org/drawingml/2006/main" r:embed="R63ee43c38ac94e3e"/>
+          <a:blip xmlns:r="http://schemas.openxmlformats.org/officeDocument/2006/relationships" xmlns:a="http://schemas.openxmlformats.org/drawingml/2006/main" r:embed="Re3043c4f9a7d43e6"/>
           <a:stretch xmlns:a="http://schemas.openxmlformats.org/drawingml/2006/main"/>
         </p:blipFill>
         <p:spPr>
@@ -13549,7 +13446,7 @@
     </p:spTree>
     <p:extLst>
       <p:ext uri="{BB962C8B-B14F-4D97-AF65-F5344CB8AC3E}">
-        <p14:creationId xmlns:p14="http://schemas.microsoft.com/office/powerpoint/2010/main" val="1853951675"/>
+        <p14:creationId xmlns:p14="http://schemas.microsoft.com/office/powerpoint/2010/main" val="109655137"/>
       </p:ext>
     </p:extLst>
   </p:cSld>
@@ -13580,7 +13477,7 @@
           <p:cNvPr id="9" name="topic">
             <a:extLst xmlns:a="http://schemas.openxmlformats.org/drawingml/2006/main">
               <a:ext uri="{FF2B5EF4-FFF2-40B4-BE49-F238E27FC236}">
-                <a16:creationId xmlns:a16="http://schemas.microsoft.com/office/drawing/2014/main" id="{0456A3B1-8A26-4FBE-8AAD-165C65EA29F9}"/>
+                <a16:creationId xmlns:a16="http://schemas.microsoft.com/office/drawing/2014/main" id="{223D5F2E-BBB2-455C-B0E1-E50B24FE694D}"/>
               </a:ext>
             </a:extLst>
           </p:cNvPr>
@@ -13592,7 +13489,7 @@
         <p:spPr>
           <a:xfrm xmlns:a="http://schemas.openxmlformats.org/drawingml/2006/main">
             <a:off x="666750" y="323850"/>
-            <a:ext cx="6667500" cy="276225"/>
+            <a:ext cx="9810750" cy="276225"/>
           </a:xfrm>
           <a:prstGeom xmlns:a="http://schemas.openxmlformats.org/drawingml/2006/main" prst="rect">
             <a:avLst/>
@@ -13627,7 +13524,7 @@
                 <a:ea typeface="DejaVu Sans"/>
                 <a:cs typeface="DejaVu Sans"/>
               </a:rPr>
-              <a:t>TOPIC 1.1   LESSON 03</a:t>
+              <a:t>TOPIC 1.1   /   LESSON 03   /   WORKSHEET</a:t>
             </a:r>
           </a:p>
         </p:txBody>
@@ -13637,7 +13534,7 @@
           <p:cNvPr id="2" name="heading">
             <a:extLst xmlns:a="http://schemas.openxmlformats.org/drawingml/2006/main">
               <a:ext uri="{FF2B5EF4-FFF2-40B4-BE49-F238E27FC236}">
-                <a16:creationId xmlns:a16="http://schemas.microsoft.com/office/drawing/2014/main" id="{25A39B06-07D7-42AC-8A46-8A679B68C669}"/>
+                <a16:creationId xmlns:a16="http://schemas.microsoft.com/office/drawing/2014/main" id="{F353F9F7-0161-4818-8710-A82379528202}"/>
               </a:ext>
             </a:extLst>
           </p:cNvPr>
@@ -13694,7 +13591,7 @@
           <p:cNvPr id="3" name="footer">
             <a:extLst xmlns:a="http://schemas.openxmlformats.org/drawingml/2006/main">
               <a:ext uri="{FF2B5EF4-FFF2-40B4-BE49-F238E27FC236}">
-                <a16:creationId xmlns:a16="http://schemas.microsoft.com/office/drawing/2014/main" id="{934610F7-3165-4B5F-AB1F-F0C373159851}"/>
+                <a16:creationId xmlns:a16="http://schemas.microsoft.com/office/drawing/2014/main" id="{BD718EFD-41E9-453E-BD1A-924C630E5EE1}"/>
               </a:ext>
             </a:extLst>
           </p:cNvPr>
@@ -13741,7 +13638,7 @@
                 <a:ea typeface="DejaVu Sans"/>
                 <a:cs typeface="DejaVu Sans"/>
               </a:rPr>
-              <a:t>Revise 360    OCR J277 1.1 Systems architecture    Worksheet</a:t>
+              <a:t>Revise 360    OCR J277 1.1 Systems architecture</a:t>
             </a:r>
           </a:p>
         </p:txBody>
@@ -13751,7 +13648,7 @@
           <p:cNvPr id="4" name="page">
             <a:extLst xmlns:a="http://schemas.openxmlformats.org/drawingml/2006/main">
               <a:ext uri="{FF2B5EF4-FFF2-40B4-BE49-F238E27FC236}">
-                <a16:creationId xmlns:a16="http://schemas.microsoft.com/office/drawing/2014/main" id="{2BF3040F-9DE5-4591-A6C8-F951519030CC}"/>
+                <a16:creationId xmlns:a16="http://schemas.microsoft.com/office/drawing/2014/main" id="{6572C66D-C2EF-4611-B1F6-B90522A138E8}"/>
               </a:ext>
             </a:extLst>
           </p:cNvPr>
@@ -13808,7 +13705,7 @@
           <p:cNvPr id="5" name="star">
             <a:extLst xmlns:a="http://schemas.openxmlformats.org/drawingml/2006/main">
               <a:ext uri="{FF2B5EF4-FFF2-40B4-BE49-F238E27FC236}">
-                <a16:creationId xmlns:a16="http://schemas.microsoft.com/office/drawing/2014/main" id="{D86D39EA-CA83-4020-98F0-A084340703CA}"/>
+                <a16:creationId xmlns:a16="http://schemas.microsoft.com/office/drawing/2014/main" id="{7AF7B5D4-DFD8-44A3-B252-D64DA2DAA69F}"/>
               </a:ext>
             </a:extLst>
           </p:cNvPr>
@@ -13865,7 +13762,7 @@
           <p:cNvPr id="6" name="score">
             <a:extLst xmlns:a="http://schemas.openxmlformats.org/drawingml/2006/main">
               <a:ext uri="{FF2B5EF4-FFF2-40B4-BE49-F238E27FC236}">
-                <a16:creationId xmlns:a16="http://schemas.microsoft.com/office/drawing/2014/main" id="{D9BD4941-D6AC-4B6C-9E80-127FFAECCAA8}"/>
+                <a16:creationId xmlns:a16="http://schemas.microsoft.com/office/drawing/2014/main" id="{9FBC1C8C-1260-43CF-98D9-0A29E7B115D4}"/>
               </a:ext>
             </a:extLst>
           </p:cNvPr>
@@ -13922,7 +13819,7 @@
           <p:cNvPr id="7" name="key-label">
             <a:extLst xmlns:a="http://schemas.openxmlformats.org/drawingml/2006/main">
               <a:ext uri="{FF2B5EF4-FFF2-40B4-BE49-F238E27FC236}">
-                <a16:creationId xmlns:a16="http://schemas.microsoft.com/office/drawing/2014/main" id="{DF8B28EA-CF51-45BE-A6FB-4BFF9FCD77F9}"/>
+                <a16:creationId xmlns:a16="http://schemas.microsoft.com/office/drawing/2014/main" id="{8096F28C-80D6-4908-8B3B-62E148BCE4BC}"/>
               </a:ext>
             </a:extLst>
           </p:cNvPr>
@@ -13979,7 +13876,7 @@
           <p:cNvPr id="8" name="key-question">
             <a:extLst xmlns:a="http://schemas.openxmlformats.org/drawingml/2006/main">
               <a:ext uri="{FF2B5EF4-FFF2-40B4-BE49-F238E27FC236}">
-                <a16:creationId xmlns:a16="http://schemas.microsoft.com/office/drawing/2014/main" id="{97371627-2194-4405-8557-1B000EB4939C}"/>
+                <a16:creationId xmlns:a16="http://schemas.microsoft.com/office/drawing/2014/main" id="{14CCE2B9-8719-4D8E-BC93-8EC5BD2C7FB4}"/>
               </a:ext>
             </a:extLst>
           </p:cNvPr>
@@ -14034,7 +13931,7 @@
     </p:spTree>
     <p:extLst>
       <p:ext uri="{BB962C8B-B14F-4D97-AF65-F5344CB8AC3E}">
-        <p14:creationId xmlns:p14="http://schemas.microsoft.com/office/powerpoint/2010/main" val="1157647876"/>
+        <p14:creationId xmlns:p14="http://schemas.microsoft.com/office/powerpoint/2010/main" val="1349883065"/>
       </p:ext>
     </p:extLst>
   </p:cSld>

--- a/presentations/SA_L03_SpeedLab_Lesson.pptx
+++ b/presentations/SA_L03_SpeedLab_Lesson.pptx
@@ -19,9 +19,10 @@
     <p:sldId id="267" r:id="rId13"/>
     <p:sldId id="268" r:id="rId14"/>
     <p:sldId id="269" r:id="rId15"/>
+    <p:sldId id="270" r:id="rId16"/>
   </p:sldIdLst>
   <p:notesMasterIdLst>
-    <p:notesMasterId r:id="rId16"/>
+    <p:notesMasterId r:id="rId17"/>
   </p:notesMasterIdLst>
   <p:sldSz cx="12192000" cy="6858000"/>
   <p:notesSz cx="6858000" cy="12192000"/>
@@ -692,7 +693,13 @@
           <a:p>
             <a:r>
               <a:rPr lang="en-US" dirty="0"/>
-              <a:t>Make them commit to an answer on paper before they tap the star. Guessing first costs them the learning.</a:t>
+              <a:t>The answer is C: A processing unit that can fetch, decode and execute instructions independently.
+Do not say it yet. Every pupil commits first - fingers, whiteboards or a show of hands on each letter in turn - and you count the split before anyone can change their mind.
+IF MOST OF THE CLASS IS RIGHT: say why it is right in one sentence and go straight on to the independent work.
+IF A SIGNIFICANT GROUP IS ON ONE WRONG LETTER: that option is the misconception to teach against before anyone goes on. Go back to station 4, Number of cores, and work through its example again, aloud, with the class watching, then re-ask this question.
+The course's own response to a wrong answer here: Multi-core CPUs have several of these on one chip.
+A limitation, stated rather than papered over: one response covers every wrong option; it does not say what to revisit for each one. The course does not record what each separate wrong option means, and this slide does not invent it. Decide your own reteach for each option before the lesson; the options above are the start of it.
+This is a real activity from the experience (sa-l03-s4-c1), so the wording here is the wording a pupil will see.</a:t>
             </a:r>
             <a:endParaRPr lang="en-US" dirty="0"/>
           </a:p>
@@ -780,7 +787,7 @@
           <a:p>
             <a:r>
               <a:rPr lang="en-US" dirty="0"/>
-              <a:t>Use these as a settler, or as something for early finishers to read in the experience.</a:t>
+              <a:t>Make them commit to an answer on paper before they tap the star. Guessing first costs them the learning.</a:t>
             </a:r>
             <a:endParaRPr lang="en-US" dirty="0"/>
           </a:p>
@@ -868,7 +875,7 @@
           <a:p>
             <a:r>
               <a:rPr lang="en-US" dirty="0"/>
-              <a:t>Timed and silent. Mark against the answer sheet, then ask students to record their weakest area.</a:t>
+              <a:t>Use these as a settler, or as something for early finishers to read in the experience.</a:t>
             </a:r>
             <a:endParaRPr lang="en-US" dirty="0"/>
           </a:p>
@@ -956,7 +963,7 @@
           <a:p>
             <a:r>
               <a:rPr lang="en-US" dirty="0"/>
-              <a:t>Students copy their score-screen breakdown onto the worksheet, then rate themselves here.</a:t>
+              <a:t>Timed and silent. Mark against the answer sheet, then ask students to record their weakest area.</a:t>
             </a:r>
             <a:endParaRPr lang="en-US" dirty="0"/>
           </a:p>
@@ -980,6 +987,94 @@
             <a:fld id="{F7021451-1387-4CA6-816F-3879F97B5CBC}" type="slidenum">
               <a:rPr lang="en-US"/>
               <a:t>14</a:t>
+            </a:fld>
+            <a:endParaRPr lang="en-US"/>
+          </a:p>
+        </p:txBody>
+      </p:sp>
+    </p:spTree>
+    <p:extLst>
+      <p:ext uri="{BB962C8B-B14F-4D97-AF65-F5344CB8AC3E}">
+        <p14:creationId xmlns:p14="http://schemas.microsoft.com/office/powerpoint/2010/main" val="1024086991"/>
+      </p:ext>
+    </p:extLst>
+  </p:cSld>
+  <p:clrMapOvr>
+    <a:masterClrMapping/>
+  </p:clrMapOvr>
+</p:notes>
+</file>
+
+<file path=ppt/notesSlides/notesSlide15.xml><?xml version="1.0" encoding="utf-8"?>
+<p:notes xmlns:a="http://schemas.openxmlformats.org/drawingml/2006/main" xmlns:r="http://schemas.openxmlformats.org/officeDocument/2006/relationships" xmlns:p="http://schemas.openxmlformats.org/presentationml/2006/main">
+  <p:cSld>
+    <p:spTree>
+      <p:nvGrpSpPr>
+        <p:cNvPr id="1" name=""/>
+        <p:cNvGrpSpPr/>
+        <p:nvPr/>
+      </p:nvGrpSpPr>
+      <p:grpSpPr>
+        <a:xfrm>
+          <a:off x="0" y="0"/>
+          <a:ext cx="0" cy="0"/>
+          <a:chOff x="0" y="0"/>
+          <a:chExt cx="0" cy="0"/>
+        </a:xfrm>
+      </p:grpSpPr>
+      <p:sp>
+        <p:nvSpPr>
+          <p:cNvPr id="2" name="Slide Image Placeholder 1"/>
+          <p:cNvSpPr>
+            <a:spLocks noGrp="1" noRot="1" noChangeAspect="1"/>
+          </p:cNvSpPr>
+          <p:nvPr>
+            <p:ph type="sldImg"/>
+          </p:nvPr>
+        </p:nvSpPr>
+        <p:spPr/>
+      </p:sp>
+      <p:sp>
+        <p:nvSpPr>
+          <p:cNvPr id="3" name="Notes Placeholder 2"/>
+          <p:cNvSpPr>
+            <a:spLocks noGrp="1"/>
+          </p:cNvSpPr>
+          <p:nvPr>
+            <p:ph type="body" idx="1"/>
+          </p:nvPr>
+        </p:nvSpPr>
+        <p:spPr/>
+        <p:txBody>
+          <a:bodyPr/>
+          <a:lstStyle/>
+          <a:p>
+            <a:r>
+              <a:rPr lang="en-US" dirty="0"/>
+              <a:t>Students copy their score-screen breakdown onto the worksheet, then rate themselves here.</a:t>
+            </a:r>
+            <a:endParaRPr lang="en-US" dirty="0"/>
+          </a:p>
+        </p:txBody>
+      </p:sp>
+      <p:sp>
+        <p:nvSpPr>
+          <p:cNvPr id="4" name="Slide Number Placeholder 3"/>
+          <p:cNvSpPr>
+            <a:spLocks noGrp="1"/>
+          </p:cNvSpPr>
+          <p:nvPr>
+            <p:ph type="sldNum" sz="quarter" idx="10"/>
+          </p:nvPr>
+        </p:nvSpPr>
+        <p:spPr/>
+        <p:txBody>
+          <a:bodyPr/>
+          <a:lstStyle/>
+          <a:p>
+            <a:fld id="{F7021451-1387-4CA6-816F-3879F97B5CBC}" type="slidenum">
+              <a:rPr lang="en-US"/>
+              <a:t>15</a:t>
             </a:fld>
             <a:endParaRPr lang="en-US"/>
           </a:p>
@@ -2949,12 +3044,12 @@
         </p:nvSpPr>
         <p:spPr>
           <a:xfrm>
-            <a:off x="502920" y="438912"/>
-            <a:ext cx="3108960" cy="502920"/>
+            <a:off x="502920" y="457200"/>
+            <a:ext cx="1051560" cy="420624"/>
           </a:xfrm>
           <a:prstGeom prst="roundRect">
             <a:avLst>
-              <a:gd name="adj" fmla="val 18182"/>
+              <a:gd name="adj" fmla="val 21739"/>
             </a:avLst>
           </a:prstGeom>
           <a:solidFill>
@@ -2971,8 +3066,8 @@
         </p:nvSpPr>
         <p:spPr>
           <a:xfrm>
-            <a:off x="502920" y="438912"/>
-            <a:ext cx="3108960" cy="502920"/>
+            <a:off x="502920" y="457200"/>
+            <a:ext cx="1051560" cy="420624"/>
           </a:xfrm>
           <a:prstGeom prst="rect">
             <a:avLst/>
@@ -2988,7 +3083,7 @@
               <a:buNone/>
             </a:pPr>
             <a:r>
-              <a:rPr lang="en-US" sz="1300" b="1" dirty="0">
+              <a:rPr lang="en-US" sz="1200" b="1" dirty="0">
                 <a:solidFill>
                   <a:srgbClr val="101828"/>
                 </a:solidFill>
@@ -2996,9 +3091,9 @@
                 <a:ea typeface="IBM Plex Mono" pitchFamily="34" charset="-122"/>
                 <a:cs typeface="IBM Plex Mono" pitchFamily="34" charset="-120"/>
               </a:rPr>
-              <a:t>★  FINAL CHALLENGE</a:t>
-            </a:r>
-            <a:endParaRPr lang="en-US" sz="1300" dirty="0"/>
+              <a:t>CHECK</a:t>
+            </a:r>
+            <a:endParaRPr lang="en-US" sz="1200" dirty="0"/>
           </a:p>
         </p:txBody>
       </p:sp>
@@ -3010,8 +3105,8 @@
         </p:nvSpPr>
         <p:spPr>
           <a:xfrm>
-            <a:off x="502920" y="1097280"/>
-            <a:ext cx="11155680" cy="731520"/>
+            <a:off x="1737360" y="457200"/>
+            <a:ext cx="9875520" cy="420624"/>
           </a:xfrm>
           <a:prstGeom prst="rect">
             <a:avLst/>
@@ -3027,34 +3122,76 @@
               <a:buNone/>
             </a:pPr>
             <a:r>
-              <a:rPr lang="en-US" sz="3400" b="1" dirty="0">
-                <a:solidFill>
-                  <a:srgbClr val="101828"/>
+              <a:rPr lang="en-US" sz="1500" dirty="0">
+                <a:solidFill>
+                  <a:srgbClr val="667085"/>
                 </a:solidFill>
                 <a:latin typeface="IBM Plex Sans" pitchFamily="34" charset="0"/>
                 <a:ea typeface="IBM Plex Sans" pitchFamily="34" charset="-122"/>
                 <a:cs typeface="IBM Plex Sans" pitchFamily="34" charset="-120"/>
               </a:rPr>
-              <a:t>Fastest to slowest</a:t>
-            </a:r>
-            <a:endParaRPr lang="en-US" sz="3400" dirty="0"/>
-          </a:p>
-        </p:txBody>
-      </p:sp>
-      <p:sp>
-        <p:nvSpPr>
-          <p:cNvPr id="8" name="Shape 6"/>
+              <a:t>Hands down. Everyone commits.</a:t>
+            </a:r>
+            <a:endParaRPr lang="en-US" sz="1500" dirty="0"/>
+          </a:p>
+        </p:txBody>
+      </p:sp>
+      <p:sp>
+        <p:nvSpPr>
+          <p:cNvPr id="8" name="Text 6"/>
+          <p:cNvSpPr txBox="1"/>
+          <p:nvPr/>
+        </p:nvSpPr>
+        <p:spPr>
+          <a:xfrm>
+            <a:off x="502920" y="1097280"/>
+            <a:ext cx="11155680" cy="914400"/>
+          </a:xfrm>
+          <a:prstGeom prst="rect">
+            <a:avLst/>
+          </a:prstGeom>
+          <a:noFill/>
+          <a:ln/>
+        </p:spPr>
+        <p:txBody>
+          <a:bodyPr wrap="square" lIns="0" tIns="0" rIns="0" bIns="0" rtlCol="0" anchor="ctr"/>
+          <a:lstStyle/>
+          <a:p>
+            <a:pPr indent="0" marL="0">
+              <a:lnSpc>
+                <a:spcPct val="115000"/>
+              </a:lnSpc>
+              <a:buNone/>
+            </a:pPr>
+            <a:r>
+              <a:rPr lang="en-US" sz="2600" b="1" dirty="0">
+                <a:solidFill>
+                  <a:srgbClr val="101828"/>
+                </a:solidFill>
+                <a:latin typeface="IBM Plex Sans" pitchFamily="34" charset="0"/>
+                <a:ea typeface="IBM Plex Sans" pitchFamily="34" charset="-122"/>
+                <a:cs typeface="IBM Plex Sans" pitchFamily="34" charset="-120"/>
+              </a:rPr>
+              <a:t>What is a core?</a:t>
+            </a:r>
+            <a:endParaRPr lang="en-US" sz="2600" dirty="0"/>
+          </a:p>
+        </p:txBody>
+      </p:sp>
+      <p:sp>
+        <p:nvSpPr>
+          <p:cNvPr id="9" name="Shape 7"/>
           <p:cNvSpPr/>
           <p:nvPr/>
         </p:nvSpPr>
         <p:spPr>
           <a:xfrm>
-            <a:off x="502920" y="2011680"/>
-            <a:ext cx="11155680" cy="2194560"/>
+            <a:off x="502920" y="2148840"/>
+            <a:ext cx="11155680" cy="731520"/>
           </a:xfrm>
           <a:prstGeom prst="roundRect">
             <a:avLst>
-              <a:gd name="adj" fmla="val 5000"/>
+              <a:gd name="adj" fmla="val 15000"/>
             </a:avLst>
           </a:prstGeom>
           <a:solidFill>
@@ -3062,7 +3199,7 @@
           </a:solidFill>
           <a:ln w="15875">
             <a:solidFill>
-              <a:srgbClr val="2D63FF"/>
+              <a:srgbClr val="D9DEE7"/>
             </a:solidFill>
             <a:prstDash val="solid"/>
           </a:ln>
@@ -3070,14 +3207,75 @@
       </p:sp>
       <p:sp>
         <p:nvSpPr>
-          <p:cNvPr id="9" name="Text 7"/>
-          <p:cNvSpPr txBox="1"/>
-          <p:nvPr/>
-        </p:nvSpPr>
-        <p:spPr>
-          <a:xfrm>
-            <a:off x="1005840" y="2331720"/>
-            <a:ext cx="10149840" cy="1554480"/>
+          <p:cNvPr id="10" name="Shape 8"/>
+          <p:cNvSpPr/>
+          <p:nvPr/>
+        </p:nvSpPr>
+        <p:spPr>
+          <a:xfrm>
+            <a:off x="777240" y="2295144"/>
+            <a:ext cx="438912" cy="438912"/>
+          </a:xfrm>
+          <a:prstGeom prst="roundRect">
+            <a:avLst>
+              <a:gd name="adj" fmla="val 20833"/>
+            </a:avLst>
+          </a:prstGeom>
+          <a:solidFill>
+            <a:srgbClr val="EEF2FB"/>
+          </a:solidFill>
+          <a:ln/>
+        </p:spPr>
+      </p:sp>
+      <p:sp>
+        <p:nvSpPr>
+          <p:cNvPr id="11" name="Text 9"/>
+          <p:cNvSpPr txBox="1"/>
+          <p:nvPr/>
+        </p:nvSpPr>
+        <p:spPr>
+          <a:xfrm>
+            <a:off x="777240" y="2295144"/>
+            <a:ext cx="438912" cy="438912"/>
+          </a:xfrm>
+          <a:prstGeom prst="rect">
+            <a:avLst/>
+          </a:prstGeom>
+          <a:noFill/>
+          <a:ln/>
+        </p:spPr>
+        <p:txBody>
+          <a:bodyPr wrap="square" lIns="0" tIns="0" rIns="0" bIns="0" rtlCol="0" anchor="ctr"/>
+          <a:lstStyle/>
+          <a:p>
+            <a:pPr algn="ctr" indent="0" marL="0">
+              <a:buNone/>
+            </a:pPr>
+            <a:r>
+              <a:rPr lang="en-US" sz="1300" b="1" dirty="0">
+                <a:solidFill>
+                  <a:srgbClr val="2D63FF"/>
+                </a:solidFill>
+                <a:latin typeface="IBM Plex Mono" pitchFamily="34" charset="0"/>
+                <a:ea typeface="IBM Plex Mono" pitchFamily="34" charset="-122"/>
+                <a:cs typeface="IBM Plex Mono" pitchFamily="34" charset="-120"/>
+              </a:rPr>
+              <a:t>A</a:t>
+            </a:r>
+            <a:endParaRPr lang="en-US" sz="1300" dirty="0"/>
+          </a:p>
+        </p:txBody>
+      </p:sp>
+      <p:sp>
+        <p:nvSpPr>
+          <p:cNvPr id="12" name="Text 10"/>
+          <p:cNvSpPr txBox="1"/>
+          <p:nvPr/>
+        </p:nvSpPr>
+        <p:spPr>
+          <a:xfrm>
+            <a:off x="1417320" y="2148840"/>
+            <a:ext cx="10058400" cy="731520"/>
           </a:xfrm>
           <a:prstGeom prst="rect">
             <a:avLst/>
@@ -3091,12 +3289,12 @@
           <a:p>
             <a:pPr indent="0" marL="0">
               <a:lnSpc>
-                <a:spcPct val="130000"/>
+                <a:spcPct val="115000"/>
               </a:lnSpc>
               <a:buNone/>
             </a:pPr>
             <a:r>
-              <a:rPr lang="en-US" sz="2200" dirty="0">
+              <a:rPr lang="en-US" sz="1700" dirty="0">
                 <a:solidFill>
                   <a:srgbClr val="101828"/>
                 </a:solidFill>
@@ -3104,22 +3302,110 @@
                 <a:ea typeface="IBM Plex Sans" pitchFamily="34" charset="-122"/>
                 <a:cs typeface="IBM Plex Sans" pitchFamily="34" charset="-120"/>
               </a:rPr>
-              <a:t>Five processors are on the starting line. Put them in order, slowest first. Then explore the orange 3D models.</a:t>
-            </a:r>
-            <a:endParaRPr lang="en-US" sz="2200" dirty="0"/>
-          </a:p>
-        </p:txBody>
-      </p:sp>
-      <p:sp>
-        <p:nvSpPr>
-          <p:cNvPr id="10" name="Text 8"/>
-          <p:cNvSpPr txBox="1"/>
-          <p:nvPr/>
-        </p:nvSpPr>
-        <p:spPr>
-          <a:xfrm>
-            <a:off x="502920" y="4526280"/>
-            <a:ext cx="11155680" cy="457200"/>
+              <a:t>The centre of the hard drive</a:t>
+            </a:r>
+            <a:endParaRPr lang="en-US" sz="1700" dirty="0"/>
+          </a:p>
+        </p:txBody>
+      </p:sp>
+      <p:sp>
+        <p:nvSpPr>
+          <p:cNvPr id="13" name="Shape 11"/>
+          <p:cNvSpPr/>
+          <p:nvPr/>
+        </p:nvSpPr>
+        <p:spPr>
+          <a:xfrm>
+            <a:off x="502920" y="3017520"/>
+            <a:ext cx="11155680" cy="731520"/>
+          </a:xfrm>
+          <a:prstGeom prst="roundRect">
+            <a:avLst>
+              <a:gd name="adj" fmla="val 15000"/>
+            </a:avLst>
+          </a:prstGeom>
+          <a:solidFill>
+            <a:srgbClr val="FFFFFF"/>
+          </a:solidFill>
+          <a:ln w="15875">
+            <a:solidFill>
+              <a:srgbClr val="D9DEE7"/>
+            </a:solidFill>
+            <a:prstDash val="solid"/>
+          </a:ln>
+        </p:spPr>
+      </p:sp>
+      <p:sp>
+        <p:nvSpPr>
+          <p:cNvPr id="14" name="Shape 12"/>
+          <p:cNvSpPr/>
+          <p:nvPr/>
+        </p:nvSpPr>
+        <p:spPr>
+          <a:xfrm>
+            <a:off x="777240" y="3163824"/>
+            <a:ext cx="438912" cy="438912"/>
+          </a:xfrm>
+          <a:prstGeom prst="roundRect">
+            <a:avLst>
+              <a:gd name="adj" fmla="val 20833"/>
+            </a:avLst>
+          </a:prstGeom>
+          <a:solidFill>
+            <a:srgbClr val="EEF2FB"/>
+          </a:solidFill>
+          <a:ln/>
+        </p:spPr>
+      </p:sp>
+      <p:sp>
+        <p:nvSpPr>
+          <p:cNvPr id="15" name="Text 13"/>
+          <p:cNvSpPr txBox="1"/>
+          <p:nvPr/>
+        </p:nvSpPr>
+        <p:spPr>
+          <a:xfrm>
+            <a:off x="777240" y="3163824"/>
+            <a:ext cx="438912" cy="438912"/>
+          </a:xfrm>
+          <a:prstGeom prst="rect">
+            <a:avLst/>
+          </a:prstGeom>
+          <a:noFill/>
+          <a:ln/>
+        </p:spPr>
+        <p:txBody>
+          <a:bodyPr wrap="square" lIns="0" tIns="0" rIns="0" bIns="0" rtlCol="0" anchor="ctr"/>
+          <a:lstStyle/>
+          <a:p>
+            <a:pPr algn="ctr" indent="0" marL="0">
+              <a:buNone/>
+            </a:pPr>
+            <a:r>
+              <a:rPr lang="en-US" sz="1300" b="1" dirty="0">
+                <a:solidFill>
+                  <a:srgbClr val="2D63FF"/>
+                </a:solidFill>
+                <a:latin typeface="IBM Plex Mono" pitchFamily="34" charset="0"/>
+                <a:ea typeface="IBM Plex Mono" pitchFamily="34" charset="-122"/>
+                <a:cs typeface="IBM Plex Mono" pitchFamily="34" charset="-120"/>
+              </a:rPr>
+              <a:t>B</a:t>
+            </a:r>
+            <a:endParaRPr lang="en-US" sz="1300" dirty="0"/>
+          </a:p>
+        </p:txBody>
+      </p:sp>
+      <p:sp>
+        <p:nvSpPr>
+          <p:cNvPr id="16" name="Text 14"/>
+          <p:cNvSpPr txBox="1"/>
+          <p:nvPr/>
+        </p:nvSpPr>
+        <p:spPr>
+          <a:xfrm>
+            <a:off x="1417320" y="3017520"/>
+            <a:ext cx="10058400" cy="731520"/>
           </a:xfrm>
           <a:prstGeom prst="rect">
             <a:avLst/>
@@ -3132,20 +3418,283 @@
           <a:lstStyle/>
           <a:p>
             <a:pPr indent="0" marL="0">
-              <a:buNone/>
-            </a:pPr>
-            <a:r>
-              <a:rPr lang="en-US" sz="1600" dirty="0">
-                <a:solidFill>
-                  <a:srgbClr val="667085"/>
+              <a:lnSpc>
+                <a:spcPct val="115000"/>
+              </a:lnSpc>
+              <a:buNone/>
+            </a:pPr>
+            <a:r>
+              <a:rPr lang="en-US" sz="1700" dirty="0">
+                <a:solidFill>
+                  <a:srgbClr val="101828"/>
                 </a:solidFill>
                 <a:latin typeface="IBM Plex Sans" pitchFamily="34" charset="0"/>
                 <a:ea typeface="IBM Plex Sans" pitchFamily="34" charset="-122"/>
                 <a:cs typeface="IBM Plex Sans" pitchFamily="34" charset="-120"/>
               </a:rPr>
-              <a:t>Predict on paper first, then look down and test it.</a:t>
-            </a:r>
-            <a:endParaRPr lang="en-US" sz="1600" dirty="0"/>
+              <a:t>A cooling fan</a:t>
+            </a:r>
+            <a:endParaRPr lang="en-US" sz="1700" dirty="0"/>
+          </a:p>
+        </p:txBody>
+      </p:sp>
+      <p:sp>
+        <p:nvSpPr>
+          <p:cNvPr id="17" name="Shape 15"/>
+          <p:cNvSpPr/>
+          <p:nvPr/>
+        </p:nvSpPr>
+        <p:spPr>
+          <a:xfrm>
+            <a:off x="502920" y="3886200"/>
+            <a:ext cx="11155680" cy="731520"/>
+          </a:xfrm>
+          <a:prstGeom prst="roundRect">
+            <a:avLst>
+              <a:gd name="adj" fmla="val 15000"/>
+            </a:avLst>
+          </a:prstGeom>
+          <a:solidFill>
+            <a:srgbClr val="FFFFFF"/>
+          </a:solidFill>
+          <a:ln w="15875">
+            <a:solidFill>
+              <a:srgbClr val="D9DEE7"/>
+            </a:solidFill>
+            <a:prstDash val="solid"/>
+          </a:ln>
+        </p:spPr>
+      </p:sp>
+      <p:sp>
+        <p:nvSpPr>
+          <p:cNvPr id="18" name="Shape 16"/>
+          <p:cNvSpPr/>
+          <p:nvPr/>
+        </p:nvSpPr>
+        <p:spPr>
+          <a:xfrm>
+            <a:off x="777240" y="4032504"/>
+            <a:ext cx="438912" cy="438912"/>
+          </a:xfrm>
+          <a:prstGeom prst="roundRect">
+            <a:avLst>
+              <a:gd name="adj" fmla="val 20833"/>
+            </a:avLst>
+          </a:prstGeom>
+          <a:solidFill>
+            <a:srgbClr val="EEF2FB"/>
+          </a:solidFill>
+          <a:ln/>
+        </p:spPr>
+      </p:sp>
+      <p:sp>
+        <p:nvSpPr>
+          <p:cNvPr id="19" name="Text 17"/>
+          <p:cNvSpPr txBox="1"/>
+          <p:nvPr/>
+        </p:nvSpPr>
+        <p:spPr>
+          <a:xfrm>
+            <a:off x="777240" y="4032504"/>
+            <a:ext cx="438912" cy="438912"/>
+          </a:xfrm>
+          <a:prstGeom prst="rect">
+            <a:avLst/>
+          </a:prstGeom>
+          <a:noFill/>
+          <a:ln/>
+        </p:spPr>
+        <p:txBody>
+          <a:bodyPr wrap="square" lIns="0" tIns="0" rIns="0" bIns="0" rtlCol="0" anchor="ctr"/>
+          <a:lstStyle/>
+          <a:p>
+            <a:pPr algn="ctr" indent="0" marL="0">
+              <a:buNone/>
+            </a:pPr>
+            <a:r>
+              <a:rPr lang="en-US" sz="1300" b="1" dirty="0">
+                <a:solidFill>
+                  <a:srgbClr val="2D63FF"/>
+                </a:solidFill>
+                <a:latin typeface="IBM Plex Mono" pitchFamily="34" charset="0"/>
+                <a:ea typeface="IBM Plex Mono" pitchFamily="34" charset="-122"/>
+                <a:cs typeface="IBM Plex Mono" pitchFamily="34" charset="-120"/>
+              </a:rPr>
+              <a:t>C</a:t>
+            </a:r>
+            <a:endParaRPr lang="en-US" sz="1300" dirty="0"/>
+          </a:p>
+        </p:txBody>
+      </p:sp>
+      <p:sp>
+        <p:nvSpPr>
+          <p:cNvPr id="20" name="Text 18"/>
+          <p:cNvSpPr txBox="1"/>
+          <p:nvPr/>
+        </p:nvSpPr>
+        <p:spPr>
+          <a:xfrm>
+            <a:off x="1417320" y="3886200"/>
+            <a:ext cx="10058400" cy="731520"/>
+          </a:xfrm>
+          <a:prstGeom prst="rect">
+            <a:avLst/>
+          </a:prstGeom>
+          <a:noFill/>
+          <a:ln/>
+        </p:spPr>
+        <p:txBody>
+          <a:bodyPr wrap="square" lIns="0" tIns="0" rIns="0" bIns="0" rtlCol="0" anchor="ctr"/>
+          <a:lstStyle/>
+          <a:p>
+            <a:pPr indent="0" marL="0">
+              <a:lnSpc>
+                <a:spcPct val="115000"/>
+              </a:lnSpc>
+              <a:buNone/>
+            </a:pPr>
+            <a:r>
+              <a:rPr lang="en-US" sz="1700" dirty="0">
+                <a:solidFill>
+                  <a:srgbClr val="101828"/>
+                </a:solidFill>
+                <a:latin typeface="IBM Plex Sans" pitchFamily="34" charset="0"/>
+                <a:ea typeface="IBM Plex Sans" pitchFamily="34" charset="-122"/>
+                <a:cs typeface="IBM Plex Sans" pitchFamily="34" charset="-120"/>
+              </a:rPr>
+              <a:t>A processing unit that can fetch, decode and execute instructions independently</a:t>
+            </a:r>
+            <a:endParaRPr lang="en-US" sz="1700" dirty="0"/>
+          </a:p>
+        </p:txBody>
+      </p:sp>
+      <p:sp>
+        <p:nvSpPr>
+          <p:cNvPr id="21" name="Shape 19"/>
+          <p:cNvSpPr/>
+          <p:nvPr/>
+        </p:nvSpPr>
+        <p:spPr>
+          <a:xfrm>
+            <a:off x="502920" y="4754880"/>
+            <a:ext cx="11155680" cy="731520"/>
+          </a:xfrm>
+          <a:prstGeom prst="roundRect">
+            <a:avLst>
+              <a:gd name="adj" fmla="val 15000"/>
+            </a:avLst>
+          </a:prstGeom>
+          <a:solidFill>
+            <a:srgbClr val="FFFFFF"/>
+          </a:solidFill>
+          <a:ln w="15875">
+            <a:solidFill>
+              <a:srgbClr val="D9DEE7"/>
+            </a:solidFill>
+            <a:prstDash val="solid"/>
+          </a:ln>
+        </p:spPr>
+      </p:sp>
+      <p:sp>
+        <p:nvSpPr>
+          <p:cNvPr id="22" name="Shape 20"/>
+          <p:cNvSpPr/>
+          <p:nvPr/>
+        </p:nvSpPr>
+        <p:spPr>
+          <a:xfrm>
+            <a:off x="777240" y="4901184"/>
+            <a:ext cx="438912" cy="438912"/>
+          </a:xfrm>
+          <a:prstGeom prst="roundRect">
+            <a:avLst>
+              <a:gd name="adj" fmla="val 20833"/>
+            </a:avLst>
+          </a:prstGeom>
+          <a:solidFill>
+            <a:srgbClr val="EEF2FB"/>
+          </a:solidFill>
+          <a:ln/>
+        </p:spPr>
+      </p:sp>
+      <p:sp>
+        <p:nvSpPr>
+          <p:cNvPr id="23" name="Text 21"/>
+          <p:cNvSpPr txBox="1"/>
+          <p:nvPr/>
+        </p:nvSpPr>
+        <p:spPr>
+          <a:xfrm>
+            <a:off x="777240" y="4901184"/>
+            <a:ext cx="438912" cy="438912"/>
+          </a:xfrm>
+          <a:prstGeom prst="rect">
+            <a:avLst/>
+          </a:prstGeom>
+          <a:noFill/>
+          <a:ln/>
+        </p:spPr>
+        <p:txBody>
+          <a:bodyPr wrap="square" lIns="0" tIns="0" rIns="0" bIns="0" rtlCol="0" anchor="ctr"/>
+          <a:lstStyle/>
+          <a:p>
+            <a:pPr algn="ctr" indent="0" marL="0">
+              <a:buNone/>
+            </a:pPr>
+            <a:r>
+              <a:rPr lang="en-US" sz="1300" b="1" dirty="0">
+                <a:solidFill>
+                  <a:srgbClr val="2D63FF"/>
+                </a:solidFill>
+                <a:latin typeface="IBM Plex Mono" pitchFamily="34" charset="0"/>
+                <a:ea typeface="IBM Plex Mono" pitchFamily="34" charset="-122"/>
+                <a:cs typeface="IBM Plex Mono" pitchFamily="34" charset="-120"/>
+              </a:rPr>
+              <a:t>D</a:t>
+            </a:r>
+            <a:endParaRPr lang="en-US" sz="1300" dirty="0"/>
+          </a:p>
+        </p:txBody>
+      </p:sp>
+      <p:sp>
+        <p:nvSpPr>
+          <p:cNvPr id="24" name="Text 22"/>
+          <p:cNvSpPr txBox="1"/>
+          <p:nvPr/>
+        </p:nvSpPr>
+        <p:spPr>
+          <a:xfrm>
+            <a:off x="1417320" y="4754880"/>
+            <a:ext cx="10058400" cy="731520"/>
+          </a:xfrm>
+          <a:prstGeom prst="rect">
+            <a:avLst/>
+          </a:prstGeom>
+          <a:noFill/>
+          <a:ln/>
+        </p:spPr>
+        <p:txBody>
+          <a:bodyPr wrap="square" lIns="0" tIns="0" rIns="0" bIns="0" rtlCol="0" anchor="ctr"/>
+          <a:lstStyle/>
+          <a:p>
+            <a:pPr indent="0" marL="0">
+              <a:lnSpc>
+                <a:spcPct val="115000"/>
+              </a:lnSpc>
+              <a:buNone/>
+            </a:pPr>
+            <a:r>
+              <a:rPr lang="en-US" sz="1700" dirty="0">
+                <a:solidFill>
+                  <a:srgbClr val="101828"/>
+                </a:solidFill>
+                <a:latin typeface="IBM Plex Sans" pitchFamily="34" charset="0"/>
+                <a:ea typeface="IBM Plex Sans" pitchFamily="34" charset="-122"/>
+                <a:cs typeface="IBM Plex Sans" pitchFamily="34" charset="-120"/>
+              </a:rPr>
+              <a:t>A type of RAM</a:t>
+            </a:r>
+            <a:endParaRPr lang="en-US" sz="1700" dirty="0"/>
           </a:p>
         </p:txBody>
       </p:sp>
@@ -3281,14 +3830,75 @@
       </p:sp>
       <p:sp>
         <p:nvSpPr>
-          <p:cNvPr id="5" name="Text 3"/>
-          <p:cNvSpPr txBox="1"/>
-          <p:nvPr/>
-        </p:nvSpPr>
-        <p:spPr>
-          <a:xfrm>
-            <a:off x="502920" y="411480"/>
-            <a:ext cx="11155680" cy="777240"/>
+          <p:cNvPr id="5" name="Shape 3"/>
+          <p:cNvSpPr/>
+          <p:nvPr/>
+        </p:nvSpPr>
+        <p:spPr>
+          <a:xfrm>
+            <a:off x="502920" y="438912"/>
+            <a:ext cx="3108960" cy="502920"/>
+          </a:xfrm>
+          <a:prstGeom prst="roundRect">
+            <a:avLst>
+              <a:gd name="adj" fmla="val 18182"/>
+            </a:avLst>
+          </a:prstGeom>
+          <a:solidFill>
+            <a:srgbClr val="F4B942"/>
+          </a:solidFill>
+          <a:ln/>
+        </p:spPr>
+      </p:sp>
+      <p:sp>
+        <p:nvSpPr>
+          <p:cNvPr id="6" name="Text 4"/>
+          <p:cNvSpPr txBox="1"/>
+          <p:nvPr/>
+        </p:nvSpPr>
+        <p:spPr>
+          <a:xfrm>
+            <a:off x="502920" y="438912"/>
+            <a:ext cx="3108960" cy="502920"/>
+          </a:xfrm>
+          <a:prstGeom prst="rect">
+            <a:avLst/>
+          </a:prstGeom>
+          <a:noFill/>
+          <a:ln/>
+        </p:spPr>
+        <p:txBody>
+          <a:bodyPr wrap="square" lIns="0" tIns="0" rIns="0" bIns="0" rtlCol="0" anchor="ctr"/>
+          <a:lstStyle/>
+          <a:p>
+            <a:pPr algn="ctr" indent="0" marL="0">
+              <a:buNone/>
+            </a:pPr>
+            <a:r>
+              <a:rPr lang="en-US" sz="1300" b="1" dirty="0">
+                <a:solidFill>
+                  <a:srgbClr val="101828"/>
+                </a:solidFill>
+                <a:latin typeface="IBM Plex Mono" pitchFamily="34" charset="0"/>
+                <a:ea typeface="IBM Plex Mono" pitchFamily="34" charset="-122"/>
+                <a:cs typeface="IBM Plex Mono" pitchFamily="34" charset="-120"/>
+              </a:rPr>
+              <a:t>★  FINAL CHALLENGE</a:t>
+            </a:r>
+            <a:endParaRPr lang="en-US" sz="1300" dirty="0"/>
+          </a:p>
+        </p:txBody>
+      </p:sp>
+      <p:sp>
+        <p:nvSpPr>
+          <p:cNvPr id="7" name="Text 5"/>
+          <p:cNvSpPr txBox="1"/>
+          <p:nvPr/>
+        </p:nvSpPr>
+        <p:spPr>
+          <a:xfrm>
+            <a:off x="502920" y="1097280"/>
+            <a:ext cx="11155680" cy="731520"/>
           </a:xfrm>
           <a:prstGeom prst="rect">
             <a:avLst/>
@@ -3304,7 +3914,7 @@
               <a:buNone/>
             </a:pPr>
             <a:r>
-              <a:rPr lang="en-US" sz="3200" b="1" dirty="0">
+              <a:rPr lang="en-US" sz="3400" b="1" dirty="0">
                 <a:solidFill>
                   <a:srgbClr val="101828"/>
                 </a:solidFill>
@@ -3312,65 +3922,26 @@
                 <a:ea typeface="IBM Plex Sans" pitchFamily="34" charset="-122"/>
                 <a:cs typeface="IBM Plex Sans" pitchFamily="34" charset="-120"/>
               </a:rPr>
-              <a:t>Worth knowing</a:t>
-            </a:r>
-            <a:endParaRPr lang="en-US" sz="3200" dirty="0"/>
-          </a:p>
-        </p:txBody>
-      </p:sp>
-      <p:sp>
-        <p:nvSpPr>
-          <p:cNvPr id="6" name="Text 4"/>
-          <p:cNvSpPr txBox="1"/>
-          <p:nvPr/>
-        </p:nvSpPr>
-        <p:spPr>
-          <a:xfrm>
-            <a:off x="502920" y="1170432"/>
-            <a:ext cx="11155680" cy="411480"/>
-          </a:xfrm>
-          <a:prstGeom prst="rect">
-            <a:avLst/>
-          </a:prstGeom>
-          <a:noFill/>
-          <a:ln/>
-        </p:spPr>
-        <p:txBody>
-          <a:bodyPr wrap="square" lIns="0" tIns="0" rIns="0" bIns="0" rtlCol="0" anchor="ctr"/>
-          <a:lstStyle/>
-          <a:p>
-            <a:pPr indent="0" marL="0">
-              <a:buNone/>
-            </a:pPr>
-            <a:r>
-              <a:rPr lang="en-US" sz="1500" dirty="0">
-                <a:solidFill>
-                  <a:srgbClr val="667085"/>
-                </a:solidFill>
-                <a:latin typeface="IBM Plex Sans" pitchFamily="34" charset="0"/>
-                <a:ea typeface="IBM Plex Sans" pitchFamily="34" charset="-122"/>
-                <a:cs typeface="IBM Plex Sans" pitchFamily="34" charset="-120"/>
-              </a:rPr>
-              <a:t>The information markers dotted around the room</a:t>
-            </a:r>
-            <a:endParaRPr lang="en-US" sz="1500" dirty="0"/>
-          </a:p>
-        </p:txBody>
-      </p:sp>
-      <p:sp>
-        <p:nvSpPr>
-          <p:cNvPr id="7" name="Shape 5"/>
+              <a:t>Fastest to slowest</a:t>
+            </a:r>
+            <a:endParaRPr lang="en-US" sz="3400" dirty="0"/>
+          </a:p>
+        </p:txBody>
+      </p:sp>
+      <p:sp>
+        <p:nvSpPr>
+          <p:cNvPr id="8" name="Shape 6"/>
           <p:cNvSpPr/>
           <p:nvPr/>
         </p:nvSpPr>
         <p:spPr>
           <a:xfrm>
-            <a:off x="502920" y="1828800"/>
-            <a:ext cx="5394960" cy="1737360"/>
+            <a:off x="502920" y="2011680"/>
+            <a:ext cx="11155680" cy="2194560"/>
           </a:xfrm>
           <a:prstGeom prst="roundRect">
             <a:avLst>
-              <a:gd name="adj" fmla="val 6316"/>
+              <a:gd name="adj" fmla="val 5000"/>
             </a:avLst>
           </a:prstGeom>
           <a:solidFill>
@@ -3386,14 +3957,14 @@
       </p:sp>
       <p:sp>
         <p:nvSpPr>
-          <p:cNvPr id="8" name="Text 6"/>
-          <p:cNvSpPr txBox="1"/>
-          <p:nvPr/>
-        </p:nvSpPr>
-        <p:spPr>
-          <a:xfrm>
-            <a:off x="822960" y="2011680"/>
-            <a:ext cx="4754880" cy="365760"/>
+          <p:cNvPr id="9" name="Text 7"/>
+          <p:cNvSpPr txBox="1"/>
+          <p:nvPr/>
+        </p:nvSpPr>
+        <p:spPr>
+          <a:xfrm>
+            <a:off x="1005840" y="2331720"/>
+            <a:ext cx="10149840" cy="1554480"/>
           </a:xfrm>
           <a:prstGeom prst="rect">
             <a:avLst/>
@@ -3406,52 +3977,52 @@
           <a:lstStyle/>
           <a:p>
             <a:pPr indent="0" marL="0">
-              <a:buNone/>
-            </a:pPr>
-            <a:r>
-              <a:rPr lang="en-US" sz="1600" b="1" dirty="0">
-                <a:solidFill>
-                  <a:srgbClr val="2D63FF"/>
+              <a:lnSpc>
+                <a:spcPct val="130000"/>
+              </a:lnSpc>
+              <a:buNone/>
+            </a:pPr>
+            <a:r>
+              <a:rPr lang="en-US" sz="2200" dirty="0">
+                <a:solidFill>
+                  <a:srgbClr val="101828"/>
                 </a:solidFill>
                 <a:latin typeface="IBM Plex Sans" pitchFamily="34" charset="0"/>
                 <a:ea typeface="IBM Plex Sans" pitchFamily="34" charset="-122"/>
                 <a:cs typeface="IBM Plex Sans" pitchFamily="34" charset="-120"/>
               </a:rPr>
-              <a:t>Turbo boost</a:t>
-            </a:r>
-            <a:endParaRPr lang="en-US" sz="1600" dirty="0"/>
-          </a:p>
-        </p:txBody>
-      </p:sp>
-      <p:sp>
-        <p:nvSpPr>
-          <p:cNvPr id="9" name="Text 7"/>
-          <p:cNvSpPr txBox="1"/>
-          <p:nvPr/>
-        </p:nvSpPr>
-        <p:spPr>
-          <a:xfrm>
-            <a:off x="822960" y="2395728"/>
-            <a:ext cx="4754880" cy="1005840"/>
-          </a:xfrm>
-          <a:prstGeom prst="rect">
-            <a:avLst/>
-          </a:prstGeom>
-          <a:noFill/>
-          <a:ln/>
-        </p:spPr>
-        <p:txBody>
-          <a:bodyPr wrap="square" lIns="0" tIns="0" rIns="0" bIns="0" rtlCol="0" anchor="t"/>
+              <a:t>Five processors are on the starting line. Put them in order, slowest first. Then explore the orange 3D models.</a:t>
+            </a:r>
+            <a:endParaRPr lang="en-US" sz="2200" dirty="0"/>
+          </a:p>
+        </p:txBody>
+      </p:sp>
+      <p:sp>
+        <p:nvSpPr>
+          <p:cNvPr id="10" name="Text 8"/>
+          <p:cNvSpPr txBox="1"/>
+          <p:nvPr/>
+        </p:nvSpPr>
+        <p:spPr>
+          <a:xfrm>
+            <a:off x="502920" y="4526280"/>
+            <a:ext cx="11155680" cy="457200"/>
+          </a:xfrm>
+          <a:prstGeom prst="rect">
+            <a:avLst/>
+          </a:prstGeom>
+          <a:noFill/>
+          <a:ln/>
+        </p:spPr>
+        <p:txBody>
+          <a:bodyPr wrap="square" lIns="0" tIns="0" rIns="0" bIns="0" rtlCol="0" anchor="ctr"/>
           <a:lstStyle/>
           <a:p>
             <a:pPr indent="0" marL="0">
-              <a:lnSpc>
-                <a:spcPct val="120000"/>
-              </a:lnSpc>
-              <a:buNone/>
-            </a:pPr>
-            <a:r>
-              <a:rPr lang="en-US" sz="1300" dirty="0">
+              <a:buNone/>
+            </a:pPr>
+            <a:r>
+              <a:rPr lang="en-US" sz="1600" dirty="0">
                 <a:solidFill>
                   <a:srgbClr val="667085"/>
                 </a:solidFill>
@@ -3459,333 +4030,9 @@
                 <a:ea typeface="IBM Plex Sans" pitchFamily="34" charset="-122"/>
                 <a:cs typeface="IBM Plex Sans" pitchFamily="34" charset="-120"/>
               </a:rPr>
-              <a:t>Many CPUs speed themselves up automatically for short bursts when there's lots of work, then slow down again to stay cool.</a:t>
-            </a:r>
-            <a:endParaRPr lang="en-US" sz="1300" dirty="0"/>
-          </a:p>
-        </p:txBody>
-      </p:sp>
-      <p:sp>
-        <p:nvSpPr>
-          <p:cNvPr id="10" name="Shape 8"/>
-          <p:cNvSpPr/>
-          <p:nvPr/>
-        </p:nvSpPr>
-        <p:spPr>
-          <a:xfrm>
-            <a:off x="6217920" y="1828800"/>
-            <a:ext cx="5394960" cy="1737360"/>
-          </a:xfrm>
-          <a:prstGeom prst="roundRect">
-            <a:avLst>
-              <a:gd name="adj" fmla="val 6316"/>
-            </a:avLst>
-          </a:prstGeom>
-          <a:solidFill>
-            <a:srgbClr val="FFFFFF"/>
-          </a:solidFill>
-          <a:ln w="15875">
-            <a:solidFill>
-              <a:srgbClr val="08A6A6"/>
-            </a:solidFill>
-            <a:prstDash val="solid"/>
-          </a:ln>
-        </p:spPr>
-      </p:sp>
-      <p:sp>
-        <p:nvSpPr>
-          <p:cNvPr id="11" name="Text 9"/>
-          <p:cNvSpPr txBox="1"/>
-          <p:nvPr/>
-        </p:nvSpPr>
-        <p:spPr>
-          <a:xfrm>
-            <a:off x="6537960" y="2011680"/>
-            <a:ext cx="4754880" cy="365760"/>
-          </a:xfrm>
-          <a:prstGeom prst="rect">
-            <a:avLst/>
-          </a:prstGeom>
-          <a:noFill/>
-          <a:ln/>
-        </p:spPr>
-        <p:txBody>
-          <a:bodyPr wrap="square" lIns="0" tIns="0" rIns="0" bIns="0" rtlCol="0" anchor="ctr"/>
-          <a:lstStyle/>
-          <a:p>
-            <a:pPr indent="0" marL="0">
-              <a:buNone/>
-            </a:pPr>
-            <a:r>
-              <a:rPr lang="en-US" sz="1600" b="1" dirty="0">
-                <a:solidFill>
-                  <a:srgbClr val="08A6A6"/>
-                </a:solidFill>
-                <a:latin typeface="IBM Plex Sans" pitchFamily="34" charset="0"/>
-                <a:ea typeface="IBM Plex Sans" pitchFamily="34" charset="-122"/>
-                <a:cs typeface="IBM Plex Sans" pitchFamily="34" charset="-120"/>
-              </a:rPr>
-              <a:t>World records</a:t>
+              <a:t>Predict on paper first, then look down and test it.</a:t>
             </a:r>
             <a:endParaRPr lang="en-US" sz="1600" dirty="0"/>
-          </a:p>
-        </p:txBody>
-      </p:sp>
-      <p:sp>
-        <p:nvSpPr>
-          <p:cNvPr id="12" name="Text 10"/>
-          <p:cNvSpPr txBox="1"/>
-          <p:nvPr/>
-        </p:nvSpPr>
-        <p:spPr>
-          <a:xfrm>
-            <a:off x="6537960" y="2395728"/>
-            <a:ext cx="4754880" cy="1005840"/>
-          </a:xfrm>
-          <a:prstGeom prst="rect">
-            <a:avLst/>
-          </a:prstGeom>
-          <a:noFill/>
-          <a:ln/>
-        </p:spPr>
-        <p:txBody>
-          <a:bodyPr wrap="square" lIns="0" tIns="0" rIns="0" bIns="0" rtlCol="0" anchor="t"/>
-          <a:lstStyle/>
-          <a:p>
-            <a:pPr indent="0" marL="0">
-              <a:lnSpc>
-                <a:spcPct val="120000"/>
-              </a:lnSpc>
-              <a:buNone/>
-            </a:pPr>
-            <a:r>
-              <a:rPr lang="en-US" sz="1300" dirty="0">
-                <a:solidFill>
-                  <a:srgbClr val="667085"/>
-                </a:solidFill>
-                <a:latin typeface="IBM Plex Sans" pitchFamily="34" charset="0"/>
-                <a:ea typeface="IBM Plex Sans" pitchFamily="34" charset="-122"/>
-                <a:cs typeface="IBM Plex Sans" pitchFamily="34" charset="-120"/>
-              </a:rPr>
-              <a:t>Enthusiasts have overclocked CPUs past 9 GHz using liquid nitrogen to keep them cold, but only for a few minutes.</a:t>
-            </a:r>
-            <a:endParaRPr lang="en-US" sz="1300" dirty="0"/>
-          </a:p>
-        </p:txBody>
-      </p:sp>
-      <p:sp>
-        <p:nvSpPr>
-          <p:cNvPr id="13" name="Shape 11"/>
-          <p:cNvSpPr/>
-          <p:nvPr/>
-        </p:nvSpPr>
-        <p:spPr>
-          <a:xfrm>
-            <a:off x="502920" y="3794760"/>
-            <a:ext cx="5394960" cy="1737360"/>
-          </a:xfrm>
-          <a:prstGeom prst="roundRect">
-            <a:avLst>
-              <a:gd name="adj" fmla="val 6316"/>
-            </a:avLst>
-          </a:prstGeom>
-          <a:solidFill>
-            <a:srgbClr val="FFFFFF"/>
-          </a:solidFill>
-          <a:ln w="15875">
-            <a:solidFill>
-              <a:srgbClr val="2D63FF"/>
-            </a:solidFill>
-            <a:prstDash val="solid"/>
-          </a:ln>
-        </p:spPr>
-      </p:sp>
-      <p:sp>
-        <p:nvSpPr>
-          <p:cNvPr id="14" name="Text 12"/>
-          <p:cNvSpPr txBox="1"/>
-          <p:nvPr/>
-        </p:nvSpPr>
-        <p:spPr>
-          <a:xfrm>
-            <a:off x="822960" y="3977640"/>
-            <a:ext cx="4754880" cy="365760"/>
-          </a:xfrm>
-          <a:prstGeom prst="rect">
-            <a:avLst/>
-          </a:prstGeom>
-          <a:noFill/>
-          <a:ln/>
-        </p:spPr>
-        <p:txBody>
-          <a:bodyPr wrap="square" lIns="0" tIns="0" rIns="0" bIns="0" rtlCol="0" anchor="ctr"/>
-          <a:lstStyle/>
-          <a:p>
-            <a:pPr indent="0" marL="0">
-              <a:buNone/>
-            </a:pPr>
-            <a:r>
-              <a:rPr lang="en-US" sz="1600" b="1" dirty="0">
-                <a:solidFill>
-                  <a:srgbClr val="2D63FF"/>
-                </a:solidFill>
-                <a:latin typeface="IBM Plex Sans" pitchFamily="34" charset="0"/>
-                <a:ea typeface="IBM Plex Sans" pitchFamily="34" charset="-122"/>
-                <a:cs typeface="IBM Plex Sans" pitchFamily="34" charset="-120"/>
-              </a:rPr>
-              <a:t>Cache sizes</a:t>
-            </a:r>
-            <a:endParaRPr lang="en-US" sz="1600" dirty="0"/>
-          </a:p>
-        </p:txBody>
-      </p:sp>
-      <p:sp>
-        <p:nvSpPr>
-          <p:cNvPr id="15" name="Text 13"/>
-          <p:cNvSpPr txBox="1"/>
-          <p:nvPr/>
-        </p:nvSpPr>
-        <p:spPr>
-          <a:xfrm>
-            <a:off x="822960" y="4361688"/>
-            <a:ext cx="4754880" cy="1005840"/>
-          </a:xfrm>
-          <a:prstGeom prst="rect">
-            <a:avLst/>
-          </a:prstGeom>
-          <a:noFill/>
-          <a:ln/>
-        </p:spPr>
-        <p:txBody>
-          <a:bodyPr wrap="square" lIns="0" tIns="0" rIns="0" bIns="0" rtlCol="0" anchor="t"/>
-          <a:lstStyle/>
-          <a:p>
-            <a:pPr indent="0" marL="0">
-              <a:lnSpc>
-                <a:spcPct val="120000"/>
-              </a:lnSpc>
-              <a:buNone/>
-            </a:pPr>
-            <a:r>
-              <a:rPr lang="en-US" sz="1300" dirty="0">
-                <a:solidFill>
-                  <a:srgbClr val="667085"/>
-                </a:solidFill>
-                <a:latin typeface="IBM Plex Sans" pitchFamily="34" charset="0"/>
-                <a:ea typeface="IBM Plex Sans" pitchFamily="34" charset="-122"/>
-                <a:cs typeface="IBM Plex Sans" pitchFamily="34" charset="-120"/>
-              </a:rPr>
-              <a:t>Cache is measured in megabytes, while RAM is measured in gigabytes. Cache is tiny, but much faster.</a:t>
-            </a:r>
-            <a:endParaRPr lang="en-US" sz="1300" dirty="0"/>
-          </a:p>
-        </p:txBody>
-      </p:sp>
-      <p:sp>
-        <p:nvSpPr>
-          <p:cNvPr id="16" name="Shape 14"/>
-          <p:cNvSpPr/>
-          <p:nvPr/>
-        </p:nvSpPr>
-        <p:spPr>
-          <a:xfrm>
-            <a:off x="6217920" y="3794760"/>
-            <a:ext cx="5394960" cy="1737360"/>
-          </a:xfrm>
-          <a:prstGeom prst="roundRect">
-            <a:avLst>
-              <a:gd name="adj" fmla="val 6316"/>
-            </a:avLst>
-          </a:prstGeom>
-          <a:solidFill>
-            <a:srgbClr val="FFFFFF"/>
-          </a:solidFill>
-          <a:ln w="15875">
-            <a:solidFill>
-              <a:srgbClr val="08A6A6"/>
-            </a:solidFill>
-            <a:prstDash val="solid"/>
-          </a:ln>
-        </p:spPr>
-      </p:sp>
-      <p:sp>
-        <p:nvSpPr>
-          <p:cNvPr id="17" name="Text 15"/>
-          <p:cNvSpPr txBox="1"/>
-          <p:nvPr/>
-        </p:nvSpPr>
-        <p:spPr>
-          <a:xfrm>
-            <a:off x="6537960" y="3977640"/>
-            <a:ext cx="4754880" cy="365760"/>
-          </a:xfrm>
-          <a:prstGeom prst="rect">
-            <a:avLst/>
-          </a:prstGeom>
-          <a:noFill/>
-          <a:ln/>
-        </p:spPr>
-        <p:txBody>
-          <a:bodyPr wrap="square" lIns="0" tIns="0" rIns="0" bIns="0" rtlCol="0" anchor="ctr"/>
-          <a:lstStyle/>
-          <a:p>
-            <a:pPr indent="0" marL="0">
-              <a:buNone/>
-            </a:pPr>
-            <a:r>
-              <a:rPr lang="en-US" sz="1600" b="1" dirty="0">
-                <a:solidFill>
-                  <a:srgbClr val="08A6A6"/>
-                </a:solidFill>
-                <a:latin typeface="IBM Plex Sans" pitchFamily="34" charset="0"/>
-                <a:ea typeface="IBM Plex Sans" pitchFamily="34" charset="-122"/>
-                <a:cs typeface="IBM Plex Sans" pitchFamily="34" charset="-120"/>
-              </a:rPr>
-              <a:t>Phones have many cores</a:t>
-            </a:r>
-            <a:endParaRPr lang="en-US" sz="1600" dirty="0"/>
-          </a:p>
-        </p:txBody>
-      </p:sp>
-      <p:sp>
-        <p:nvSpPr>
-          <p:cNvPr id="18" name="Text 16"/>
-          <p:cNvSpPr txBox="1"/>
-          <p:nvPr/>
-        </p:nvSpPr>
-        <p:spPr>
-          <a:xfrm>
-            <a:off x="6537960" y="4361688"/>
-            <a:ext cx="4754880" cy="1005840"/>
-          </a:xfrm>
-          <a:prstGeom prst="rect">
-            <a:avLst/>
-          </a:prstGeom>
-          <a:noFill/>
-          <a:ln/>
-        </p:spPr>
-        <p:txBody>
-          <a:bodyPr wrap="square" lIns="0" tIns="0" rIns="0" bIns="0" rtlCol="0" anchor="t"/>
-          <a:lstStyle/>
-          <a:p>
-            <a:pPr indent="0" marL="0">
-              <a:lnSpc>
-                <a:spcPct val="120000"/>
-              </a:lnSpc>
-              <a:buNone/>
-            </a:pPr>
-            <a:r>
-              <a:rPr lang="en-US" sz="1300" dirty="0">
-                <a:solidFill>
-                  <a:srgbClr val="667085"/>
-                </a:solidFill>
-                <a:latin typeface="IBM Plex Sans" pitchFamily="34" charset="0"/>
-                <a:ea typeface="IBM Plex Sans" pitchFamily="34" charset="-122"/>
-                <a:cs typeface="IBM Plex Sans" pitchFamily="34" charset="-120"/>
-              </a:rPr>
-              <a:t>Many smartphones have eight cores: some powerful ones for games and some low-power ones to save battery.</a:t>
-            </a:r>
-            <a:endParaRPr lang="en-US" sz="1300" dirty="0"/>
           </a:p>
         </p:txBody>
       </p:sp>
@@ -3952,7 +4199,7 @@
                 <a:ea typeface="IBM Plex Sans" pitchFamily="34" charset="-122"/>
                 <a:cs typeface="IBM Plex Sans" pitchFamily="34" charset="-120"/>
               </a:rPr>
-              <a:t>Exam practice</a:t>
+              <a:t>Worth knowing</a:t>
             </a:r>
             <a:endParaRPr lang="en-US" sz="3200" dirty="0"/>
           </a:p>
@@ -3991,7 +4238,7 @@
                 <a:ea typeface="IBM Plex Sans" pitchFamily="34" charset="-122"/>
                 <a:cs typeface="IBM Plex Sans" pitchFamily="34" charset="-120"/>
               </a:rPr>
-              <a:t>Devices away. Answer from memory on the worksheet.</a:t>
+              <a:t>The information markers dotted around the room</a:t>
             </a:r>
             <a:endParaRPr lang="en-US" sz="1500" dirty="0"/>
           </a:p>
@@ -4006,11 +4253,11 @@
         <p:spPr>
           <a:xfrm>
             <a:off x="502920" y="1828800"/>
-            <a:ext cx="11155680" cy="1097280"/>
+            <a:ext cx="5394960" cy="1737360"/>
           </a:xfrm>
           <a:prstGeom prst="roundRect">
             <a:avLst>
-              <a:gd name="adj" fmla="val 10000"/>
+              <a:gd name="adj" fmla="val 6316"/>
             </a:avLst>
           </a:prstGeom>
           <a:solidFill>
@@ -4018,7 +4265,7 @@
           </a:solidFill>
           <a:ln w="15875">
             <a:solidFill>
-              <a:srgbClr val="D9DEE7"/>
+              <a:srgbClr val="2D63FF"/>
             </a:solidFill>
             <a:prstDash val="solid"/>
           </a:ln>
@@ -4032,8 +4279,8 @@
         </p:nvSpPr>
         <p:spPr>
           <a:xfrm>
-            <a:off x="914400" y="1938528"/>
-            <a:ext cx="9418320" cy="877824"/>
+            <a:off x="822960" y="2011680"/>
+            <a:ext cx="4754880" cy="365760"/>
           </a:xfrm>
           <a:prstGeom prst="rect">
             <a:avLst/>
@@ -4046,101 +4293,79 @@
           <a:lstStyle/>
           <a:p>
             <a:pPr indent="0" marL="0">
-              <a:lnSpc>
-                <a:spcPct val="118000"/>
-              </a:lnSpc>
-              <a:buNone/>
-            </a:pPr>
-            <a:r>
-              <a:rPr lang="en-US" sz="1700" dirty="0">
-                <a:solidFill>
-                  <a:srgbClr val="101828"/>
+              <a:buNone/>
+            </a:pPr>
+            <a:r>
+              <a:rPr lang="en-US" sz="1600" b="1" dirty="0">
+                <a:solidFill>
+                  <a:srgbClr val="2D63FF"/>
                 </a:solidFill>
                 <a:latin typeface="IBM Plex Sans" pitchFamily="34" charset="0"/>
                 <a:ea typeface="IBM Plex Sans" pitchFamily="34" charset="-122"/>
                 <a:cs typeface="IBM Plex Sans" pitchFamily="34" charset="-120"/>
               </a:rPr>
-              <a:t>State three characteristics of a CPU that affect its performance.</a:t>
-            </a:r>
-            <a:endParaRPr lang="en-US" sz="1700" dirty="0"/>
-          </a:p>
-        </p:txBody>
-      </p:sp>
-      <p:sp>
-        <p:nvSpPr>
-          <p:cNvPr id="9" name="Shape 7"/>
+              <a:t>Turbo boost</a:t>
+            </a:r>
+            <a:endParaRPr lang="en-US" sz="1600" dirty="0"/>
+          </a:p>
+        </p:txBody>
+      </p:sp>
+      <p:sp>
+        <p:nvSpPr>
+          <p:cNvPr id="9" name="Text 7"/>
+          <p:cNvSpPr txBox="1"/>
+          <p:nvPr/>
+        </p:nvSpPr>
+        <p:spPr>
+          <a:xfrm>
+            <a:off x="822960" y="2395728"/>
+            <a:ext cx="4754880" cy="1005840"/>
+          </a:xfrm>
+          <a:prstGeom prst="rect">
+            <a:avLst/>
+          </a:prstGeom>
+          <a:noFill/>
+          <a:ln/>
+        </p:spPr>
+        <p:txBody>
+          <a:bodyPr wrap="square" lIns="0" tIns="0" rIns="0" bIns="0" rtlCol="0" anchor="t"/>
+          <a:lstStyle/>
+          <a:p>
+            <a:pPr indent="0" marL="0">
+              <a:lnSpc>
+                <a:spcPct val="120000"/>
+              </a:lnSpc>
+              <a:buNone/>
+            </a:pPr>
+            <a:r>
+              <a:rPr lang="en-US" sz="1300" dirty="0">
+                <a:solidFill>
+                  <a:srgbClr val="667085"/>
+                </a:solidFill>
+                <a:latin typeface="IBM Plex Sans" pitchFamily="34" charset="0"/>
+                <a:ea typeface="IBM Plex Sans" pitchFamily="34" charset="-122"/>
+                <a:cs typeface="IBM Plex Sans" pitchFamily="34" charset="-120"/>
+              </a:rPr>
+              <a:t>Many CPUs speed themselves up automatically for short bursts when there's lots of work, then slow down again to stay cool.</a:t>
+            </a:r>
+            <a:endParaRPr lang="en-US" sz="1300" dirty="0"/>
+          </a:p>
+        </p:txBody>
+      </p:sp>
+      <p:sp>
+        <p:nvSpPr>
+          <p:cNvPr id="10" name="Shape 8"/>
           <p:cNvSpPr/>
           <p:nvPr/>
         </p:nvSpPr>
         <p:spPr>
           <a:xfrm>
-            <a:off x="10515600" y="2130552"/>
-            <a:ext cx="868680" cy="493776"/>
+            <a:off x="6217920" y="1828800"/>
+            <a:ext cx="5394960" cy="1737360"/>
           </a:xfrm>
           <a:prstGeom prst="roundRect">
             <a:avLst>
-              <a:gd name="adj" fmla="val 18519"/>
-            </a:avLst>
-          </a:prstGeom>
-          <a:solidFill>
-            <a:srgbClr val="EEF2FB"/>
-          </a:solidFill>
-          <a:ln/>
-        </p:spPr>
-      </p:sp>
-      <p:sp>
-        <p:nvSpPr>
-          <p:cNvPr id="10" name="Text 8"/>
-          <p:cNvSpPr txBox="1"/>
-          <p:nvPr/>
-        </p:nvSpPr>
-        <p:spPr>
-          <a:xfrm>
-            <a:off x="10515600" y="2130552"/>
-            <a:ext cx="868680" cy="493776"/>
-          </a:xfrm>
-          <a:prstGeom prst="rect">
-            <a:avLst/>
-          </a:prstGeom>
-          <a:noFill/>
-          <a:ln/>
-        </p:spPr>
-        <p:txBody>
-          <a:bodyPr wrap="square" lIns="0" tIns="0" rIns="0" bIns="0" rtlCol="0" anchor="ctr"/>
-          <a:lstStyle/>
-          <a:p>
-            <a:pPr algn="ctr" indent="0" marL="0">
-              <a:buNone/>
-            </a:pPr>
-            <a:r>
-              <a:rPr lang="en-US" sz="1500" b="1" dirty="0">
-                <a:solidFill>
-                  <a:srgbClr val="2D63FF"/>
-                </a:solidFill>
-                <a:latin typeface="IBM Plex Mono" pitchFamily="34" charset="0"/>
-                <a:ea typeface="IBM Plex Mono" pitchFamily="34" charset="-122"/>
-                <a:cs typeface="IBM Plex Mono" pitchFamily="34" charset="-120"/>
-              </a:rPr>
-              <a:t>[3]</a:t>
-            </a:r>
-            <a:endParaRPr lang="en-US" sz="1500" dirty="0"/>
-          </a:p>
-        </p:txBody>
-      </p:sp>
-      <p:sp>
-        <p:nvSpPr>
-          <p:cNvPr id="11" name="Shape 9"/>
-          <p:cNvSpPr/>
-          <p:nvPr/>
-        </p:nvSpPr>
-        <p:spPr>
-          <a:xfrm>
-            <a:off x="502920" y="3127248"/>
-            <a:ext cx="11155680" cy="1097280"/>
-          </a:xfrm>
-          <a:prstGeom prst="roundRect">
-            <a:avLst>
-              <a:gd name="adj" fmla="val 10000"/>
+              <a:gd name="adj" fmla="val 6316"/>
             </a:avLst>
           </a:prstGeom>
           <a:solidFill>
@@ -4148,7 +4373,7 @@
           </a:solidFill>
           <a:ln w="15875">
             <a:solidFill>
-              <a:srgbClr val="D9DEE7"/>
+              <a:srgbClr val="08A6A6"/>
             </a:solidFill>
             <a:prstDash val="solid"/>
           </a:ln>
@@ -4156,14 +4381,14 @@
       </p:sp>
       <p:sp>
         <p:nvSpPr>
-          <p:cNvPr id="12" name="Text 10"/>
-          <p:cNvSpPr txBox="1"/>
-          <p:nvPr/>
-        </p:nvSpPr>
-        <p:spPr>
-          <a:xfrm>
-            <a:off x="914400" y="3236976"/>
-            <a:ext cx="9418320" cy="877824"/>
+          <p:cNvPr id="11" name="Text 9"/>
+          <p:cNvSpPr txBox="1"/>
+          <p:nvPr/>
+        </p:nvSpPr>
+        <p:spPr>
+          <a:xfrm>
+            <a:off x="6537960" y="2011680"/>
+            <a:ext cx="4754880" cy="365760"/>
           </a:xfrm>
           <a:prstGeom prst="rect">
             <a:avLst/>
@@ -4176,23 +4401,62 @@
           <a:lstStyle/>
           <a:p>
             <a:pPr indent="0" marL="0">
-              <a:lnSpc>
-                <a:spcPct val="118000"/>
-              </a:lnSpc>
-              <a:buNone/>
-            </a:pPr>
-            <a:r>
-              <a:rPr lang="en-US" sz="1700" dirty="0">
-                <a:solidFill>
-                  <a:srgbClr val="101828"/>
+              <a:buNone/>
+            </a:pPr>
+            <a:r>
+              <a:rPr lang="en-US" sz="1600" b="1" dirty="0">
+                <a:solidFill>
+                  <a:srgbClr val="08A6A6"/>
                 </a:solidFill>
                 <a:latin typeface="IBM Plex Sans" pitchFamily="34" charset="0"/>
                 <a:ea typeface="IBM Plex Sans" pitchFamily="34" charset="-122"/>
                 <a:cs typeface="IBM Plex Sans" pitchFamily="34" charset="-120"/>
               </a:rPr>
-              <a:t>A laptop is advertised with a quad-core 3.2 GHz processor. Explain what this tells you about the CPU.</a:t>
-            </a:r>
-            <a:endParaRPr lang="en-US" sz="1700" dirty="0"/>
+              <a:t>World records</a:t>
+            </a:r>
+            <a:endParaRPr lang="en-US" sz="1600" dirty="0"/>
+          </a:p>
+        </p:txBody>
+      </p:sp>
+      <p:sp>
+        <p:nvSpPr>
+          <p:cNvPr id="12" name="Text 10"/>
+          <p:cNvSpPr txBox="1"/>
+          <p:nvPr/>
+        </p:nvSpPr>
+        <p:spPr>
+          <a:xfrm>
+            <a:off x="6537960" y="2395728"/>
+            <a:ext cx="4754880" cy="1005840"/>
+          </a:xfrm>
+          <a:prstGeom prst="rect">
+            <a:avLst/>
+          </a:prstGeom>
+          <a:noFill/>
+          <a:ln/>
+        </p:spPr>
+        <p:txBody>
+          <a:bodyPr wrap="square" lIns="0" tIns="0" rIns="0" bIns="0" rtlCol="0" anchor="t"/>
+          <a:lstStyle/>
+          <a:p>
+            <a:pPr indent="0" marL="0">
+              <a:lnSpc>
+                <a:spcPct val="120000"/>
+              </a:lnSpc>
+              <a:buNone/>
+            </a:pPr>
+            <a:r>
+              <a:rPr lang="en-US" sz="1300" dirty="0">
+                <a:solidFill>
+                  <a:srgbClr val="667085"/>
+                </a:solidFill>
+                <a:latin typeface="IBM Plex Sans" pitchFamily="34" charset="0"/>
+                <a:ea typeface="IBM Plex Sans" pitchFamily="34" charset="-122"/>
+                <a:cs typeface="IBM Plex Sans" pitchFamily="34" charset="-120"/>
+              </a:rPr>
+              <a:t>Enthusiasts have overclocked CPUs past 9 GHz using liquid nitrogen to keep them cold, but only for a few minutes.</a:t>
+            </a:r>
+            <a:endParaRPr lang="en-US" sz="1300" dirty="0"/>
           </a:p>
         </p:txBody>
       </p:sp>
@@ -4204,73 +4468,12 @@
         </p:nvSpPr>
         <p:spPr>
           <a:xfrm>
-            <a:off x="10515600" y="3429000"/>
-            <a:ext cx="868680" cy="493776"/>
+            <a:off x="502920" y="3794760"/>
+            <a:ext cx="5394960" cy="1737360"/>
           </a:xfrm>
           <a:prstGeom prst="roundRect">
             <a:avLst>
-              <a:gd name="adj" fmla="val 18519"/>
-            </a:avLst>
-          </a:prstGeom>
-          <a:solidFill>
-            <a:srgbClr val="EEF2FB"/>
-          </a:solidFill>
-          <a:ln/>
-        </p:spPr>
-      </p:sp>
-      <p:sp>
-        <p:nvSpPr>
-          <p:cNvPr id="14" name="Text 12"/>
-          <p:cNvSpPr txBox="1"/>
-          <p:nvPr/>
-        </p:nvSpPr>
-        <p:spPr>
-          <a:xfrm>
-            <a:off x="10515600" y="3429000"/>
-            <a:ext cx="868680" cy="493776"/>
-          </a:xfrm>
-          <a:prstGeom prst="rect">
-            <a:avLst/>
-          </a:prstGeom>
-          <a:noFill/>
-          <a:ln/>
-        </p:spPr>
-        <p:txBody>
-          <a:bodyPr wrap="square" lIns="0" tIns="0" rIns="0" bIns="0" rtlCol="0" anchor="ctr"/>
-          <a:lstStyle/>
-          <a:p>
-            <a:pPr algn="ctr" indent="0" marL="0">
-              <a:buNone/>
-            </a:pPr>
-            <a:r>
-              <a:rPr lang="en-US" sz="1500" b="1" dirty="0">
-                <a:solidFill>
-                  <a:srgbClr val="2D63FF"/>
-                </a:solidFill>
-                <a:latin typeface="IBM Plex Mono" pitchFamily="34" charset="0"/>
-                <a:ea typeface="IBM Plex Mono" pitchFamily="34" charset="-122"/>
-                <a:cs typeface="IBM Plex Mono" pitchFamily="34" charset="-120"/>
-              </a:rPr>
-              <a:t>[3]</a:t>
-            </a:r>
-            <a:endParaRPr lang="en-US" sz="1500" dirty="0"/>
-          </a:p>
-        </p:txBody>
-      </p:sp>
-      <p:sp>
-        <p:nvSpPr>
-          <p:cNvPr id="15" name="Shape 13"/>
-          <p:cNvSpPr/>
-          <p:nvPr/>
-        </p:nvSpPr>
-        <p:spPr>
-          <a:xfrm>
-            <a:off x="502920" y="4425696"/>
-            <a:ext cx="11155680" cy="1097280"/>
-          </a:xfrm>
-          <a:prstGeom prst="roundRect">
-            <a:avLst>
-              <a:gd name="adj" fmla="val 10000"/>
+              <a:gd name="adj" fmla="val 6316"/>
             </a:avLst>
           </a:prstGeom>
           <a:solidFill>
@@ -4278,7 +4481,7 @@
           </a:solidFill>
           <a:ln w="15875">
             <a:solidFill>
-              <a:srgbClr val="D9DEE7"/>
+              <a:srgbClr val="2D63FF"/>
             </a:solidFill>
             <a:prstDash val="solid"/>
           </a:ln>
@@ -4286,14 +4489,14 @@
       </p:sp>
       <p:sp>
         <p:nvSpPr>
-          <p:cNvPr id="16" name="Text 14"/>
-          <p:cNvSpPr txBox="1"/>
-          <p:nvPr/>
-        </p:nvSpPr>
-        <p:spPr>
-          <a:xfrm>
-            <a:off x="914400" y="4535424"/>
-            <a:ext cx="9418320" cy="877824"/>
+          <p:cNvPr id="14" name="Text 12"/>
+          <p:cNvSpPr txBox="1"/>
+          <p:nvPr/>
+        </p:nvSpPr>
+        <p:spPr>
+          <a:xfrm>
+            <a:off x="822960" y="3977640"/>
+            <a:ext cx="4754880" cy="365760"/>
           </a:xfrm>
           <a:prstGeom prst="rect">
             <a:avLst/>
@@ -4306,47 +4509,130 @@
           <a:lstStyle/>
           <a:p>
             <a:pPr indent="0" marL="0">
-              <a:lnSpc>
-                <a:spcPct val="118000"/>
-              </a:lnSpc>
-              <a:buNone/>
-            </a:pPr>
-            <a:r>
-              <a:rPr lang="en-US" sz="1700" dirty="0">
-                <a:solidFill>
-                  <a:srgbClr val="101828"/>
+              <a:buNone/>
+            </a:pPr>
+            <a:r>
+              <a:rPr lang="en-US" sz="1600" b="1" dirty="0">
+                <a:solidFill>
+                  <a:srgbClr val="2D63FF"/>
                 </a:solidFill>
                 <a:latin typeface="IBM Plex Sans" pitchFamily="34" charset="0"/>
                 <a:ea typeface="IBM Plex Sans" pitchFamily="34" charset="-122"/>
                 <a:cs typeface="IBM Plex Sans" pitchFamily="34" charset="-120"/>
               </a:rPr>
-              <a:t>A user edits video and finds their computer slow. Explain how each of the three characteristics could improve its performance.</a:t>
-            </a:r>
-            <a:endParaRPr lang="en-US" sz="1700" dirty="0"/>
-          </a:p>
-        </p:txBody>
-      </p:sp>
-      <p:sp>
-        <p:nvSpPr>
-          <p:cNvPr id="17" name="Shape 15"/>
+              <a:t>Cache sizes</a:t>
+            </a:r>
+            <a:endParaRPr lang="en-US" sz="1600" dirty="0"/>
+          </a:p>
+        </p:txBody>
+      </p:sp>
+      <p:sp>
+        <p:nvSpPr>
+          <p:cNvPr id="15" name="Text 13"/>
+          <p:cNvSpPr txBox="1"/>
+          <p:nvPr/>
+        </p:nvSpPr>
+        <p:spPr>
+          <a:xfrm>
+            <a:off x="822960" y="4361688"/>
+            <a:ext cx="4754880" cy="1005840"/>
+          </a:xfrm>
+          <a:prstGeom prst="rect">
+            <a:avLst/>
+          </a:prstGeom>
+          <a:noFill/>
+          <a:ln/>
+        </p:spPr>
+        <p:txBody>
+          <a:bodyPr wrap="square" lIns="0" tIns="0" rIns="0" bIns="0" rtlCol="0" anchor="t"/>
+          <a:lstStyle/>
+          <a:p>
+            <a:pPr indent="0" marL="0">
+              <a:lnSpc>
+                <a:spcPct val="120000"/>
+              </a:lnSpc>
+              <a:buNone/>
+            </a:pPr>
+            <a:r>
+              <a:rPr lang="en-US" sz="1300" dirty="0">
+                <a:solidFill>
+                  <a:srgbClr val="667085"/>
+                </a:solidFill>
+                <a:latin typeface="IBM Plex Sans" pitchFamily="34" charset="0"/>
+                <a:ea typeface="IBM Plex Sans" pitchFamily="34" charset="-122"/>
+                <a:cs typeface="IBM Plex Sans" pitchFamily="34" charset="-120"/>
+              </a:rPr>
+              <a:t>Cache is measured in megabytes, while RAM is measured in gigabytes. Cache is tiny, but much faster.</a:t>
+            </a:r>
+            <a:endParaRPr lang="en-US" sz="1300" dirty="0"/>
+          </a:p>
+        </p:txBody>
+      </p:sp>
+      <p:sp>
+        <p:nvSpPr>
+          <p:cNvPr id="16" name="Shape 14"/>
           <p:cNvSpPr/>
           <p:nvPr/>
         </p:nvSpPr>
         <p:spPr>
           <a:xfrm>
-            <a:off x="10515600" y="4727448"/>
-            <a:ext cx="868680" cy="493776"/>
+            <a:off x="6217920" y="3794760"/>
+            <a:ext cx="5394960" cy="1737360"/>
           </a:xfrm>
           <a:prstGeom prst="roundRect">
             <a:avLst>
-              <a:gd name="adj" fmla="val 18519"/>
+              <a:gd name="adj" fmla="val 6316"/>
             </a:avLst>
           </a:prstGeom>
           <a:solidFill>
-            <a:srgbClr val="EEF2FB"/>
+            <a:srgbClr val="FFFFFF"/>
           </a:solidFill>
-          <a:ln/>
-        </p:spPr>
+          <a:ln w="15875">
+            <a:solidFill>
+              <a:srgbClr val="08A6A6"/>
+            </a:solidFill>
+            <a:prstDash val="solid"/>
+          </a:ln>
+        </p:spPr>
+      </p:sp>
+      <p:sp>
+        <p:nvSpPr>
+          <p:cNvPr id="17" name="Text 15"/>
+          <p:cNvSpPr txBox="1"/>
+          <p:nvPr/>
+        </p:nvSpPr>
+        <p:spPr>
+          <a:xfrm>
+            <a:off x="6537960" y="3977640"/>
+            <a:ext cx="4754880" cy="365760"/>
+          </a:xfrm>
+          <a:prstGeom prst="rect">
+            <a:avLst/>
+          </a:prstGeom>
+          <a:noFill/>
+          <a:ln/>
+        </p:spPr>
+        <p:txBody>
+          <a:bodyPr wrap="square" lIns="0" tIns="0" rIns="0" bIns="0" rtlCol="0" anchor="ctr"/>
+          <a:lstStyle/>
+          <a:p>
+            <a:pPr indent="0" marL="0">
+              <a:buNone/>
+            </a:pPr>
+            <a:r>
+              <a:rPr lang="en-US" sz="1600" b="1" dirty="0">
+                <a:solidFill>
+                  <a:srgbClr val="08A6A6"/>
+                </a:solidFill>
+                <a:latin typeface="IBM Plex Sans" pitchFamily="34" charset="0"/>
+                <a:ea typeface="IBM Plex Sans" pitchFamily="34" charset="-122"/>
+                <a:cs typeface="IBM Plex Sans" pitchFamily="34" charset="-120"/>
+              </a:rPr>
+              <a:t>Phones have many cores</a:t>
+            </a:r>
+            <a:endParaRPr lang="en-US" sz="1600" dirty="0"/>
+          </a:p>
+        </p:txBody>
       </p:sp>
       <p:sp>
         <p:nvSpPr>
@@ -4356,34 +4642,37 @@
         </p:nvSpPr>
         <p:spPr>
           <a:xfrm>
-            <a:off x="10515600" y="4727448"/>
-            <a:ext cx="868680" cy="493776"/>
-          </a:xfrm>
-          <a:prstGeom prst="rect">
-            <a:avLst/>
-          </a:prstGeom>
-          <a:noFill/>
-          <a:ln/>
-        </p:spPr>
-        <p:txBody>
-          <a:bodyPr wrap="square" lIns="0" tIns="0" rIns="0" bIns="0" rtlCol="0" anchor="ctr"/>
-          <a:lstStyle/>
-          <a:p>
-            <a:pPr algn="ctr" indent="0" marL="0">
-              <a:buNone/>
-            </a:pPr>
-            <a:r>
-              <a:rPr lang="en-US" sz="1500" b="1" dirty="0">
-                <a:solidFill>
-                  <a:srgbClr val="2D63FF"/>
-                </a:solidFill>
-                <a:latin typeface="IBM Plex Mono" pitchFamily="34" charset="0"/>
-                <a:ea typeface="IBM Plex Mono" pitchFamily="34" charset="-122"/>
-                <a:cs typeface="IBM Plex Mono" pitchFamily="34" charset="-120"/>
-              </a:rPr>
-              <a:t>[6]</a:t>
-            </a:r>
-            <a:endParaRPr lang="en-US" sz="1500" dirty="0"/>
+            <a:off x="6537960" y="4361688"/>
+            <a:ext cx="4754880" cy="1005840"/>
+          </a:xfrm>
+          <a:prstGeom prst="rect">
+            <a:avLst/>
+          </a:prstGeom>
+          <a:noFill/>
+          <a:ln/>
+        </p:spPr>
+        <p:txBody>
+          <a:bodyPr wrap="square" lIns="0" tIns="0" rIns="0" bIns="0" rtlCol="0" anchor="t"/>
+          <a:lstStyle/>
+          <a:p>
+            <a:pPr indent="0" marL="0">
+              <a:lnSpc>
+                <a:spcPct val="120000"/>
+              </a:lnSpc>
+              <a:buNone/>
+            </a:pPr>
+            <a:r>
+              <a:rPr lang="en-US" sz="1300" dirty="0">
+                <a:solidFill>
+                  <a:srgbClr val="667085"/>
+                </a:solidFill>
+                <a:latin typeface="IBM Plex Sans" pitchFamily="34" charset="0"/>
+                <a:ea typeface="IBM Plex Sans" pitchFamily="34" charset="-122"/>
+                <a:cs typeface="IBM Plex Sans" pitchFamily="34" charset="-120"/>
+              </a:rPr>
+              <a:t>Many smartphones have eight cores: some powerful ones for games and some low-power ones to save battery.</a:t>
+            </a:r>
+            <a:endParaRPr lang="en-US" sz="1300" dirty="0"/>
           </a:p>
         </p:txBody>
       </p:sp>
@@ -4398,6 +4687,604 @@
 <file path=ppt/slides/slide14.xml><?xml version="1.0" encoding="utf-8"?>
 <p:sld xmlns:a="http://schemas.openxmlformats.org/drawingml/2006/main" xmlns:r="http://schemas.openxmlformats.org/officeDocument/2006/relationships" xmlns:p="http://schemas.openxmlformats.org/presentationml/2006/main">
   <p:cSld name="Slide 14">
+    <p:bg>
+      <p:bgPr>
+        <a:solidFill>
+          <a:srgbClr val="F7F7F4"/>
+        </a:solidFill>
+      </p:bgPr>
+    </p:bg>
+    <p:spTree>
+      <p:nvGrpSpPr>
+        <p:cNvPr id="1" name=""/>
+        <p:cNvGrpSpPr/>
+        <p:nvPr/>
+      </p:nvGrpSpPr>
+      <p:grpSpPr>
+        <a:xfrm>
+          <a:off x="0" y="0"/>
+          <a:ext cx="0" cy="0"/>
+          <a:chOff x="0" y="0"/>
+          <a:chExt cx="0" cy="0"/>
+        </a:xfrm>
+      </p:grpSpPr>
+      <p:sp>
+        <p:nvSpPr>
+          <p:cNvPr id="2" name="Shape 0"/>
+          <p:cNvSpPr/>
+          <p:nvPr/>
+        </p:nvSpPr>
+        <p:spPr>
+          <a:xfrm>
+            <a:off x="0" y="0"/>
+            <a:ext cx="12188952" cy="82296"/>
+          </a:xfrm>
+          <a:prstGeom prst="rect">
+            <a:avLst/>
+          </a:prstGeom>
+          <a:solidFill>
+            <a:srgbClr val="2D63FF"/>
+          </a:solidFill>
+          <a:ln/>
+        </p:spPr>
+      </p:sp>
+      <p:sp>
+        <p:nvSpPr>
+          <p:cNvPr id="3" name="Text 1"/>
+          <p:cNvSpPr txBox="1"/>
+          <p:nvPr/>
+        </p:nvSpPr>
+        <p:spPr>
+          <a:xfrm>
+            <a:off x="502920" y="6236208"/>
+            <a:ext cx="7772400" cy="365760"/>
+          </a:xfrm>
+          <a:prstGeom prst="rect">
+            <a:avLst/>
+          </a:prstGeom>
+          <a:noFill/>
+          <a:ln/>
+        </p:spPr>
+        <p:txBody>
+          <a:bodyPr wrap="square" lIns="0" tIns="0" rIns="0" bIns="0" rtlCol="0" anchor="ctr"/>
+          <a:lstStyle/>
+          <a:p>
+            <a:pPr indent="0" marL="0">
+              <a:buNone/>
+            </a:pPr>
+            <a:r>
+              <a:rPr lang="en-US" sz="1100" dirty="0">
+                <a:solidFill>
+                  <a:srgbClr val="667085"/>
+                </a:solidFill>
+                <a:latin typeface="IBM Plex Mono" pitchFamily="34" charset="0"/>
+                <a:ea typeface="IBM Plex Mono" pitchFamily="34" charset="-122"/>
+                <a:cs typeface="IBM Plex Mono" pitchFamily="34" charset="-120"/>
+              </a:rPr>
+              <a:t>1.1 Systems architecture  |  Lesson 3</a:t>
+            </a:r>
+            <a:endParaRPr lang="en-US" sz="1100" dirty="0"/>
+          </a:p>
+        </p:txBody>
+      </p:sp>
+      <p:sp>
+        <p:nvSpPr>
+          <p:cNvPr id="4" name="Text 2"/>
+          <p:cNvSpPr txBox="1"/>
+          <p:nvPr/>
+        </p:nvSpPr>
+        <p:spPr>
+          <a:xfrm>
+            <a:off x="9326880" y="6236208"/>
+            <a:ext cx="2377440" cy="365760"/>
+          </a:xfrm>
+          <a:prstGeom prst="rect">
+            <a:avLst/>
+          </a:prstGeom>
+          <a:noFill/>
+          <a:ln/>
+        </p:spPr>
+        <p:txBody>
+          <a:bodyPr wrap="square" lIns="0" tIns="0" rIns="0" bIns="0" rtlCol="0" anchor="ctr"/>
+          <a:lstStyle/>
+          <a:p>
+            <a:pPr algn="r" indent="0" marL="0">
+              <a:buNone/>
+            </a:pPr>
+            <a:r>
+              <a:rPr lang="en-US" sz="1100" dirty="0">
+                <a:solidFill>
+                  <a:srgbClr val="667085"/>
+                </a:solidFill>
+                <a:latin typeface="IBM Plex Mono" pitchFamily="34" charset="0"/>
+                <a:ea typeface="IBM Plex Mono" pitchFamily="34" charset="-122"/>
+                <a:cs typeface="IBM Plex Mono" pitchFamily="34" charset="-120"/>
+              </a:rPr>
+              <a:t>Revise 360</a:t>
+            </a:r>
+            <a:endParaRPr lang="en-US" sz="1100" dirty="0"/>
+          </a:p>
+        </p:txBody>
+      </p:sp>
+      <p:sp>
+        <p:nvSpPr>
+          <p:cNvPr id="5" name="Text 3"/>
+          <p:cNvSpPr txBox="1"/>
+          <p:nvPr/>
+        </p:nvSpPr>
+        <p:spPr>
+          <a:xfrm>
+            <a:off x="502920" y="411480"/>
+            <a:ext cx="11155680" cy="777240"/>
+          </a:xfrm>
+          <a:prstGeom prst="rect">
+            <a:avLst/>
+          </a:prstGeom>
+          <a:noFill/>
+          <a:ln/>
+        </p:spPr>
+        <p:txBody>
+          <a:bodyPr wrap="square" lIns="0" tIns="0" rIns="0" bIns="0" rtlCol="0" anchor="ctr"/>
+          <a:lstStyle/>
+          <a:p>
+            <a:pPr indent="0" marL="0">
+              <a:buNone/>
+            </a:pPr>
+            <a:r>
+              <a:rPr lang="en-US" sz="3200" b="1" dirty="0">
+                <a:solidFill>
+                  <a:srgbClr val="101828"/>
+                </a:solidFill>
+                <a:latin typeface="IBM Plex Sans" pitchFamily="34" charset="0"/>
+                <a:ea typeface="IBM Plex Sans" pitchFamily="34" charset="-122"/>
+                <a:cs typeface="IBM Plex Sans" pitchFamily="34" charset="-120"/>
+              </a:rPr>
+              <a:t>Exam practice</a:t>
+            </a:r>
+            <a:endParaRPr lang="en-US" sz="3200" dirty="0"/>
+          </a:p>
+        </p:txBody>
+      </p:sp>
+      <p:sp>
+        <p:nvSpPr>
+          <p:cNvPr id="6" name="Text 4"/>
+          <p:cNvSpPr txBox="1"/>
+          <p:nvPr/>
+        </p:nvSpPr>
+        <p:spPr>
+          <a:xfrm>
+            <a:off x="502920" y="1170432"/>
+            <a:ext cx="11155680" cy="411480"/>
+          </a:xfrm>
+          <a:prstGeom prst="rect">
+            <a:avLst/>
+          </a:prstGeom>
+          <a:noFill/>
+          <a:ln/>
+        </p:spPr>
+        <p:txBody>
+          <a:bodyPr wrap="square" lIns="0" tIns="0" rIns="0" bIns="0" rtlCol="0" anchor="ctr"/>
+          <a:lstStyle/>
+          <a:p>
+            <a:pPr indent="0" marL="0">
+              <a:buNone/>
+            </a:pPr>
+            <a:r>
+              <a:rPr lang="en-US" sz="1500" dirty="0">
+                <a:solidFill>
+                  <a:srgbClr val="667085"/>
+                </a:solidFill>
+                <a:latin typeface="IBM Plex Sans" pitchFamily="34" charset="0"/>
+                <a:ea typeface="IBM Plex Sans" pitchFamily="34" charset="-122"/>
+                <a:cs typeface="IBM Plex Sans" pitchFamily="34" charset="-120"/>
+              </a:rPr>
+              <a:t>Devices away. Answer from memory on the worksheet.</a:t>
+            </a:r>
+            <a:endParaRPr lang="en-US" sz="1500" dirty="0"/>
+          </a:p>
+        </p:txBody>
+      </p:sp>
+      <p:sp>
+        <p:nvSpPr>
+          <p:cNvPr id="7" name="Shape 5"/>
+          <p:cNvSpPr/>
+          <p:nvPr/>
+        </p:nvSpPr>
+        <p:spPr>
+          <a:xfrm>
+            <a:off x="502920" y="1828800"/>
+            <a:ext cx="11155680" cy="1097280"/>
+          </a:xfrm>
+          <a:prstGeom prst="roundRect">
+            <a:avLst>
+              <a:gd name="adj" fmla="val 10000"/>
+            </a:avLst>
+          </a:prstGeom>
+          <a:solidFill>
+            <a:srgbClr val="FFFFFF"/>
+          </a:solidFill>
+          <a:ln w="15875">
+            <a:solidFill>
+              <a:srgbClr val="D9DEE7"/>
+            </a:solidFill>
+            <a:prstDash val="solid"/>
+          </a:ln>
+        </p:spPr>
+      </p:sp>
+      <p:sp>
+        <p:nvSpPr>
+          <p:cNvPr id="8" name="Text 6"/>
+          <p:cNvSpPr txBox="1"/>
+          <p:nvPr/>
+        </p:nvSpPr>
+        <p:spPr>
+          <a:xfrm>
+            <a:off x="914400" y="1938528"/>
+            <a:ext cx="9418320" cy="877824"/>
+          </a:xfrm>
+          <a:prstGeom prst="rect">
+            <a:avLst/>
+          </a:prstGeom>
+          <a:noFill/>
+          <a:ln/>
+        </p:spPr>
+        <p:txBody>
+          <a:bodyPr wrap="square" lIns="0" tIns="0" rIns="0" bIns="0" rtlCol="0" anchor="ctr"/>
+          <a:lstStyle/>
+          <a:p>
+            <a:pPr indent="0" marL="0">
+              <a:lnSpc>
+                <a:spcPct val="118000"/>
+              </a:lnSpc>
+              <a:buNone/>
+            </a:pPr>
+            <a:r>
+              <a:rPr lang="en-US" sz="1700" dirty="0">
+                <a:solidFill>
+                  <a:srgbClr val="101828"/>
+                </a:solidFill>
+                <a:latin typeface="IBM Plex Sans" pitchFamily="34" charset="0"/>
+                <a:ea typeface="IBM Plex Sans" pitchFamily="34" charset="-122"/>
+                <a:cs typeface="IBM Plex Sans" pitchFamily="34" charset="-120"/>
+              </a:rPr>
+              <a:t>State three characteristics of a CPU that affect its performance.</a:t>
+            </a:r>
+            <a:endParaRPr lang="en-US" sz="1700" dirty="0"/>
+          </a:p>
+        </p:txBody>
+      </p:sp>
+      <p:sp>
+        <p:nvSpPr>
+          <p:cNvPr id="9" name="Shape 7"/>
+          <p:cNvSpPr/>
+          <p:nvPr/>
+        </p:nvSpPr>
+        <p:spPr>
+          <a:xfrm>
+            <a:off x="10515600" y="2130552"/>
+            <a:ext cx="868680" cy="493776"/>
+          </a:xfrm>
+          <a:prstGeom prst="roundRect">
+            <a:avLst>
+              <a:gd name="adj" fmla="val 18519"/>
+            </a:avLst>
+          </a:prstGeom>
+          <a:solidFill>
+            <a:srgbClr val="EEF2FB"/>
+          </a:solidFill>
+          <a:ln/>
+        </p:spPr>
+      </p:sp>
+      <p:sp>
+        <p:nvSpPr>
+          <p:cNvPr id="10" name="Text 8"/>
+          <p:cNvSpPr txBox="1"/>
+          <p:nvPr/>
+        </p:nvSpPr>
+        <p:spPr>
+          <a:xfrm>
+            <a:off x="10515600" y="2130552"/>
+            <a:ext cx="868680" cy="493776"/>
+          </a:xfrm>
+          <a:prstGeom prst="rect">
+            <a:avLst/>
+          </a:prstGeom>
+          <a:noFill/>
+          <a:ln/>
+        </p:spPr>
+        <p:txBody>
+          <a:bodyPr wrap="square" lIns="0" tIns="0" rIns="0" bIns="0" rtlCol="0" anchor="ctr"/>
+          <a:lstStyle/>
+          <a:p>
+            <a:pPr algn="ctr" indent="0" marL="0">
+              <a:buNone/>
+            </a:pPr>
+            <a:r>
+              <a:rPr lang="en-US" sz="1500" b="1" dirty="0">
+                <a:solidFill>
+                  <a:srgbClr val="2D63FF"/>
+                </a:solidFill>
+                <a:latin typeface="IBM Plex Mono" pitchFamily="34" charset="0"/>
+                <a:ea typeface="IBM Plex Mono" pitchFamily="34" charset="-122"/>
+                <a:cs typeface="IBM Plex Mono" pitchFamily="34" charset="-120"/>
+              </a:rPr>
+              <a:t>[3]</a:t>
+            </a:r>
+            <a:endParaRPr lang="en-US" sz="1500" dirty="0"/>
+          </a:p>
+        </p:txBody>
+      </p:sp>
+      <p:sp>
+        <p:nvSpPr>
+          <p:cNvPr id="11" name="Shape 9"/>
+          <p:cNvSpPr/>
+          <p:nvPr/>
+        </p:nvSpPr>
+        <p:spPr>
+          <a:xfrm>
+            <a:off x="502920" y="3127248"/>
+            <a:ext cx="11155680" cy="1097280"/>
+          </a:xfrm>
+          <a:prstGeom prst="roundRect">
+            <a:avLst>
+              <a:gd name="adj" fmla="val 10000"/>
+            </a:avLst>
+          </a:prstGeom>
+          <a:solidFill>
+            <a:srgbClr val="FFFFFF"/>
+          </a:solidFill>
+          <a:ln w="15875">
+            <a:solidFill>
+              <a:srgbClr val="D9DEE7"/>
+            </a:solidFill>
+            <a:prstDash val="solid"/>
+          </a:ln>
+        </p:spPr>
+      </p:sp>
+      <p:sp>
+        <p:nvSpPr>
+          <p:cNvPr id="12" name="Text 10"/>
+          <p:cNvSpPr txBox="1"/>
+          <p:nvPr/>
+        </p:nvSpPr>
+        <p:spPr>
+          <a:xfrm>
+            <a:off x="914400" y="3236976"/>
+            <a:ext cx="9418320" cy="877824"/>
+          </a:xfrm>
+          <a:prstGeom prst="rect">
+            <a:avLst/>
+          </a:prstGeom>
+          <a:noFill/>
+          <a:ln/>
+        </p:spPr>
+        <p:txBody>
+          <a:bodyPr wrap="square" lIns="0" tIns="0" rIns="0" bIns="0" rtlCol="0" anchor="ctr"/>
+          <a:lstStyle/>
+          <a:p>
+            <a:pPr indent="0" marL="0">
+              <a:lnSpc>
+                <a:spcPct val="118000"/>
+              </a:lnSpc>
+              <a:buNone/>
+            </a:pPr>
+            <a:r>
+              <a:rPr lang="en-US" sz="1700" dirty="0">
+                <a:solidFill>
+                  <a:srgbClr val="101828"/>
+                </a:solidFill>
+                <a:latin typeface="IBM Plex Sans" pitchFamily="34" charset="0"/>
+                <a:ea typeface="IBM Plex Sans" pitchFamily="34" charset="-122"/>
+                <a:cs typeface="IBM Plex Sans" pitchFamily="34" charset="-120"/>
+              </a:rPr>
+              <a:t>A laptop is advertised with a quad-core 3.2 GHz processor. Explain what this tells you about the CPU.</a:t>
+            </a:r>
+            <a:endParaRPr lang="en-US" sz="1700" dirty="0"/>
+          </a:p>
+        </p:txBody>
+      </p:sp>
+      <p:sp>
+        <p:nvSpPr>
+          <p:cNvPr id="13" name="Shape 11"/>
+          <p:cNvSpPr/>
+          <p:nvPr/>
+        </p:nvSpPr>
+        <p:spPr>
+          <a:xfrm>
+            <a:off x="10515600" y="3429000"/>
+            <a:ext cx="868680" cy="493776"/>
+          </a:xfrm>
+          <a:prstGeom prst="roundRect">
+            <a:avLst>
+              <a:gd name="adj" fmla="val 18519"/>
+            </a:avLst>
+          </a:prstGeom>
+          <a:solidFill>
+            <a:srgbClr val="EEF2FB"/>
+          </a:solidFill>
+          <a:ln/>
+        </p:spPr>
+      </p:sp>
+      <p:sp>
+        <p:nvSpPr>
+          <p:cNvPr id="14" name="Text 12"/>
+          <p:cNvSpPr txBox="1"/>
+          <p:nvPr/>
+        </p:nvSpPr>
+        <p:spPr>
+          <a:xfrm>
+            <a:off x="10515600" y="3429000"/>
+            <a:ext cx="868680" cy="493776"/>
+          </a:xfrm>
+          <a:prstGeom prst="rect">
+            <a:avLst/>
+          </a:prstGeom>
+          <a:noFill/>
+          <a:ln/>
+        </p:spPr>
+        <p:txBody>
+          <a:bodyPr wrap="square" lIns="0" tIns="0" rIns="0" bIns="0" rtlCol="0" anchor="ctr"/>
+          <a:lstStyle/>
+          <a:p>
+            <a:pPr algn="ctr" indent="0" marL="0">
+              <a:buNone/>
+            </a:pPr>
+            <a:r>
+              <a:rPr lang="en-US" sz="1500" b="1" dirty="0">
+                <a:solidFill>
+                  <a:srgbClr val="2D63FF"/>
+                </a:solidFill>
+                <a:latin typeface="IBM Plex Mono" pitchFamily="34" charset="0"/>
+                <a:ea typeface="IBM Plex Mono" pitchFamily="34" charset="-122"/>
+                <a:cs typeface="IBM Plex Mono" pitchFamily="34" charset="-120"/>
+              </a:rPr>
+              <a:t>[3]</a:t>
+            </a:r>
+            <a:endParaRPr lang="en-US" sz="1500" dirty="0"/>
+          </a:p>
+        </p:txBody>
+      </p:sp>
+      <p:sp>
+        <p:nvSpPr>
+          <p:cNvPr id="15" name="Shape 13"/>
+          <p:cNvSpPr/>
+          <p:nvPr/>
+        </p:nvSpPr>
+        <p:spPr>
+          <a:xfrm>
+            <a:off x="502920" y="4425696"/>
+            <a:ext cx="11155680" cy="1097280"/>
+          </a:xfrm>
+          <a:prstGeom prst="roundRect">
+            <a:avLst>
+              <a:gd name="adj" fmla="val 10000"/>
+            </a:avLst>
+          </a:prstGeom>
+          <a:solidFill>
+            <a:srgbClr val="FFFFFF"/>
+          </a:solidFill>
+          <a:ln w="15875">
+            <a:solidFill>
+              <a:srgbClr val="D9DEE7"/>
+            </a:solidFill>
+            <a:prstDash val="solid"/>
+          </a:ln>
+        </p:spPr>
+      </p:sp>
+      <p:sp>
+        <p:nvSpPr>
+          <p:cNvPr id="16" name="Text 14"/>
+          <p:cNvSpPr txBox="1"/>
+          <p:nvPr/>
+        </p:nvSpPr>
+        <p:spPr>
+          <a:xfrm>
+            <a:off x="914400" y="4535424"/>
+            <a:ext cx="9418320" cy="877824"/>
+          </a:xfrm>
+          <a:prstGeom prst="rect">
+            <a:avLst/>
+          </a:prstGeom>
+          <a:noFill/>
+          <a:ln/>
+        </p:spPr>
+        <p:txBody>
+          <a:bodyPr wrap="square" lIns="0" tIns="0" rIns="0" bIns="0" rtlCol="0" anchor="ctr"/>
+          <a:lstStyle/>
+          <a:p>
+            <a:pPr indent="0" marL="0">
+              <a:lnSpc>
+                <a:spcPct val="118000"/>
+              </a:lnSpc>
+              <a:buNone/>
+            </a:pPr>
+            <a:r>
+              <a:rPr lang="en-US" sz="1700" dirty="0">
+                <a:solidFill>
+                  <a:srgbClr val="101828"/>
+                </a:solidFill>
+                <a:latin typeface="IBM Plex Sans" pitchFamily="34" charset="0"/>
+                <a:ea typeface="IBM Plex Sans" pitchFamily="34" charset="-122"/>
+                <a:cs typeface="IBM Plex Sans" pitchFamily="34" charset="-120"/>
+              </a:rPr>
+              <a:t>A user edits video and finds their computer slow. Explain how each of the three characteristics could improve its performance.</a:t>
+            </a:r>
+            <a:endParaRPr lang="en-US" sz="1700" dirty="0"/>
+          </a:p>
+        </p:txBody>
+      </p:sp>
+      <p:sp>
+        <p:nvSpPr>
+          <p:cNvPr id="17" name="Shape 15"/>
+          <p:cNvSpPr/>
+          <p:nvPr/>
+        </p:nvSpPr>
+        <p:spPr>
+          <a:xfrm>
+            <a:off x="10515600" y="4727448"/>
+            <a:ext cx="868680" cy="493776"/>
+          </a:xfrm>
+          <a:prstGeom prst="roundRect">
+            <a:avLst>
+              <a:gd name="adj" fmla="val 18519"/>
+            </a:avLst>
+          </a:prstGeom>
+          <a:solidFill>
+            <a:srgbClr val="EEF2FB"/>
+          </a:solidFill>
+          <a:ln/>
+        </p:spPr>
+      </p:sp>
+      <p:sp>
+        <p:nvSpPr>
+          <p:cNvPr id="18" name="Text 16"/>
+          <p:cNvSpPr txBox="1"/>
+          <p:nvPr/>
+        </p:nvSpPr>
+        <p:spPr>
+          <a:xfrm>
+            <a:off x="10515600" y="4727448"/>
+            <a:ext cx="868680" cy="493776"/>
+          </a:xfrm>
+          <a:prstGeom prst="rect">
+            <a:avLst/>
+          </a:prstGeom>
+          <a:noFill/>
+          <a:ln/>
+        </p:spPr>
+        <p:txBody>
+          <a:bodyPr wrap="square" lIns="0" tIns="0" rIns="0" bIns="0" rtlCol="0" anchor="ctr"/>
+          <a:lstStyle/>
+          <a:p>
+            <a:pPr algn="ctr" indent="0" marL="0">
+              <a:buNone/>
+            </a:pPr>
+            <a:r>
+              <a:rPr lang="en-US" sz="1500" b="1" dirty="0">
+                <a:solidFill>
+                  <a:srgbClr val="2D63FF"/>
+                </a:solidFill>
+                <a:latin typeface="IBM Plex Mono" pitchFamily="34" charset="0"/>
+                <a:ea typeface="IBM Plex Mono" pitchFamily="34" charset="-122"/>
+                <a:cs typeface="IBM Plex Mono" pitchFamily="34" charset="-120"/>
+              </a:rPr>
+              <a:t>[6]</a:t>
+            </a:r>
+            <a:endParaRPr lang="en-US" sz="1500" dirty="0"/>
+          </a:p>
+        </p:txBody>
+      </p:sp>
+    </p:spTree>
+  </p:cSld>
+  <p:clrMapOvr>
+    <a:masterClrMapping/>
+  </p:clrMapOvr>
+</p:sld>
+</file>
+
+<file path=ppt/slides/slide15.xml><?xml version="1.0" encoding="utf-8"?>
+<p:sld xmlns:a="http://schemas.openxmlformats.org/drawingml/2006/main" xmlns:r="http://schemas.openxmlformats.org/officeDocument/2006/relationships" xmlns:p="http://schemas.openxmlformats.org/presentationml/2006/main">
+  <p:cSld name="Slide 15">
     <p:bg>
       <p:bgPr>
         <a:solidFill>
